--- a/presentation/NoteQuiz_최종발표.pptx
+++ b/presentation/NoteQuiz_최종발표.pptx
@@ -2,38 +2,39 @@
 <file path=ppt/presentation.xml><?xml version="1.0" encoding="utf-8"?>
 <p:presentation xmlns:p="http://schemas.openxmlformats.org/presentationml/2006/main">
   <p:sldMasterIdLst>
-    <p:sldMasterId xmlns:r="http://schemas.openxmlformats.org/officeDocument/2006/relationships" id="2147483648" r:id="Re12625e95f784edd"/>
+    <p:sldMasterId xmlns:r="http://schemas.openxmlformats.org/officeDocument/2006/relationships" id="2147483648" r:id="Rbf9fa175e90d4917"/>
   </p:sldMasterIdLst>
   <p:notesMasterIdLst>
-    <p:notesMasterId xmlns:r="http://schemas.openxmlformats.org/officeDocument/2006/relationships" r:id="R2a58d9a37e324332"/>
+    <p:notesMasterId xmlns:r="http://schemas.openxmlformats.org/officeDocument/2006/relationships" r:id="R6011da9577984d71"/>
   </p:notesMasterIdLst>
   <p:sldIdLst>
-    <p:sldId xmlns:r="http://schemas.openxmlformats.org/officeDocument/2006/relationships" id="256" r:id="Rc35512a3dd734985"/>
-    <p:sldId xmlns:r="http://schemas.openxmlformats.org/officeDocument/2006/relationships" id="257" r:id="R3c957b05563d484c"/>
-    <p:sldId xmlns:r="http://schemas.openxmlformats.org/officeDocument/2006/relationships" id="258" r:id="R0f695593038e4f72"/>
-    <p:sldId xmlns:r="http://schemas.openxmlformats.org/officeDocument/2006/relationships" id="259" r:id="Ra81b895f56a04455"/>
-    <p:sldId xmlns:r="http://schemas.openxmlformats.org/officeDocument/2006/relationships" id="260" r:id="Rde5725ebf5c74857"/>
-    <p:sldId xmlns:r="http://schemas.openxmlformats.org/officeDocument/2006/relationships" id="261" r:id="Rf776b40f724b4438"/>
-    <p:sldId xmlns:r="http://schemas.openxmlformats.org/officeDocument/2006/relationships" id="262" r:id="Raa5e8fb958e142e6"/>
-    <p:sldId xmlns:r="http://schemas.openxmlformats.org/officeDocument/2006/relationships" id="263" r:id="Rd3ec5c35e8a54325"/>
-    <p:sldId xmlns:r="http://schemas.openxmlformats.org/officeDocument/2006/relationships" id="264" r:id="R2c74a4df8ff340f2"/>
-    <p:sldId xmlns:r="http://schemas.openxmlformats.org/officeDocument/2006/relationships" id="265" r:id="R22606a05690e4146"/>
-    <p:sldId xmlns:r="http://schemas.openxmlformats.org/officeDocument/2006/relationships" id="266" r:id="Rf2ea05576aac44d0"/>
-    <p:sldId xmlns:r="http://schemas.openxmlformats.org/officeDocument/2006/relationships" id="267" r:id="Rf40619c723c848b4"/>
-    <p:sldId xmlns:r="http://schemas.openxmlformats.org/officeDocument/2006/relationships" id="268" r:id="Rca2fcde096d34c01"/>
-    <p:sldId xmlns:r="http://schemas.openxmlformats.org/officeDocument/2006/relationships" id="269" r:id="R07b387b937de4472"/>
-    <p:sldId xmlns:r="http://schemas.openxmlformats.org/officeDocument/2006/relationships" id="270" r:id="R201c2ae5a6de49f4"/>
-    <p:sldId xmlns:r="http://schemas.openxmlformats.org/officeDocument/2006/relationships" id="271" r:id="Rb9617a25c85d4a70"/>
-    <p:sldId xmlns:r="http://schemas.openxmlformats.org/officeDocument/2006/relationships" id="272" r:id="R6cf67ba4eb5c45fa"/>
-    <p:sldId xmlns:r="http://schemas.openxmlformats.org/officeDocument/2006/relationships" id="273" r:id="R80d69748d8124a7e"/>
-    <p:sldId xmlns:r="http://schemas.openxmlformats.org/officeDocument/2006/relationships" id="274" r:id="Rcd851ee8cac14007"/>
-    <p:sldId xmlns:r="http://schemas.openxmlformats.org/officeDocument/2006/relationships" id="275" r:id="R4c5602778de9411e"/>
-    <p:sldId xmlns:r="http://schemas.openxmlformats.org/officeDocument/2006/relationships" id="276" r:id="Rdd5ba117ac594a63"/>
-    <p:sldId xmlns:r="http://schemas.openxmlformats.org/officeDocument/2006/relationships" id="277" r:id="R1cedbaf37ec14107"/>
-    <p:sldId xmlns:r="http://schemas.openxmlformats.org/officeDocument/2006/relationships" id="278" r:id="Rf966067d9ca041f4"/>
-    <p:sldId xmlns:r="http://schemas.openxmlformats.org/officeDocument/2006/relationships" id="279" r:id="R207a867154804c1e"/>
-    <p:sldId xmlns:r="http://schemas.openxmlformats.org/officeDocument/2006/relationships" id="280" r:id="R5380f2860c21434d"/>
-    <p:sldId xmlns:r="http://schemas.openxmlformats.org/officeDocument/2006/relationships" id="281" r:id="R88bad4d2e0e3456a"/>
+    <p:sldId xmlns:r="http://schemas.openxmlformats.org/officeDocument/2006/relationships" id="256" r:id="Rcd56ed1b4aab4e2f"/>
+    <p:sldId xmlns:r="http://schemas.openxmlformats.org/officeDocument/2006/relationships" id="257" r:id="R26f7d57e6b5246e0"/>
+    <p:sldId xmlns:r="http://schemas.openxmlformats.org/officeDocument/2006/relationships" id="258" r:id="R76bc399a248f44a1"/>
+    <p:sldId xmlns:r="http://schemas.openxmlformats.org/officeDocument/2006/relationships" id="259" r:id="R971b8ecc33374118"/>
+    <p:sldId xmlns:r="http://schemas.openxmlformats.org/officeDocument/2006/relationships" id="260" r:id="Rebe273849133495a"/>
+    <p:sldId xmlns:r="http://schemas.openxmlformats.org/officeDocument/2006/relationships" id="261" r:id="R776f3470b1d449e5"/>
+    <p:sldId xmlns:r="http://schemas.openxmlformats.org/officeDocument/2006/relationships" id="262" r:id="R09ed6402248842d7"/>
+    <p:sldId xmlns:r="http://schemas.openxmlformats.org/officeDocument/2006/relationships" id="263" r:id="R70f6b7691228454e"/>
+    <p:sldId xmlns:r="http://schemas.openxmlformats.org/officeDocument/2006/relationships" id="264" r:id="Rce2d62607575459b"/>
+    <p:sldId xmlns:r="http://schemas.openxmlformats.org/officeDocument/2006/relationships" id="265" r:id="R6955687b212e4a55"/>
+    <p:sldId xmlns:r="http://schemas.openxmlformats.org/officeDocument/2006/relationships" id="266" r:id="Rc02933fa6f6f4bd8"/>
+    <p:sldId xmlns:r="http://schemas.openxmlformats.org/officeDocument/2006/relationships" id="267" r:id="R24a3f3f81e294e1e"/>
+    <p:sldId xmlns:r="http://schemas.openxmlformats.org/officeDocument/2006/relationships" id="268" r:id="Rb5343ddd68054312"/>
+    <p:sldId xmlns:r="http://schemas.openxmlformats.org/officeDocument/2006/relationships" id="282" r:id="R1fb8876e3cd34525"/>
+    <p:sldId xmlns:r="http://schemas.openxmlformats.org/officeDocument/2006/relationships" id="269" r:id="Re2193d5e2a314311"/>
+    <p:sldId xmlns:r="http://schemas.openxmlformats.org/officeDocument/2006/relationships" id="280" r:id="R6783dfe5e62c41d6"/>
+    <p:sldId xmlns:r="http://schemas.openxmlformats.org/officeDocument/2006/relationships" id="270" r:id="R0255ed4b2f8846a2"/>
+    <p:sldId xmlns:r="http://schemas.openxmlformats.org/officeDocument/2006/relationships" id="271" r:id="Rbb51d87d5c6c4583"/>
+    <p:sldId xmlns:r="http://schemas.openxmlformats.org/officeDocument/2006/relationships" id="272" r:id="R8e0ddf3b63d743f8"/>
+    <p:sldId xmlns:r="http://schemas.openxmlformats.org/officeDocument/2006/relationships" id="273" r:id="Re8fd5293a77d4153"/>
+    <p:sldId xmlns:r="http://schemas.openxmlformats.org/officeDocument/2006/relationships" id="274" r:id="R1de456b40a1a4468"/>
+    <p:sldId xmlns:r="http://schemas.openxmlformats.org/officeDocument/2006/relationships" id="275" r:id="Rdd3dc3ad4f3e4bc1"/>
+    <p:sldId xmlns:r="http://schemas.openxmlformats.org/officeDocument/2006/relationships" id="276" r:id="Rbba75fb7d974464a"/>
+    <p:sldId xmlns:r="http://schemas.openxmlformats.org/officeDocument/2006/relationships" id="277" r:id="Ree95200236854117"/>
+    <p:sldId xmlns:r="http://schemas.openxmlformats.org/officeDocument/2006/relationships" id="278" r:id="R2ec8741835f045e4"/>
+    <p:sldId xmlns:r="http://schemas.openxmlformats.org/officeDocument/2006/relationships" id="279" r:id="R6297645dcca4421a"/>
+    <p:sldId xmlns:r="http://schemas.openxmlformats.org/officeDocument/2006/relationships" id="281" r:id="R7c697ba4e4ea487c"/>
   </p:sldIdLst>
   <p:sldSz cx="9144000" cy="5143500"/>
   <p:notesSz cx="6858000" cy="9144000"/>
@@ -608,22 +609,7 @@
           <a:lstStyle xmlns:a="http://schemas.openxmlformats.org/drawingml/2006/main"/>
           <a:p xmlns:a="http://schemas.openxmlformats.org/drawingml/2006/main">
             <a:r>
-              <a:t>안녕하세요. 2025106293 zhaoboda입니다. 강의 노트를 핵심 요약과 복습 퀴즈로 연결하는 NoteQuiz를 소개하겠습니다.</a:t>
-            </a:r>
-          </a:p>
-          <a:p xmlns:a="http://schemas.openxmlformats.org/drawingml/2006/main">
-            <a:r>
-              <a:t/>
-            </a:r>
-          </a:p>
-          <a:p xmlns:a="http://schemas.openxmlformats.org/drawingml/2006/main">
-            <a:r>
-              <a:t>[근거] GAI3008-W07-2026-v1.1.1.pdf; 사용자 제공 NoteQuiz 소개; 제공 발표 템플릿.</a:t>
-            </a:r>
-          </a:p>
-          <a:p xmlns:a="http://schemas.openxmlformats.org/drawingml/2006/main">
-            <a:r>
-              <a:t/>
+              <a:t>안녕하세요. NoteQuiz를 기획한 zhaoboda입니다. 강의 노트를 요약과 복습 퀴즈로 연결한 UI 프로토타입을 소개하겠습니다.</a:t>
             </a:r>
           </a:p>
         </p:txBody>
@@ -693,22 +679,7 @@
           <a:lstStyle xmlns:a="http://schemas.openxmlformats.org/drawingml/2006/main"/>
           <a:p xmlns:a="http://schemas.openxmlformats.org/drawingml/2006/main">
             <a:r>
-              <a:t>지금부터 1분 데모를 보여 드리겠습니다. 예시 강의를 넣고 요약을 확인한 뒤 퀴즈와 해설로 이동합니다. 결과는 미리 작성한 예시이며 실제 채점 결과가 아닙니다. 마지막에는 로딩, 오류, 빈 상태와 넓은 화면을 확인하겠습니다. 이어서 15초 동안 같은 문항이 해설까지 유지되는 점과 다시 시도 버튼을 보겠습니다.</a:t>
-            </a:r>
-          </a:p>
-          <a:p xmlns:a="http://schemas.openxmlformats.org/drawingml/2006/main">
-            <a:r>
-              <a:t/>
-            </a:r>
-          </a:p>
-          <a:p xmlns:a="http://schemas.openxmlformats.org/drawingml/2006/main">
-            <a:r>
-              <a:t>[근거] GAI3008-W07-2026-v1.1.1.pdf; 사용자 제공 NoteQuiz 소개; 제공 발표 템플릿.</a:t>
-            </a:r>
-          </a:p>
-          <a:p xmlns:a="http://schemas.openxmlformats.org/drawingml/2006/main">
-            <a:r>
-              <a:t/>
+              <a:t>부록 B1입니다. 입력, 퀴즈, 해설, 결과의 실제 브라우저 화면입니다.</a:t>
             </a:r>
           </a:p>
         </p:txBody>
@@ -778,22 +749,7 @@
           <a:lstStyle xmlns:a="http://schemas.openxmlformats.org/drawingml/2006/main"/>
           <a:p xmlns:a="http://schemas.openxmlformats.org/drawingml/2006/main">
             <a:r>
-              <a:t>이번 과제에서 화면을 간단하게 만드는 것과 학습에 필요한 정보를 남기는 것은 함께 판단해야 한다는 점을 배웠습니다. 다음에는 실제 학생에게 해설과 근거를 찾게 하며 이 가설을 검증하겠습니다.</a:t>
-            </a:r>
-          </a:p>
-          <a:p xmlns:a="http://schemas.openxmlformats.org/drawingml/2006/main">
-            <a:r>
-              <a:t/>
-            </a:r>
-          </a:p>
-          <a:p xmlns:a="http://schemas.openxmlformats.org/drawingml/2006/main">
-            <a:r>
-              <a:t>[근거] GAI3008-W07-2026-v1.1.1.pdf; 사용자 제공 NoteQuiz 소개; 제공 발표 템플릿.</a:t>
-            </a:r>
-          </a:p>
-          <a:p xmlns:a="http://schemas.openxmlformats.org/drawingml/2006/main">
-            <a:r>
-              <a:t/>
+              <a:t>세 상태는 위젯 테스트 렌더링이고, 넓은 화면은 1280×800 위젯 테스트입니다. 840px 이상에서 측면 안내와 3열 요약이 보입니다.</a:t>
             </a:r>
           </a:p>
         </p:txBody>
@@ -863,22 +819,7 @@
           <a:lstStyle xmlns:a="http://schemas.openxmlformats.org/drawingml/2006/main"/>
           <a:p xmlns:a="http://schemas.openxmlformats.org/drawingml/2006/main">
             <a:r>
-              <a:t>질문 받겠습니다. 화면, 원칙, 데이터 구조에 관한 근거는 뒤의 부록에서 확인할 수 있습니다.</a:t>
-            </a:r>
-          </a:p>
-          <a:p xmlns:a="http://schemas.openxmlformats.org/drawingml/2006/main">
-            <a:r>
-              <a:t/>
-            </a:r>
-          </a:p>
-          <a:p xmlns:a="http://schemas.openxmlformats.org/drawingml/2006/main">
-            <a:r>
-              <a:t>[근거] GAI3008-W07-2026-v1.1.1.pdf; 사용자 제공 NoteQuiz 소개; 제공 발표 템플릿.</a:t>
-            </a:r>
-          </a:p>
-          <a:p xmlns:a="http://schemas.openxmlformats.org/drawingml/2006/main">
-            <a:r>
-              <a:t/>
+              <a:t>원칙 카드의 핵심 네 항목과 추가 적용 P03, P05, P07, P08을 함께 기록했습니다.</a:t>
             </a:r>
           </a:p>
         </p:txBody>
@@ -948,22 +889,7 @@
           <a:lstStyle xmlns:a="http://schemas.openxmlformats.org/drawingml/2006/main"/>
           <a:p xmlns:a="http://schemas.openxmlformats.org/drawingml/2006/main">
             <a:r>
-              <a:t>부록은 본문 6분에 읽지 않고 질문이 있을 때만 사용합니다.</a:t>
-            </a:r>
-          </a:p>
-          <a:p xmlns:a="http://schemas.openxmlformats.org/drawingml/2006/main">
-            <a:r>
-              <a:t/>
-            </a:r>
-          </a:p>
-          <a:p xmlns:a="http://schemas.openxmlformats.org/drawingml/2006/main">
-            <a:r>
-              <a:t>[근거] GAI3008-W07-2026-v1.1.1.pdf; 사용자 제공 NoteQuiz 소개; 제공 발표 템플릿.</a:t>
-            </a:r>
-          </a:p>
-          <a:p xmlns:a="http://schemas.openxmlformats.org/drawingml/2006/main">
-            <a:r>
-              <a:t/>
+              <a:t>U는 학생 발화를 한국어로 옮긴 기록이고 A는 AI 분석 질문입니다. U0은 반론 요청이 아니며, 쟁점 3·4는 AI 검토안으로만 표시했습니다.</a:t>
             </a:r>
           </a:p>
         </p:txBody>
@@ -1033,22 +959,7 @@
           <a:lstStyle xmlns:a="http://schemas.openxmlformats.org/drawingml/2006/main"/>
           <a:p xmlns:a="http://schemas.openxmlformats.org/drawingml/2006/main">
             <a:r>
-              <a:t>이미지는 이 프로젝트의 Flutter UI 실행 화면입니다. 결과는 사전 작성된 예시이며 실제 채점이 아닙니다.</a:t>
-            </a:r>
-          </a:p>
-          <a:p xmlns:a="http://schemas.openxmlformats.org/drawingml/2006/main">
-            <a:r>
-              <a:t/>
-            </a:r>
-          </a:p>
-          <a:p xmlns:a="http://schemas.openxmlformats.org/drawingml/2006/main">
-            <a:r>
-              <a:t>[근거] GAI3008-W07-2026-v1.1.1.pdf; 사용자 제공 NoteQuiz 소개; 제공 발표 템플릿.</a:t>
-            </a:r>
-          </a:p>
-          <a:p xmlns:a="http://schemas.openxmlformats.org/drawingml/2006/main">
-            <a:r>
-              <a:t/>
+              <a:t>자가평가와 제출 상태입니다. GitHub 원격은 등록되어 있고, LMS 제출과 6분 실제 시간 측정은 제출자가 확인합니다.</a:t>
             </a:r>
           </a:p>
         </p:txBody>
@@ -1116,31 +1027,7 @@
         <p:txBody>
           <a:bodyPr xmlns:a="http://schemas.openxmlformats.org/drawingml/2006/main"/>
           <a:lstStyle xmlns:a="http://schemas.openxmlformats.org/drawingml/2006/main"/>
-          <a:p xmlns:a="http://schemas.openxmlformats.org/drawingml/2006/main">
-            <a:r>
-              <a:t>원칙 카드의 다섯 칸을 모두 기록했습니다. 사용자 리뷰가 네트워크의 기술적 원인을 증명한다고 주장하지 않습니다.</a:t>
-            </a:r>
-          </a:p>
-          <a:p xmlns:a="http://schemas.openxmlformats.org/drawingml/2006/main">
-            <a:r>
-              <a:t/>
-            </a:r>
-          </a:p>
-          <a:p xmlns:a="http://schemas.openxmlformats.org/drawingml/2006/main">
-            <a:r>
-              <a:t>[근거] GAI3008-W07-2026-v1.1.1.pdf; 사용자 제공 NoteQuiz 소개; 제공 발표 템플릿.</a:t>
-            </a:r>
-          </a:p>
-          <a:p xmlns:a="http://schemas.openxmlformats.org/drawingml/2006/main">
-            <a:r>
-              <a:t>https://itunes.apple.com/us/rss/customerreviews/id=6463744184/sortBy=mostRecent/json</a:t>
-            </a:r>
-          </a:p>
-          <a:p xmlns:a="http://schemas.openxmlformats.org/drawingml/2006/main">
-            <a:r>
-              <a:t>https://www.nngroup.com/articles/ten-usability-heuristics/</a:t>
-            </a:r>
-          </a:p>
+          <a:p xmlns:a="http://schemas.openxmlformats.org/drawingml/2006/main"/>
         </p:txBody>
       </p:sp>
       <p:sp>
@@ -1206,31 +1093,7 @@
         <p:txBody>
           <a:bodyPr xmlns:a="http://schemas.openxmlformats.org/drawingml/2006/main"/>
           <a:lstStyle xmlns:a="http://schemas.openxmlformats.org/drawingml/2006/main"/>
-          <a:p xmlns:a="http://schemas.openxmlformats.org/drawingml/2006/main">
-            <a:r>
-              <a:t>원칙 카드의 다섯 칸을 모두 기록했습니다. 사용자 리뷰가 네트워크의 기술적 원인을 증명한다고 주장하지 않습니다.</a:t>
-            </a:r>
-          </a:p>
-          <a:p xmlns:a="http://schemas.openxmlformats.org/drawingml/2006/main">
-            <a:r>
-              <a:t/>
-            </a:r>
-          </a:p>
-          <a:p xmlns:a="http://schemas.openxmlformats.org/drawingml/2006/main">
-            <a:r>
-              <a:t>[근거] GAI3008-W07-2026-v1.1.1.pdf; 사용자 제공 NoteQuiz 소개; 제공 발표 템플릿.</a:t>
-            </a:r>
-          </a:p>
-          <a:p xmlns:a="http://schemas.openxmlformats.org/drawingml/2006/main">
-            <a:r>
-              <a:t>https://itunes.apple.com/us/rss/customerreviews/id=6463744184/sortBy=mostRecent/json</a:t>
-            </a:r>
-          </a:p>
-          <a:p xmlns:a="http://schemas.openxmlformats.org/drawingml/2006/main">
-            <a:r>
-              <a:t>https://www.nngroup.com/articles/ten-usability-heuristics/</a:t>
-            </a:r>
-          </a:p>
+          <a:p xmlns:a="http://schemas.openxmlformats.org/drawingml/2006/main"/>
         </p:txBody>
       </p:sp>
       <p:sp>
@@ -1296,31 +1159,7 @@
         <p:txBody>
           <a:bodyPr xmlns:a="http://schemas.openxmlformats.org/drawingml/2006/main"/>
           <a:lstStyle xmlns:a="http://schemas.openxmlformats.org/drawingml/2006/main"/>
-          <a:p xmlns:a="http://schemas.openxmlformats.org/drawingml/2006/main">
-            <a:r>
-              <a:t>원칙 카드의 다섯 칸을 모두 기록했습니다. 사용자 리뷰가 네트워크의 기술적 원인을 증명한다고 주장하지 않습니다.</a:t>
-            </a:r>
-          </a:p>
-          <a:p xmlns:a="http://schemas.openxmlformats.org/drawingml/2006/main">
-            <a:r>
-              <a:t/>
-            </a:r>
-          </a:p>
-          <a:p xmlns:a="http://schemas.openxmlformats.org/drawingml/2006/main">
-            <a:r>
-              <a:t>[근거] GAI3008-W07-2026-v1.1.1.pdf; 사용자 제공 NoteQuiz 소개; 제공 발표 템플릿.</a:t>
-            </a:r>
-          </a:p>
-          <a:p xmlns:a="http://schemas.openxmlformats.org/drawingml/2006/main">
-            <a:r>
-              <a:t>https://itunes.apple.com/us/rss/customerreviews/id=6463744184/sortBy=mostRecent/json</a:t>
-            </a:r>
-          </a:p>
-          <a:p xmlns:a="http://schemas.openxmlformats.org/drawingml/2006/main">
-            <a:r>
-              <a:t>https://www.nngroup.com/articles/ten-usability-heuristics/</a:t>
-            </a:r>
-          </a:p>
+          <a:p xmlns:a="http://schemas.openxmlformats.org/drawingml/2006/main"/>
         </p:txBody>
       </p:sp>
       <p:sp>
@@ -1386,26 +1225,7 @@
         <p:txBody>
           <a:bodyPr xmlns:a="http://schemas.openxmlformats.org/drawingml/2006/main"/>
           <a:lstStyle xmlns:a="http://schemas.openxmlformats.org/drawingml/2006/main"/>
-          <a:p xmlns:a="http://schemas.openxmlformats.org/drawingml/2006/main">
-            <a:r>
-              <a:t>기록은 현재 대화에서 실제로 만든 제안과 검토 과정입니다. 과거에 학생이 했다고 꾸민 활동이나 수행하지 않은 실험을 쓰지 않았습니다.</a:t>
-            </a:r>
-          </a:p>
-          <a:p xmlns:a="http://schemas.openxmlformats.org/drawingml/2006/main">
-            <a:r>
-              <a:t/>
-            </a:r>
-          </a:p>
-          <a:p xmlns:a="http://schemas.openxmlformats.org/drawingml/2006/main">
-            <a:r>
-              <a:t>[근거] GAI3008-W07-2026-v1.1.1.pdf; 사용자 제공 NoteQuiz 소개; 제공 발표 템플릿.</a:t>
-            </a:r>
-          </a:p>
-          <a:p xmlns:a="http://schemas.openxmlformats.org/drawingml/2006/main">
-            <a:r>
-              <a:t/>
-            </a:r>
-          </a:p>
+          <a:p xmlns:a="http://schemas.openxmlformats.org/drawingml/2006/main"/>
         </p:txBody>
       </p:sp>
       <p:sp>
@@ -1471,26 +1291,7 @@
         <p:txBody>
           <a:bodyPr xmlns:a="http://schemas.openxmlformats.org/drawingml/2006/main"/>
           <a:lstStyle xmlns:a="http://schemas.openxmlformats.org/drawingml/2006/main"/>
-          <a:p xmlns:a="http://schemas.openxmlformats.org/drawingml/2006/main">
-            <a:r>
-              <a:t>실제로 확인한 근거를 표시하고 점수를 임의로 부여하지 않았습니다. 본인의 발표 연습과 GitHub URL 등록, LMS 제출은 따로 해야 합니다.</a:t>
-            </a:r>
-          </a:p>
-          <a:p xmlns:a="http://schemas.openxmlformats.org/drawingml/2006/main">
-            <a:r>
-              <a:t/>
-            </a:r>
-          </a:p>
-          <a:p xmlns:a="http://schemas.openxmlformats.org/drawingml/2006/main">
-            <a:r>
-              <a:t>[근거] GAI3008-W07-2026-v1.1.1.pdf; 사용자 제공 NoteQuiz 소개; 제공 발표 템플릿.</a:t>
-            </a:r>
-          </a:p>
-          <a:p xmlns:a="http://schemas.openxmlformats.org/drawingml/2006/main">
-            <a:r>
-              <a:t/>
-            </a:r>
-          </a:p>
+          <a:p xmlns:a="http://schemas.openxmlformats.org/drawingml/2006/main"/>
         </p:txBody>
       </p:sp>
       <p:sp>
@@ -1558,22 +1359,7 @@
           <a:lstStyle xmlns:a="http://schemas.openxmlformats.org/drawingml/2006/main"/>
           <a:p xmlns:a="http://schemas.openxmlformats.org/drawingml/2006/main">
             <a:r>
-              <a:t>개요부터 문제, 해결 방법, 셀프 논증, Flutter 구현 순서로 설명하고 마지막에 데모를 보여 드리겠습니다. 표지와 목차 시간은 개요 45초 안에 포함합니다.</a:t>
-            </a:r>
-          </a:p>
-          <a:p xmlns:a="http://schemas.openxmlformats.org/drawingml/2006/main">
-            <a:r>
-              <a:t/>
-            </a:r>
-          </a:p>
-          <a:p xmlns:a="http://schemas.openxmlformats.org/drawingml/2006/main">
-            <a:r>
-              <a:t>[근거] GAI3008-W07-2026-v1.1.1.pdf; 사용자 제공 NoteQuiz 소개; 제공 발표 템플릿.</a:t>
-            </a:r>
-          </a:p>
-          <a:p xmlns:a="http://schemas.openxmlformats.org/drawingml/2006/main">
-            <a:r>
-              <a:t/>
+              <a:t>대상은 긴 강의 자료를 정리하고 시험 전에 빠르게 복습하려는 대학생입니다. 입력, 요약, 퀴즈, 해설, 결과의 다섯 화면입니다. 실제 AI 호출은 없고 로컬 GET 예시만 사용합니다.</a:t>
             </a:r>
           </a:p>
         </p:txBody>
@@ -1641,26 +1427,7 @@
         <p:txBody>
           <a:bodyPr xmlns:a="http://schemas.openxmlformats.org/drawingml/2006/main"/>
           <a:lstStyle xmlns:a="http://schemas.openxmlformats.org/drawingml/2006/main"/>
-          <a:p xmlns:a="http://schemas.openxmlformats.org/drawingml/2006/main">
-            <a:r>
-              <a:t>페르소나의 나이와 상황은 설계용 가정이며 인터뷰 결과가 아닙니다.</a:t>
-            </a:r>
-          </a:p>
-          <a:p xmlns:a="http://schemas.openxmlformats.org/drawingml/2006/main">
-            <a:r>
-              <a:t/>
-            </a:r>
-          </a:p>
-          <a:p xmlns:a="http://schemas.openxmlformats.org/drawingml/2006/main">
-            <a:r>
-              <a:t>[근거] GAI3008-W07-2026-v1.1.1.pdf; 사용자 제공 NoteQuiz 소개; 제공 발표 템플릿.</a:t>
-            </a:r>
-          </a:p>
-          <a:p xmlns:a="http://schemas.openxmlformats.org/drawingml/2006/main">
-            <a:r>
-              <a:t/>
-            </a:r>
-          </a:p>
+          <a:p xmlns:a="http://schemas.openxmlformats.org/drawingml/2006/main"/>
         </p:txBody>
       </p:sp>
       <p:sp>
@@ -1726,26 +1493,7 @@
         <p:txBody>
           <a:bodyPr xmlns:a="http://schemas.openxmlformats.org/drawingml/2006/main"/>
           <a:lstStyle xmlns:a="http://schemas.openxmlformats.org/drawingml/2006/main"/>
-          <a:p xmlns:a="http://schemas.openxmlformats.org/drawingml/2006/main">
-            <a:r>
-              <a:t>리뷰가 없는 단계에 가짜 리뷰를 넣지 않았습니다. 확장 네 줄은 기기, AI 기회, 원칙, 데이터입니다.</a:t>
-            </a:r>
-          </a:p>
-          <a:p xmlns:a="http://schemas.openxmlformats.org/drawingml/2006/main">
-            <a:r>
-              <a:t/>
-            </a:r>
-          </a:p>
-          <a:p xmlns:a="http://schemas.openxmlformats.org/drawingml/2006/main">
-            <a:r>
-              <a:t>[근거] GAI3008-W07-2026-v1.1.1.pdf; 사용자 제공 NoteQuiz 소개; 제공 발표 템플릿.</a:t>
-            </a:r>
-          </a:p>
-          <a:p xmlns:a="http://schemas.openxmlformats.org/drawingml/2006/main">
-            <a:r>
-              <a:t/>
-            </a:r>
-          </a:p>
+          <a:p xmlns:a="http://schemas.openxmlformats.org/drawingml/2006/main"/>
         </p:txBody>
       </p:sp>
       <p:sp>
@@ -1811,26 +1559,7 @@
         <p:txBody>
           <a:bodyPr xmlns:a="http://schemas.openxmlformats.org/drawingml/2006/main"/>
           <a:lstStyle xmlns:a="http://schemas.openxmlformats.org/drawingml/2006/main"/>
-          <a:p xmlns:a="http://schemas.openxmlformats.org/drawingml/2006/main">
-            <a:r>
-              <a:t>여섯 시각을 모두 펼친 뒤 UI로 확인 가능한 일관성 문제를 우선했습니다. 내부 API나 데이터 구조를 조사하지 않았으므로 모든 기술적 원인 후보와 5 Why 후반은 가설입니다.</a:t>
-            </a:r>
-          </a:p>
-          <a:p xmlns:a="http://schemas.openxmlformats.org/drawingml/2006/main">
-            <a:r>
-              <a:t/>
-            </a:r>
-          </a:p>
-          <a:p xmlns:a="http://schemas.openxmlformats.org/drawingml/2006/main">
-            <a:r>
-              <a:t>[근거] GAI3008-W07-2026-v1.1.1.pdf; 사용자 제공 NoteQuiz 소개; 제공 발표 템플릿.</a:t>
-            </a:r>
-          </a:p>
-          <a:p xmlns:a="http://schemas.openxmlformats.org/drawingml/2006/main">
-            <a:r>
-              <a:t/>
-            </a:r>
-          </a:p>
+          <a:p xmlns:a="http://schemas.openxmlformats.org/drawingml/2006/main"/>
         </p:txBody>
       </p:sp>
       <p:sp>
@@ -1896,41 +1625,7 @@
         <p:txBody>
           <a:bodyPr xmlns:a="http://schemas.openxmlformats.org/drawingml/2006/main"/>
           <a:lstStyle xmlns:a="http://schemas.openxmlformats.org/drawingml/2006/main"/>
-          <a:p xmlns:a="http://schemas.openxmlformats.org/drawingml/2006/main">
-            <a:r>
-              <a:t>모든 화면 구현은 lib/main.dart에 있습니다. 번호와 비즈니스 명칭을 코드·문서·README에서 동일하게 사용합니다.</a:t>
-            </a:r>
-          </a:p>
-          <a:p xmlns:a="http://schemas.openxmlformats.org/drawingml/2006/main">
-            <a:r>
-              <a:t>목적: 긴 강의 텍스트를 붙여넣고 복습을 시작할 수 있게 한다.</a:t>
-            </a:r>
-          </a:p>
-          <a:p xmlns:a="http://schemas.openxmlformats.org/drawingml/2006/main">
-            <a:r>
-              <a:t>내용: I-1 입력 영역, I-2 사전 작성 예시, I-3 예시 요약 확인을 위에서 아래로 배치한다. 빈 입력은 같은 영역에서 안내한다.</a:t>
-            </a:r>
-          </a:p>
-          <a:p xmlns:a="http://schemas.openxmlformats.org/drawingml/2006/main">
-            <a:r>
-              <a:t>의도: 입력 위치를 크게 보여 시작 부담을 줄인다. 버튼에 예시임을 명시하여 실제 AI 생성과 혼동하지 않게 한다.</a:t>
-            </a:r>
-          </a:p>
-          <a:p xmlns:a="http://schemas.openxmlformats.org/drawingml/2006/main">
-            <a:r>
-              <a:t/>
-            </a:r>
-          </a:p>
-          <a:p xmlns:a="http://schemas.openxmlformats.org/drawingml/2006/main">
-            <a:r>
-              <a:t>[근거] GAI3008-W07-2026-v1.1.1.pdf; 사용자 제공 NoteQuiz 소개; 제공 발표 템플릿.</a:t>
-            </a:r>
-          </a:p>
-          <a:p xmlns:a="http://schemas.openxmlformats.org/drawingml/2006/main">
-            <a:r>
-              <a:t/>
-            </a:r>
-          </a:p>
+          <a:p xmlns:a="http://schemas.openxmlformats.org/drawingml/2006/main"/>
         </p:txBody>
       </p:sp>
       <p:sp>
@@ -1996,41 +1691,7 @@
         <p:txBody>
           <a:bodyPr xmlns:a="http://schemas.openxmlformats.org/drawingml/2006/main"/>
           <a:lstStyle xmlns:a="http://schemas.openxmlformats.org/drawingml/2006/main"/>
-          <a:p xmlns:a="http://schemas.openxmlformats.org/drawingml/2006/main">
-            <a:r>
-              <a:t>모든 화면 구현은 lib/main.dart에 있습니다. 번호와 비즈니스 명칭을 코드·문서·README에서 동일하게 사용합니다.</a:t>
-            </a:r>
-          </a:p>
-          <a:p xmlns:a="http://schemas.openxmlformats.org/drawingml/2006/main">
-            <a:r>
-              <a:t>목적: 퀴즈 전에 세 가지 핵심 개념과 강의 근거를 빠르게 확인하게 한다.</a:t>
-            </a:r>
-          </a:p>
-          <a:p xmlns:a="http://schemas.openxmlformats.org/drawingml/2006/main">
-            <a:r>
-              <a:t>내용: S-1 선언형 UI, S-2 레이아웃과 제약, S-3 수평 프로토타입을 같은 카드 형식으로 표시하고 S-4로 퀴즈를 시작한다.</a:t>
-            </a:r>
-          </a:p>
-          <a:p xmlns:a="http://schemas.openxmlformats.org/drawingml/2006/main">
-            <a:r>
-              <a:t>의도: 주제명·요약·근거 순서를 반복해 비교 부담을 줄인다. 좁은 화면은 세로 스크롤, 넓은 화면은 가로 카드로 읽기 순서를 유지한다.</a:t>
-            </a:r>
-          </a:p>
-          <a:p xmlns:a="http://schemas.openxmlformats.org/drawingml/2006/main">
-            <a:r>
-              <a:t/>
-            </a:r>
-          </a:p>
-          <a:p xmlns:a="http://schemas.openxmlformats.org/drawingml/2006/main">
-            <a:r>
-              <a:t>[근거] GAI3008-W07-2026-v1.1.1.pdf; 사용자 제공 NoteQuiz 소개; 제공 발표 템플릿.</a:t>
-            </a:r>
-          </a:p>
-          <a:p xmlns:a="http://schemas.openxmlformats.org/drawingml/2006/main">
-            <a:r>
-              <a:t/>
-            </a:r>
-          </a:p>
+          <a:p xmlns:a="http://schemas.openxmlformats.org/drawingml/2006/main"/>
         </p:txBody>
       </p:sp>
       <p:sp>
@@ -2096,41 +1757,7 @@
         <p:txBody>
           <a:bodyPr xmlns:a="http://schemas.openxmlformats.org/drawingml/2006/main"/>
           <a:lstStyle xmlns:a="http://schemas.openxmlformats.org/drawingml/2006/main"/>
-          <a:p xmlns:a="http://schemas.openxmlformats.org/drawingml/2006/main">
-            <a:r>
-              <a:t>모든 화면 구현은 lib/main.dart에 있습니다. 번호와 비즈니스 명칭을 코드·문서·README에서 동일하게 사용합니다.</a:t>
-            </a:r>
-          </a:p>
-          <a:p xmlns:a="http://schemas.openxmlformats.org/drawingml/2006/main">
-            <a:r>
-              <a:t>목적: 핵심 개념을 스스로 떠올린 뒤 해설로 이동하게 한다.</a:t>
-            </a:r>
-          </a:p>
-          <a:p xmlns:a="http://schemas.openxmlformats.org/drawingml/2006/main">
-            <a:r>
-              <a:t>내용: Q-1 문항 번호와 진행 막대, Q-2 선택지, Q-3 해설 확인 순서로 표시한다. 선택 전에는 확인 버튼을 비활성화한다.</a:t>
-            </a:r>
-          </a:p>
-          <a:p xmlns:a="http://schemas.openxmlformats.org/drawingml/2006/main">
-            <a:r>
-              <a:t>의도: 진행 위치와 선택 상태를 명확히 보여 누락을 줄인다. 선택은 화면 내부 표시만 바꾸며 실제 채점이나 학습 기록 저장을 수행하지 않는다.</a:t>
-            </a:r>
-          </a:p>
-          <a:p xmlns:a="http://schemas.openxmlformats.org/drawingml/2006/main">
-            <a:r>
-              <a:t/>
-            </a:r>
-          </a:p>
-          <a:p xmlns:a="http://schemas.openxmlformats.org/drawingml/2006/main">
-            <a:r>
-              <a:t>[근거] GAI3008-W07-2026-v1.1.1.pdf; 사용자 제공 NoteQuiz 소개; 제공 발표 템플릿.</a:t>
-            </a:r>
-          </a:p>
-          <a:p xmlns:a="http://schemas.openxmlformats.org/drawingml/2006/main">
-            <a:r>
-              <a:t/>
-            </a:r>
-          </a:p>
+          <a:p xmlns:a="http://schemas.openxmlformats.org/drawingml/2006/main"/>
         </p:txBody>
       </p:sp>
       <p:sp>
@@ -2196,9 +1823,75 @@
         <p:txBody>
           <a:bodyPr xmlns:a="http://schemas.openxmlformats.org/drawingml/2006/main"/>
           <a:lstStyle xmlns:a="http://schemas.openxmlformats.org/drawingml/2006/main"/>
+          <a:p xmlns:a="http://schemas.openxmlformats.org/drawingml/2006/main"/>
+        </p:txBody>
+      </p:sp>
+      <p:sp>
+        <p:nvSpPr>
+          <p:cNvPr id="4" name="Slide Number Placeholder 3"/>
+          <p:cNvSpPr>
+            <a:spLocks xmlns:a="http://schemas.openxmlformats.org/drawingml/2006/main" noGrp="1"/>
+          </p:cNvSpPr>
+          <p:nvPr>
+            <p:ph type="sldNum" idx="5"/>
+          </p:nvPr>
+        </p:nvSpPr>
+        <p:spPr/>
+        <p:txBody>
+          <a:bodyPr xmlns:a="http://schemas.openxmlformats.org/drawingml/2006/main"/>
+          <a:lstStyle xmlns:a="http://schemas.openxmlformats.org/drawingml/2006/main"/>
+          <a:p xmlns:a="http://schemas.openxmlformats.org/drawingml/2006/main"/>
+        </p:txBody>
+      </p:sp>
+    </p:spTree>
+  </p:cSld>
+  <p:clrMapOvr>
+    <a:masterClrMapping xmlns:a="http://schemas.openxmlformats.org/drawingml/2006/main"/>
+  </p:clrMapOvr>
+</p:notes>
+</file>
+
+<file path=ppt/notesSlides/notesSlide27.xml><?xml version="1.0" encoding="utf-8"?>
+<p:notes xmlns:p="http://schemas.openxmlformats.org/presentationml/2006/main">
+  <p:cSld>
+    <p:spTree>
+      <p:nvGrpSpPr>
+        <p:cNvPr id="1" name=""/>
+        <p:cNvGrpSpPr/>
+        <p:nvPr/>
+      </p:nvGrpSpPr>
+      <p:grpSpPr>
+        <a:xfrm xmlns:a="http://schemas.openxmlformats.org/drawingml/2006/main"/>
+      </p:grpSpPr>
+      <p:sp>
+        <p:nvSpPr>
+          <p:cNvPr id="2" name="Slide Image Placeholder 1"/>
+          <p:cNvSpPr>
+            <a:spLocks xmlns:a="http://schemas.openxmlformats.org/drawingml/2006/main" noGrp="1"/>
+          </p:cNvSpPr>
+          <p:nvPr>
+            <p:ph type="sldImg" idx="0"/>
+          </p:nvPr>
+        </p:nvSpPr>
+        <p:spPr/>
+      </p:sp>
+      <p:sp>
+        <p:nvSpPr>
+          <p:cNvPr id="3" name="Notes Placeholder 2"/>
+          <p:cNvSpPr>
+            <a:spLocks xmlns:a="http://schemas.openxmlformats.org/drawingml/2006/main" noGrp="1"/>
+          </p:cNvSpPr>
+          <p:nvPr>
+            <p:ph type="body" idx="1"/>
+          </p:nvPr>
+        </p:nvSpPr>
+        <p:spPr/>
+        <p:txBody>
+          <a:bodyPr xmlns:a="http://schemas.openxmlformats.org/drawingml/2006/main"/>
+          <a:lstStyle xmlns:a="http://schemas.openxmlformats.org/drawingml/2006/main"/>
           <a:p xmlns:a="http://schemas.openxmlformats.org/drawingml/2006/main">
             <a:r>
-              <a:t>공식 참고: https://docs.flutter.dev/cookbook/networking/fetch-data ; https://www.nngroup.com/articles/ten-usability-heuristics/ . 제공 PPT와 PDF를 바탕으로 현행 코드와 수치를 갱신했다.</a:t>
+              <a:t>쟁점 1의 전·후입니다. before는 설계 비교안이고 after는 현재 UI 위젯 테스트입니다. 실제 배포본이나 사용자 실험이 아닙니다.</a:t>
             </a:r>
           </a:p>
         </p:txBody>
@@ -2268,7 +1961,7 @@
           <a:lstStyle xmlns:a="http://schemas.openxmlformats.org/drawingml/2006/main"/>
           <a:p xmlns:a="http://schemas.openxmlformats.org/drawingml/2006/main">
             <a:r>
-              <a:t>출처: https://apps.apple.com/us/app/knowt-ai-flashcards-notes/id6463744184 ; Apple RSS. 원문 날짜·별점 재확인. 작성자명 삭제.</a:t>
+              <a:t>Knowt의 전체 평점과 최근 30건을 구분했습니다. R06은 복습할 때 원래 보기와 다른 선택지가 반복되는 경험을 보고합니다. 원인과 감정은 가설이며 내부 구현을 확인한 것은 아닙니다.</a:t>
             </a:r>
           </a:p>
         </p:txBody>
@@ -2338,22 +2031,7 @@
           <a:lstStyle xmlns:a="http://schemas.openxmlformats.org/drawingml/2006/main"/>
           <a:p xmlns:a="http://schemas.openxmlformats.org/drawingml/2006/main">
             <a:r>
-              <a:t>왼쪽은 Knowt의 공식 소개 화면이고, 오른쪽은 NoteQuiz의 실제 UI입니다. 강의 입력, 요약, 퀴즈, 해설을 한 흐름으로 묶었습니다. 진행 상황을 표시하고, 같은 문항의 선택지와 정답을 일치시키며, 오류가 나면 다시 시도할 수 있게 했습니다.</a:t>
-            </a:r>
-          </a:p>
-          <a:p xmlns:a="http://schemas.openxmlformats.org/drawingml/2006/main">
-            <a:r>
-              <a:t/>
-            </a:r>
-          </a:p>
-          <a:p xmlns:a="http://schemas.openxmlformats.org/drawingml/2006/main">
-            <a:r>
-              <a:t>[근거] GAI3008-W07-2026-v1.1.1.pdf; 사용자 제공 NoteQuiz 소개; 제공 발표 템플릿.</a:t>
-            </a:r>
-          </a:p>
-          <a:p xmlns:a="http://schemas.openxmlformats.org/drawingml/2006/main">
-            <a:r>
-              <a:t>https://apps.apple.com/us/app/knowt-ai-flashcards-notes/id6463744184</a:t>
+              <a:t>해설 화면은 정답, 해설, 원래 보기와 내 선택, 강의 근거, 다음 행동 순서입니다. E-2는 같은 문항 객체를 쓰고, E-3은 원문을 항상 보여 주며, E-4는 다음 과업으로 이동합니다.</a:t>
             </a:r>
           </a:p>
         </p:txBody>
@@ -2423,7 +2101,7 @@
           <a:lstStyle xmlns:a="http://schemas.openxmlformats.org/drawingml/2006/main"/>
           <a:p xmlns:a="http://schemas.openxmlformats.org/drawingml/2006/main">
             <a:r>
-              <a:t>내 주장과 자체 반론은 현재 대화의 실제 사용자 응답이다. 재검토안은 Codex가 제안한 문장으로 발표자가 자기 말로 확인해야 한다. R06은 직접 효과 검증이 아닌 설계 동기.</a:t>
+              <a:t>학생은 모두 상시 표시를 선택했고, AI는 작은 화면의 탐색 부담을 반론했습니다. 학생도 번잡함을 인정했으며, 접기 대신 정답 우선과 영역 구분으로 수정했습니다. 효과는 아직 사용자 실험으로 검증하지 않았습니다.</a:t>
             </a:r>
           </a:p>
         </p:txBody>
@@ -2493,22 +2171,7 @@
           <a:lstStyle xmlns:a="http://schemas.openxmlformats.org/drawingml/2006/main"/>
           <a:p xmlns:a="http://schemas.openxmlformats.org/drawingml/2006/main">
             <a:r>
-              <a:t>목표는 강의의 핵심을 이해하고 틀린 부분을 다시 보는 것입니다. 저는 복습 단계의 정보 불일치를 가장 중요한 문제로 잡았습니다. 감정 점수는 사용자 조사가 아닌 설계 가설입니다. 기술적 원인을 단정하지 않고, 문항과 선택지와 해설이 같은 ID에 묶여야 한다는 UI 기준으로 해결했습니다.</a:t>
-            </a:r>
-          </a:p>
-          <a:p xmlns:a="http://schemas.openxmlformats.org/drawingml/2006/main">
-            <a:r>
-              <a:t/>
-            </a:r>
-          </a:p>
-          <a:p xmlns:a="http://schemas.openxmlformats.org/drawingml/2006/main">
-            <a:r>
-              <a:t>[근거] GAI3008-W07-2026-v1.1.1.pdf; 사용자 제공 NoteQuiz 소개; 제공 발표 템플릿.</a:t>
-            </a:r>
-          </a:p>
-          <a:p xmlns:a="http://schemas.openxmlformats.org/drawingml/2006/main">
-            <a:r>
-              <a:t/>
+              <a:t>화면 전환은 Navigator, 데이터는 api.dart의 GET만 사용합니다. 모든 GET 화면에 로딩, 오류와 재시도, 빈 상태가 있고, 840px 이상에서 측면 안내와 3열 요약이 나타납니다.</a:t>
             </a:r>
           </a:p>
         </p:txBody>
@@ -2578,7 +2241,7 @@
           <a:lstStyle xmlns:a="http://schemas.openxmlformats.org/drawingml/2006/main"/>
           <a:p xmlns:a="http://schemas.openxmlformats.org/drawingml/2006/main">
             <a:r>
-              <a:t>영상은 프로젝트 docs/영상/demo_1min.mp4. 동일 경로를 유지하세요. 추가 15초: P04 같은 문항, P09 다시 시도 설명.</a:t>
+              <a:t>1분 영상은 실제 브라우저 캡처와 위젯 테스트 상태 화면을 편집한 것입니다. 연속 녹화가 아니며, 영상이 재생되지 않으면 docs/영상/demo_1min.mp4를 엽니다.</a:t>
             </a:r>
           </a:p>
         </p:txBody>
@@ -2648,7 +2311,7 @@
           <a:lstStyle xmlns:a="http://schemas.openxmlformats.org/drawingml/2006/main"/>
           <a:p xmlns:a="http://schemas.openxmlformats.org/drawingml/2006/main">
             <a:r>
-              <a:t>본문 시간 합계 6분. 실제 본인 리허설을 통해 분량 조정 필요.</a:t>
+              <a:t>이번 판단은 정보를 숨기지 않으면서 읽기 순서를 만드는 것이었습니다. 다음에는 학습자가 정답과 근거를 찾는 시간을 관찰해 정보 위계와 스크롤 부담을 검증하겠습니다.</a:t>
             </a:r>
           </a:p>
         </p:txBody>
@@ -2718,27 +2381,7 @@
           <a:lstStyle xmlns:a="http://schemas.openxmlformats.org/drawingml/2006/main"/>
           <a:p xmlns:a="http://schemas.openxmlformats.org/drawingml/2006/main">
             <a:r>
-              <a:t>Flutter는 상태에 따라 화면을 다시 그립니다. 이 앱은 Navigator로 화면을 이동하고 FutureBuilder로 GET 결과와 세 상태를 구분합니다. 창이 넓어지면 측면 안내와 다열 요약을 표시합니다. setState는 보기 선택이나 다시 시도처럼 화면 내부 변화에만 사용합니다. 실제 AI 호출과 채점 알고리즘, 저장 기능은 넣지 않았습니다.</a:t>
-            </a:r>
-          </a:p>
-          <a:p xmlns:a="http://schemas.openxmlformats.org/drawingml/2006/main">
-            <a:r>
-              <a:t/>
-            </a:r>
-          </a:p>
-          <a:p xmlns:a="http://schemas.openxmlformats.org/drawingml/2006/main">
-            <a:r>
-              <a:t>[근거] GAI3008-W07-2026-v1.1.1.pdf; 사용자 제공 NoteQuiz 소개; 제공 발표 템플릿.</a:t>
-            </a:r>
-          </a:p>
-          <a:p xmlns:a="http://schemas.openxmlformats.org/drawingml/2006/main">
-            <a:r>
-              <a:t>https://docs.flutter.dev/data-and-backend/state-mgmt/declarative</a:t>
-            </a:r>
-          </a:p>
-          <a:p xmlns:a="http://schemas.openxmlformats.org/drawingml/2006/main">
-            <a:r>
-              <a:t>https://docs.flutter.dev/ui/layout/constraints</a:t>
+              <a:t>질문을 받겠습니다. 실제 AI 여부, 상시 표시의 근거, 원래 보기와 내 선택을 표시하는 이유, 고정 결과의 범위를 설명할 수 있습니다.</a:t>
             </a:r>
           </a:p>
         </p:txBody>
@@ -2811,7 +2454,7 @@
   </p:cSld>
   <p:clrMap bg1="lt1" tx1="dk1" bg2="lt2" tx2="dk2" accent1="accent1" accent2="accent2" accent3="accent3" accent4="accent4" accent5="accent5" accent6="accent6" hlink="hlink" folHlink="folHlink"/>
   <p:sldLayoutIdLst>
-    <p:sldLayoutId xmlns:r="http://schemas.openxmlformats.org/officeDocument/2006/relationships" id="2147483649" r:id="Rb0b896aecd804896"/>
+    <p:sldLayoutId xmlns:r="http://schemas.openxmlformats.org/officeDocument/2006/relationships" id="2147483649" r:id="R5c150b3f674143a1"/>
   </p:sldLayoutIdLst>
   <p:hf sldNum="0" hdr="0" ftr="0" dt="0"/>
   <p:txStyles>
@@ -3382,7 +3025,7 @@
           <p:cNvPr id="8" name="">
             <a:extLst xmlns:a="http://schemas.openxmlformats.org/drawingml/2006/main">
               <a:ext uri="{FF2B5EF4-FFF2-40B4-BE49-F238E27FC236}">
-                <a16:creationId xmlns:a16="http://schemas.microsoft.com/office/drawing/2014/main" id="{D80D37A1-0D58-4641-8759-1C13B270A3D1}"/>
+                <a16:creationId xmlns:a16="http://schemas.microsoft.com/office/drawing/2014/main" id="{111A0532-C470-48DA-87DC-3602B2B34364}"/>
               </a:ext>
             </a:extLst>
           </p:cNvPr>
@@ -3538,7 +3181,7 @@
           <p:cNvPr id="2" name="">
             <a:extLst xmlns:a="http://schemas.openxmlformats.org/drawingml/2006/main">
               <a:ext uri="{FF2B5EF4-FFF2-40B4-BE49-F238E27FC236}">
-                <a16:creationId xmlns:a16="http://schemas.microsoft.com/office/drawing/2014/main" id="{1D632372-BCCC-499F-BAF8-921772406034}"/>
+                <a16:creationId xmlns:a16="http://schemas.microsoft.com/office/drawing/2014/main" id="{7FA143B4-CC58-4370-A381-9FBC3F1DE372}"/>
               </a:ext>
             </a:extLst>
           </p:cNvPr>
@@ -3694,7 +3337,7 @@
           <p:cNvPr id="3" name="">
             <a:extLst xmlns:a="http://schemas.openxmlformats.org/drawingml/2006/main">
               <a:ext uri="{FF2B5EF4-FFF2-40B4-BE49-F238E27FC236}">
-                <a16:creationId xmlns:a16="http://schemas.microsoft.com/office/drawing/2014/main" id="{5DFCE7CD-D5FD-4CC2-AA36-205A8E6BFA39}"/>
+                <a16:creationId xmlns:a16="http://schemas.microsoft.com/office/drawing/2014/main" id="{9FDCBA1F-A718-4ED8-832B-2F86DE236376}"/>
               </a:ext>
             </a:extLst>
           </p:cNvPr>
@@ -3821,25 +3464,7 @@
             </a:lvl9pPr>
           </a:lstStyle>
           <a:p xmlns:a="http://schemas.openxmlformats.org/drawingml/2006/main">
-            <a:pPr>
-              <a:defRPr sz="750" b="0">
-                <a:solidFill>
-                  <a:srgbClr val="657491"/>
-                </a:solidFill>
-                <a:latin typeface="Noto Sans KR"/>
-                <a:ea typeface="Noto Sans KR"/>
-                <a:cs typeface="Noto Sans KR"/>
-              </a:defRPr>
-            </a:pPr>
             <a:r>
-              <a:rPr sz="750" b="0">
-                <a:solidFill>
-                  <a:srgbClr val="657491"/>
-                </a:solidFill>
-                <a:latin typeface="Noto Sans KR"/>
-                <a:ea typeface="Noto Sans KR"/>
-                <a:cs typeface="Noto Sans KR"/>
-              </a:rPr>
               <a:t>NoteQuiz · zhaoboda 2025106293 · 01</a:t>
             </a:r>
           </a:p>
@@ -3850,7 +3475,7 @@
           <p:cNvPr id="4" name="">
             <a:extLst xmlns:a="http://schemas.openxmlformats.org/drawingml/2006/main">
               <a:ext uri="{FF2B5EF4-FFF2-40B4-BE49-F238E27FC236}">
-                <a16:creationId xmlns:a16="http://schemas.microsoft.com/office/drawing/2014/main" id="{9B5192AC-DB85-4A9E-872F-80D8B5F4D41D}"/>
+                <a16:creationId xmlns:a16="http://schemas.microsoft.com/office/drawing/2014/main" id="{F2459CBF-C5C2-4DFC-A11F-E2A3D63C8C84}"/>
               </a:ext>
             </a:extLst>
           </p:cNvPr>
@@ -4006,7 +3631,7 @@
           <p:cNvPr id="5" name="">
             <a:extLst xmlns:a="http://schemas.openxmlformats.org/drawingml/2006/main">
               <a:ext uri="{FF2B5EF4-FFF2-40B4-BE49-F238E27FC236}">
-                <a16:creationId xmlns:a16="http://schemas.microsoft.com/office/drawing/2014/main" id="{46FD59AD-9D40-4D0A-80F4-A85544C19F12}"/>
+                <a16:creationId xmlns:a16="http://schemas.microsoft.com/office/drawing/2014/main" id="{80F5C941-FA17-4FC6-BB74-A8AB0BEEAFAB}"/>
               </a:ext>
             </a:extLst>
           </p:cNvPr>
@@ -4185,7 +3810,7 @@
           <p:cNvPr id="6" name="">
             <a:extLst xmlns:a="http://schemas.openxmlformats.org/drawingml/2006/main">
               <a:ext uri="{FF2B5EF4-FFF2-40B4-BE49-F238E27FC236}">
-                <a16:creationId xmlns:a16="http://schemas.microsoft.com/office/drawing/2014/main" id="{AE30B1E2-0D3B-4EA8-BA0C-9CB8A97550E5}"/>
+                <a16:creationId xmlns:a16="http://schemas.microsoft.com/office/drawing/2014/main" id="{23521FD1-528C-47D1-84AE-0EB4B81DB8E1}"/>
               </a:ext>
             </a:extLst>
           </p:cNvPr>
@@ -4341,7 +3966,7 @@
           <p:cNvPr id="7" name="">
             <a:extLst xmlns:a="http://schemas.openxmlformats.org/drawingml/2006/main">
               <a:ext uri="{FF2B5EF4-FFF2-40B4-BE49-F238E27FC236}">
-                <a16:creationId xmlns:a16="http://schemas.microsoft.com/office/drawing/2014/main" id="{CC2CCA76-8145-4DBC-B223-2AC550D4BD0A}"/>
+                <a16:creationId xmlns:a16="http://schemas.microsoft.com/office/drawing/2014/main" id="{7E86EC40-FD4F-4384-9743-79394E727657}"/>
               </a:ext>
             </a:extLst>
           </p:cNvPr>
@@ -4351,7 +3976,7 @@
           <p:nvPr/>
         </p:nvPicPr>
         <p:blipFill>
-          <a:blip xmlns:r="http://schemas.openxmlformats.org/officeDocument/2006/relationships" xmlns:a="http://schemas.openxmlformats.org/drawingml/2006/main" r:embed="R71fd8409b43d43b3"/>
+          <a:blip xmlns:r="http://schemas.openxmlformats.org/officeDocument/2006/relationships" xmlns:a="http://schemas.openxmlformats.org/drawingml/2006/main" r:embed="R2c6df8fc785d4237"/>
           <a:stretch xmlns:a="http://schemas.openxmlformats.org/drawingml/2006/main"/>
         </p:blipFill>
         <p:spPr>
@@ -4398,7 +4023,7 @@
           <p:cNvPr id="9" name="">
             <a:extLst xmlns:a="http://schemas.openxmlformats.org/drawingml/2006/main">
               <a:ext uri="{FF2B5EF4-FFF2-40B4-BE49-F238E27FC236}">
-                <a16:creationId xmlns:a16="http://schemas.microsoft.com/office/drawing/2014/main" id="{780925DA-9538-4256-B51D-5362A86BACC8}"/>
+                <a16:creationId xmlns:a16="http://schemas.microsoft.com/office/drawing/2014/main" id="{7B0AF03A-25C6-4127-8DF7-742BB7EEBC03}"/>
               </a:ext>
             </a:extLst>
           </p:cNvPr>
@@ -4554,7 +4179,7 @@
           <p:cNvPr id="2" name="">
             <a:extLst xmlns:a="http://schemas.openxmlformats.org/drawingml/2006/main">
               <a:ext uri="{FF2B5EF4-FFF2-40B4-BE49-F238E27FC236}">
-                <a16:creationId xmlns:a16="http://schemas.microsoft.com/office/drawing/2014/main" id="{4465AB18-6F34-4227-A958-5B752CAC68DA}"/>
+                <a16:creationId xmlns:a16="http://schemas.microsoft.com/office/drawing/2014/main" id="{221BF3CD-816F-45D1-B02C-81F8F78D1025}"/>
               </a:ext>
             </a:extLst>
           </p:cNvPr>
@@ -4710,7 +4335,7 @@
           <p:cNvPr id="3" name="">
             <a:extLst xmlns:a="http://schemas.openxmlformats.org/drawingml/2006/main">
               <a:ext uri="{FF2B5EF4-FFF2-40B4-BE49-F238E27FC236}">
-                <a16:creationId xmlns:a16="http://schemas.microsoft.com/office/drawing/2014/main" id="{B1F0EA92-C60D-4B35-BA77-4311EBF1F112}"/>
+                <a16:creationId xmlns:a16="http://schemas.microsoft.com/office/drawing/2014/main" id="{C1210FE4-D48B-414B-835D-308E19DF9DE9}"/>
               </a:ext>
             </a:extLst>
           </p:cNvPr>
@@ -4837,25 +4462,7 @@
             </a:lvl9pPr>
           </a:lstStyle>
           <a:p xmlns:a="http://schemas.openxmlformats.org/drawingml/2006/main">
-            <a:pPr>
-              <a:defRPr sz="750" b="0">
-                <a:solidFill>
-                  <a:srgbClr val="657491"/>
-                </a:solidFill>
-                <a:latin typeface="Noto Sans KR"/>
-                <a:ea typeface="Noto Sans KR"/>
-                <a:cs typeface="Noto Sans KR"/>
-              </a:defRPr>
-            </a:pPr>
             <a:r>
-              <a:rPr sz="750" b="0">
-                <a:solidFill>
-                  <a:srgbClr val="657491"/>
-                </a:solidFill>
-                <a:latin typeface="Noto Sans KR"/>
-                <a:ea typeface="Noto Sans KR"/>
-                <a:cs typeface="Noto Sans KR"/>
-              </a:rPr>
               <a:t>NoteQuiz · zhaoboda 2025106293 · 10</a:t>
             </a:r>
           </a:p>
@@ -4866,7 +4473,7 @@
           <p:cNvPr id="4" name="">
             <a:extLst xmlns:a="http://schemas.openxmlformats.org/drawingml/2006/main">
               <a:ext uri="{FF2B5EF4-FFF2-40B4-BE49-F238E27FC236}">
-                <a16:creationId xmlns:a16="http://schemas.microsoft.com/office/drawing/2014/main" id="{39710EAF-5FDB-4FFD-ADA2-35D3ECA0B88E}"/>
+                <a16:creationId xmlns:a16="http://schemas.microsoft.com/office/drawing/2014/main" id="{31C04474-5484-4682-A76E-DEFF2EBB8418}"/>
               </a:ext>
             </a:extLst>
           </p:cNvPr>
@@ -4876,7 +4483,7 @@
           <p:nvPr/>
         </p:nvPicPr>
         <p:blipFill>
-          <a:blip xmlns:r="http://schemas.openxmlformats.org/officeDocument/2006/relationships" xmlns:a="http://schemas.openxmlformats.org/drawingml/2006/main" r:embed="Rd5c449dc90e947c8"/>
+          <a:blip xmlns:r="http://schemas.openxmlformats.org/officeDocument/2006/relationships" xmlns:a="http://schemas.openxmlformats.org/drawingml/2006/main" r:embed="R2d22821581244915"/>
           <a:stretch xmlns:a="http://schemas.openxmlformats.org/drawingml/2006/main"/>
         </p:blipFill>
         <p:spPr>
@@ -4894,7 +4501,7 @@
           <p:cNvPr id="5" name="">
             <a:extLst xmlns:a="http://schemas.openxmlformats.org/drawingml/2006/main">
               <a:ext uri="{FF2B5EF4-FFF2-40B4-BE49-F238E27FC236}">
-                <a16:creationId xmlns:a16="http://schemas.microsoft.com/office/drawing/2014/main" id="{7001CD6A-C6DA-47D6-B869-1213303D6537}"/>
+                <a16:creationId xmlns:a16="http://schemas.microsoft.com/office/drawing/2014/main" id="{E5FB54D7-E0A3-4FD9-ABE0-2D437529A8AA}"/>
               </a:ext>
             </a:extLst>
           </p:cNvPr>
@@ -4904,7 +4511,7 @@
           <p:nvPr/>
         </p:nvPicPr>
         <p:blipFill>
-          <a:blip xmlns:r="http://schemas.openxmlformats.org/officeDocument/2006/relationships" xmlns:a="http://schemas.openxmlformats.org/drawingml/2006/main" r:embed="Rb7382c86c0594440"/>
+          <a:blip xmlns:r="http://schemas.openxmlformats.org/officeDocument/2006/relationships" xmlns:a="http://schemas.openxmlformats.org/drawingml/2006/main" r:embed="R4a37a3d149a04303"/>
           <a:stretch xmlns:a="http://schemas.openxmlformats.org/drawingml/2006/main"/>
         </p:blipFill>
         <p:spPr>
@@ -4922,7 +4529,7 @@
           <p:cNvPr id="6" name="">
             <a:extLst xmlns:a="http://schemas.openxmlformats.org/drawingml/2006/main">
               <a:ext uri="{FF2B5EF4-FFF2-40B4-BE49-F238E27FC236}">
-                <a16:creationId xmlns:a16="http://schemas.microsoft.com/office/drawing/2014/main" id="{1A3BEB28-8F28-4598-BE93-228BE8D5B720}"/>
+                <a16:creationId xmlns:a16="http://schemas.microsoft.com/office/drawing/2014/main" id="{0454525E-42A2-4368-BE16-5DAEC44AB90A}"/>
               </a:ext>
             </a:extLst>
           </p:cNvPr>
@@ -4932,7 +4539,7 @@
           <p:nvPr/>
         </p:nvPicPr>
         <p:blipFill>
-          <a:blip xmlns:r="http://schemas.openxmlformats.org/officeDocument/2006/relationships" xmlns:a="http://schemas.openxmlformats.org/drawingml/2006/main" r:embed="Rb05bdc7a49ab4b65"/>
+          <a:blip xmlns:r="http://schemas.openxmlformats.org/officeDocument/2006/relationships" xmlns:a="http://schemas.openxmlformats.org/drawingml/2006/main" r:embed="R4c1e76a639ac4860"/>
           <a:stretch xmlns:a="http://schemas.openxmlformats.org/drawingml/2006/main"/>
         </p:blipFill>
         <p:spPr>
@@ -4950,7 +4557,7 @@
           <p:cNvPr id="7" name="">
             <a:extLst xmlns:a="http://schemas.openxmlformats.org/drawingml/2006/main">
               <a:ext uri="{FF2B5EF4-FFF2-40B4-BE49-F238E27FC236}">
-                <a16:creationId xmlns:a16="http://schemas.microsoft.com/office/drawing/2014/main" id="{1EBD020C-499E-41AA-9687-69B7C66A567B}"/>
+                <a16:creationId xmlns:a16="http://schemas.microsoft.com/office/drawing/2014/main" id="{223B93DA-C23A-4A70-AB57-E09896095ED6}"/>
               </a:ext>
             </a:extLst>
           </p:cNvPr>
@@ -4960,7 +4567,7 @@
           <p:nvPr/>
         </p:nvPicPr>
         <p:blipFill>
-          <a:blip xmlns:r="http://schemas.openxmlformats.org/officeDocument/2006/relationships" xmlns:a="http://schemas.openxmlformats.org/drawingml/2006/main" r:embed="Rc03ae4432d224c36"/>
+          <a:blip xmlns:r="http://schemas.openxmlformats.org/officeDocument/2006/relationships" xmlns:a="http://schemas.openxmlformats.org/drawingml/2006/main" r:embed="R75dbfcb940df4eea"/>
           <a:stretch xmlns:a="http://schemas.openxmlformats.org/drawingml/2006/main"/>
         </p:blipFill>
         <p:spPr>
@@ -4973,158 +4580,142 @@
           </a:prstGeom>
         </p:spPr>
       </p:pic>
-      <p:sp>
+      <p:sp xmlns:a="http://schemas.openxmlformats.org/drawingml/2006/main">
         <p:nvSpPr>
-          <p:cNvPr id="8" name="">
-            <a:extLst xmlns:a="http://schemas.openxmlformats.org/drawingml/2006/main">
-              <a:ext uri="{FF2B5EF4-FFF2-40B4-BE49-F238E27FC236}">
-                <a16:creationId xmlns:a16="http://schemas.microsoft.com/office/drawing/2014/main" id="{6C4A670F-5914-4206-BD18-428F3A5A0626}"/>
-              </a:ext>
-            </a:extLst>
-          </p:cNvPr>
-          <p:cNvSpPr>
-            <a:spLocks xmlns:a="http://schemas.openxmlformats.org/drawingml/2006/main" noGrp="1"/>
-          </p:cNvSpPr>
+          <p:cNvPr id="10" name="TextBox 9"/>
+          <p:cNvSpPr txBox="1"/>
           <p:nvPr/>
         </p:nvSpPr>
         <p:spPr>
-          <a:xfrm xmlns:a="http://schemas.openxmlformats.org/drawingml/2006/main">
-            <a:off x="381000" y="4524375"/>
-            <a:ext cx="8382000" cy="238125"/>
+          <a:xfrm>
+            <a:off x="587044" y="4526280"/>
+            <a:ext cx="1540764" cy="274320"/>
           </a:xfrm>
-          <a:prstGeom xmlns:a="http://schemas.openxmlformats.org/drawingml/2006/main" prst="rect">
+          <a:prstGeom prst="rect">
             <a:avLst/>
           </a:prstGeom>
-          <a:noFill xmlns:a="http://schemas.openxmlformats.org/drawingml/2006/main"/>
-          <a:ln xmlns:a="http://schemas.openxmlformats.org/drawingml/2006/main" w="0">
-            <a:noFill/>
-          </a:ln>
+          <a:noFill/>
         </p:spPr>
         <p:txBody>
-          <a:bodyPr xmlns:a="http://schemas.openxmlformats.org/drawingml/2006/main"/>
-          <a:lstStyle xmlns:a="http://schemas.openxmlformats.org/drawingml/2006/main">
-            <a:defPPr>
-              <a:defRPr sz="1125" b="0">
-                <a:solidFill>
-                  <a:srgbClr val="4F609B"/>
-                </a:solidFill>
-                <a:latin typeface="Noto Sans KR"/>
-                <a:ea typeface="Noto Sans KR"/>
-                <a:cs typeface="Noto Sans KR"/>
-              </a:defRPr>
-            </a:defPPr>
-            <a:lvl1pPr>
-              <a:defRPr sz="1125" b="0">
-                <a:solidFill>
-                  <a:srgbClr val="4F609B"/>
-                </a:solidFill>
-                <a:latin typeface="Noto Sans KR"/>
-                <a:ea typeface="Noto Sans KR"/>
-                <a:cs typeface="Noto Sans KR"/>
-              </a:defRPr>
-            </a:lvl1pPr>
-            <a:lvl2pPr>
-              <a:defRPr sz="1125" b="0">
-                <a:solidFill>
-                  <a:srgbClr val="4F609B"/>
-                </a:solidFill>
-                <a:latin typeface="Noto Sans KR"/>
-                <a:ea typeface="Noto Sans KR"/>
-                <a:cs typeface="Noto Sans KR"/>
-              </a:defRPr>
-            </a:lvl2pPr>
-            <a:lvl3pPr>
-              <a:defRPr sz="1125" b="0">
-                <a:solidFill>
-                  <a:srgbClr val="4F609B"/>
-                </a:solidFill>
-                <a:latin typeface="Noto Sans KR"/>
-                <a:ea typeface="Noto Sans KR"/>
-                <a:cs typeface="Noto Sans KR"/>
-              </a:defRPr>
-            </a:lvl3pPr>
-            <a:lvl4pPr>
-              <a:defRPr sz="1125" b="0">
-                <a:solidFill>
-                  <a:srgbClr val="4F609B"/>
-                </a:solidFill>
-                <a:latin typeface="Noto Sans KR"/>
-                <a:ea typeface="Noto Sans KR"/>
-                <a:cs typeface="Noto Sans KR"/>
-              </a:defRPr>
-            </a:lvl4pPr>
-            <a:lvl5pPr>
-              <a:defRPr sz="1125" b="0">
-                <a:solidFill>
-                  <a:srgbClr val="4F609B"/>
-                </a:solidFill>
-                <a:latin typeface="Noto Sans KR"/>
-                <a:ea typeface="Noto Sans KR"/>
-                <a:cs typeface="Noto Sans KR"/>
-              </a:defRPr>
-            </a:lvl5pPr>
-            <a:lvl6pPr>
-              <a:defRPr sz="1125" b="0">
-                <a:solidFill>
-                  <a:srgbClr val="4F609B"/>
-                </a:solidFill>
-                <a:latin typeface="Noto Sans KR"/>
-                <a:ea typeface="Noto Sans KR"/>
-                <a:cs typeface="Noto Sans KR"/>
-              </a:defRPr>
-            </a:lvl6pPr>
-            <a:lvl7pPr>
-              <a:defRPr sz="1125" b="0">
-                <a:solidFill>
-                  <a:srgbClr val="4F609B"/>
-                </a:solidFill>
-                <a:latin typeface="Noto Sans KR"/>
-                <a:ea typeface="Noto Sans KR"/>
-                <a:cs typeface="Noto Sans KR"/>
-              </a:defRPr>
-            </a:lvl7pPr>
-            <a:lvl8pPr>
-              <a:defRPr sz="1125" b="0">
-                <a:solidFill>
-                  <a:srgbClr val="4F609B"/>
-                </a:solidFill>
-                <a:latin typeface="Noto Sans KR"/>
-                <a:ea typeface="Noto Sans KR"/>
-                <a:cs typeface="Noto Sans KR"/>
-              </a:defRPr>
-            </a:lvl8pPr>
-            <a:lvl9pPr>
-              <a:defRPr sz="1125" b="0">
-                <a:solidFill>
-                  <a:srgbClr val="4F609B"/>
-                </a:solidFill>
-                <a:latin typeface="Noto Sans KR"/>
-                <a:ea typeface="Noto Sans KR"/>
-                <a:cs typeface="Noto Sans KR"/>
-              </a:defRPr>
-            </a:lvl9pPr>
-          </a:lstStyle>
-          <a:p xmlns:a="http://schemas.openxmlformats.org/drawingml/2006/main">
-            <a:pPr>
-              <a:defRPr sz="1125" b="0">
-                <a:solidFill>
-                  <a:srgbClr val="4F609B"/>
-                </a:solidFill>
-                <a:latin typeface="Noto Sans KR"/>
-                <a:ea typeface="Noto Sans KR"/>
-                <a:cs typeface="Noto Sans KR"/>
-              </a:defRPr>
-            </a:pPr>
+          <a:bodyPr wrap="none" lIns="0" rIns="0" tIns="0" bIns="0" anchor="ctr">
+            <a:spAutoFit/>
+          </a:bodyPr>
+          <a:lstStyle/>
+          <a:p>
+            <a:pPr algn="ctr"/>
             <a:r>
-              <a:rPr sz="1125" b="0">
-                <a:solidFill>
-                  <a:srgbClr val="4F609B"/>
-                </a:solidFill>
-                <a:latin typeface="Noto Sans KR"/>
-                <a:ea typeface="Noto Sans KR"/>
-                <a:cs typeface="Noto Sans KR"/>
+              <a:rPr sz="1120">
+                <a:solidFill>
+                  <a:srgbClr val="18243B"/>
+                </a:solidFill>
+                <a:latin typeface="Noto Sans KR"/>
               </a:rPr>
-              <a:t>I 입력                     Q 퀴즈                     E 해설                     R 결과</a:t>
+              <a:t>I 입력</a:t>
+            </a:r>
+          </a:p>
+        </p:txBody>
+      </p:sp>
+      <p:sp xmlns:a="http://schemas.openxmlformats.org/drawingml/2006/main">
+        <p:nvSpPr>
+          <p:cNvPr id="11" name="TextBox 10"/>
+          <p:cNvSpPr txBox="1"/>
+          <p:nvPr/>
+        </p:nvSpPr>
+        <p:spPr>
+          <a:xfrm>
+            <a:off x="2730398" y="4526280"/>
+            <a:ext cx="1540764" cy="274320"/>
+          </a:xfrm>
+          <a:prstGeom prst="rect">
+            <a:avLst/>
+          </a:prstGeom>
+          <a:noFill/>
+        </p:spPr>
+        <p:txBody>
+          <a:bodyPr wrap="none" lIns="0" rIns="0" tIns="0" bIns="0" anchor="ctr">
+            <a:spAutoFit/>
+          </a:bodyPr>
+          <a:lstStyle/>
+          <a:p>
+            <a:pPr algn="ctr"/>
+            <a:r>
+              <a:rPr sz="1120">
+                <a:solidFill>
+                  <a:srgbClr val="18243B"/>
+                </a:solidFill>
+                <a:latin typeface="Noto Sans KR"/>
+              </a:rPr>
+              <a:t>Q 퀴즈</a:t>
+            </a:r>
+          </a:p>
+        </p:txBody>
+      </p:sp>
+      <p:sp xmlns:a="http://schemas.openxmlformats.org/drawingml/2006/main">
+        <p:nvSpPr>
+          <p:cNvPr id="12" name="TextBox 11"/>
+          <p:cNvSpPr txBox="1"/>
+          <p:nvPr/>
+        </p:nvSpPr>
+        <p:spPr>
+          <a:xfrm>
+            <a:off x="4873752" y="4526280"/>
+            <a:ext cx="1540764" cy="274320"/>
+          </a:xfrm>
+          <a:prstGeom prst="rect">
+            <a:avLst/>
+          </a:prstGeom>
+          <a:noFill/>
+        </p:spPr>
+        <p:txBody>
+          <a:bodyPr wrap="none" lIns="0" rIns="0" tIns="0" bIns="0" anchor="ctr">
+            <a:spAutoFit/>
+          </a:bodyPr>
+          <a:lstStyle/>
+          <a:p>
+            <a:pPr algn="ctr"/>
+            <a:r>
+              <a:rPr sz="1120">
+                <a:solidFill>
+                  <a:srgbClr val="18243B"/>
+                </a:solidFill>
+                <a:latin typeface="Noto Sans KR"/>
+              </a:rPr>
+              <a:t>E 해설</a:t>
+            </a:r>
+          </a:p>
+        </p:txBody>
+      </p:sp>
+      <p:sp xmlns:a="http://schemas.openxmlformats.org/drawingml/2006/main">
+        <p:nvSpPr>
+          <p:cNvPr id="13" name="TextBox 12"/>
+          <p:cNvSpPr txBox="1"/>
+          <p:nvPr/>
+        </p:nvSpPr>
+        <p:spPr>
+          <a:xfrm>
+            <a:off x="7016191" y="4526280"/>
+            <a:ext cx="1540764" cy="274320"/>
+          </a:xfrm>
+          <a:prstGeom prst="rect">
+            <a:avLst/>
+          </a:prstGeom>
+          <a:noFill/>
+        </p:spPr>
+        <p:txBody>
+          <a:bodyPr wrap="none" lIns="0" rIns="0" tIns="0" bIns="0" anchor="ctr">
+            <a:spAutoFit/>
+          </a:bodyPr>
+          <a:lstStyle/>
+          <a:p>
+            <a:pPr algn="ctr"/>
+            <a:r>
+              <a:rPr sz="1120">
+                <a:solidFill>
+                  <a:srgbClr val="18243B"/>
+                </a:solidFill>
+                <a:latin typeface="Noto Sans KR"/>
+              </a:rPr>
+              <a:t>R 결과</a:t>
             </a:r>
           </a:p>
         </p:txBody>
@@ -5163,7 +4754,7 @@
           <p:cNvPr id="9" name="">
             <a:extLst xmlns:a="http://schemas.openxmlformats.org/drawingml/2006/main">
               <a:ext uri="{FF2B5EF4-FFF2-40B4-BE49-F238E27FC236}">
-                <a16:creationId xmlns:a16="http://schemas.microsoft.com/office/drawing/2014/main" id="{F1D7757F-2D32-4ED2-BF05-CCB374DF0396}"/>
+                <a16:creationId xmlns:a16="http://schemas.microsoft.com/office/drawing/2014/main" id="{6B2CA963-71C7-4265-859B-5D4F5A1105A0}"/>
               </a:ext>
             </a:extLst>
           </p:cNvPr>
@@ -5319,7 +4910,7 @@
           <p:cNvPr id="2" name="">
             <a:extLst xmlns:a="http://schemas.openxmlformats.org/drawingml/2006/main">
               <a:ext uri="{FF2B5EF4-FFF2-40B4-BE49-F238E27FC236}">
-                <a16:creationId xmlns:a16="http://schemas.microsoft.com/office/drawing/2014/main" id="{8D3FAA71-E752-4675-8467-0DB6D0B378CB}"/>
+                <a16:creationId xmlns:a16="http://schemas.microsoft.com/office/drawing/2014/main" id="{0AC6824F-326D-4AD9-802B-75923626D6D6}"/>
               </a:ext>
             </a:extLst>
           </p:cNvPr>
@@ -5475,7 +5066,7 @@
           <p:cNvPr id="3" name="">
             <a:extLst xmlns:a="http://schemas.openxmlformats.org/drawingml/2006/main">
               <a:ext uri="{FF2B5EF4-FFF2-40B4-BE49-F238E27FC236}">
-                <a16:creationId xmlns:a16="http://schemas.microsoft.com/office/drawing/2014/main" id="{DAE5DA40-76DD-4DDF-8959-CC9AA237E9EE}"/>
+                <a16:creationId xmlns:a16="http://schemas.microsoft.com/office/drawing/2014/main" id="{1F7F9949-AD88-4099-BF60-A8449F33F194}"/>
               </a:ext>
             </a:extLst>
           </p:cNvPr>
@@ -5602,25 +5193,7 @@
             </a:lvl9pPr>
           </a:lstStyle>
           <a:p xmlns:a="http://schemas.openxmlformats.org/drawingml/2006/main">
-            <a:pPr>
-              <a:defRPr sz="750" b="0">
-                <a:solidFill>
-                  <a:srgbClr val="657491"/>
-                </a:solidFill>
-                <a:latin typeface="Noto Sans KR"/>
-                <a:ea typeface="Noto Sans KR"/>
-                <a:cs typeface="Noto Sans KR"/>
-              </a:defRPr>
-            </a:pPr>
             <a:r>
-              <a:rPr sz="750" b="0">
-                <a:solidFill>
-                  <a:srgbClr val="657491"/>
-                </a:solidFill>
-                <a:latin typeface="Noto Sans KR"/>
-                <a:ea typeface="Noto Sans KR"/>
-                <a:cs typeface="Noto Sans KR"/>
-              </a:rPr>
               <a:t>NoteQuiz · zhaoboda 2025106293 · 11</a:t>
             </a:r>
           </a:p>
@@ -5631,7 +5204,7 @@
           <p:cNvPr id="4" name="">
             <a:extLst xmlns:a="http://schemas.openxmlformats.org/drawingml/2006/main">
               <a:ext uri="{FF2B5EF4-FFF2-40B4-BE49-F238E27FC236}">
-                <a16:creationId xmlns:a16="http://schemas.microsoft.com/office/drawing/2014/main" id="{73B702F6-205B-4682-B83F-01500DADCF23}"/>
+                <a16:creationId xmlns:a16="http://schemas.microsoft.com/office/drawing/2014/main" id="{7050C0F6-DE5C-434E-A8EB-D7FA5AD468DF}"/>
               </a:ext>
             </a:extLst>
           </p:cNvPr>
@@ -5641,7 +5214,7 @@
           <p:nvPr/>
         </p:nvPicPr>
         <p:blipFill>
-          <a:blip xmlns:r="http://schemas.openxmlformats.org/officeDocument/2006/relationships" xmlns:a="http://schemas.openxmlformats.org/drawingml/2006/main" r:embed="Rf5b9d95bb10c46d5"/>
+          <a:blip xmlns:r="http://schemas.openxmlformats.org/officeDocument/2006/relationships" xmlns:a="http://schemas.openxmlformats.org/drawingml/2006/main" r:embed="Rf2dfcac6ddfd42d4"/>
           <a:stretch xmlns:a="http://schemas.openxmlformats.org/drawingml/2006/main"/>
         </p:blipFill>
         <p:spPr>
@@ -5659,7 +5232,7 @@
           <p:cNvPr id="5" name="">
             <a:extLst xmlns:a="http://schemas.openxmlformats.org/drawingml/2006/main">
               <a:ext uri="{FF2B5EF4-FFF2-40B4-BE49-F238E27FC236}">
-                <a16:creationId xmlns:a16="http://schemas.microsoft.com/office/drawing/2014/main" id="{3611AA25-BB2C-4231-9B2A-F4940DF0C17D}"/>
+                <a16:creationId xmlns:a16="http://schemas.microsoft.com/office/drawing/2014/main" id="{8AF82F15-8922-459A-A435-7A60BFFEACD6}"/>
               </a:ext>
             </a:extLst>
           </p:cNvPr>
@@ -5669,7 +5242,7 @@
           <p:nvPr/>
         </p:nvPicPr>
         <p:blipFill>
-          <a:blip xmlns:r="http://schemas.openxmlformats.org/officeDocument/2006/relationships" xmlns:a="http://schemas.openxmlformats.org/drawingml/2006/main" r:embed="Rf79748191e3845c1"/>
+          <a:blip xmlns:r="http://schemas.openxmlformats.org/officeDocument/2006/relationships" xmlns:a="http://schemas.openxmlformats.org/drawingml/2006/main" r:embed="Raf803537147d4792"/>
           <a:stretch xmlns:a="http://schemas.openxmlformats.org/drawingml/2006/main"/>
         </p:blipFill>
         <p:spPr>
@@ -5687,7 +5260,7 @@
           <p:cNvPr id="6" name="">
             <a:extLst xmlns:a="http://schemas.openxmlformats.org/drawingml/2006/main">
               <a:ext uri="{FF2B5EF4-FFF2-40B4-BE49-F238E27FC236}">
-                <a16:creationId xmlns:a16="http://schemas.microsoft.com/office/drawing/2014/main" id="{99A25D8E-06B9-4CAF-BDAB-3549B3AFDCAB}"/>
+                <a16:creationId xmlns:a16="http://schemas.microsoft.com/office/drawing/2014/main" id="{67984DF8-DD7B-4CAB-A129-FE7A92934601}"/>
               </a:ext>
             </a:extLst>
           </p:cNvPr>
@@ -5697,7 +5270,7 @@
           <p:nvPr/>
         </p:nvPicPr>
         <p:blipFill>
-          <a:blip xmlns:r="http://schemas.openxmlformats.org/officeDocument/2006/relationships" xmlns:a="http://schemas.openxmlformats.org/drawingml/2006/main" r:embed="R3a988fefb35440e2"/>
+          <a:blip xmlns:r="http://schemas.openxmlformats.org/officeDocument/2006/relationships" xmlns:a="http://schemas.openxmlformats.org/drawingml/2006/main" r:embed="Rce8dc1d7322548b3"/>
           <a:stretch xmlns:a="http://schemas.openxmlformats.org/drawingml/2006/main"/>
         </p:blipFill>
         <p:spPr>
@@ -5710,40 +5283,12 @@
           </a:prstGeom>
         </p:spPr>
       </p:pic>
-      <p:pic>
-        <p:nvPicPr>
-          <p:cNvPr id="7" name="">
-            <a:extLst xmlns:a="http://schemas.openxmlformats.org/drawingml/2006/main">
-              <a:ext uri="{FF2B5EF4-FFF2-40B4-BE49-F238E27FC236}">
-                <a16:creationId xmlns:a16="http://schemas.microsoft.com/office/drawing/2014/main" id="{32D4EA31-60BE-474A-92A2-8D5C41CCABD0}"/>
-              </a:ext>
-            </a:extLst>
-          </p:cNvPr>
-          <p:cNvPicPr>
-            <a:picLocks xmlns:a="http://schemas.openxmlformats.org/drawingml/2006/main" noChangeAspect="1"/>
-          </p:cNvPicPr>
-          <p:nvPr/>
-        </p:nvPicPr>
-        <p:blipFill>
-          <a:blip xmlns:r="http://schemas.openxmlformats.org/officeDocument/2006/relationships" xmlns:a="http://schemas.openxmlformats.org/drawingml/2006/main" r:embed="R6e4ef5afdc4f45f5"/>
-          <a:stretch xmlns:a="http://schemas.openxmlformats.org/drawingml/2006/main"/>
-        </p:blipFill>
-        <p:spPr>
-          <a:xfrm xmlns:a="http://schemas.openxmlformats.org/drawingml/2006/main">
-            <a:off x="6435045" y="1428750"/>
-            <a:ext cx="1512661" cy="2190750"/>
-          </a:xfrm>
-          <a:prstGeom xmlns:a="http://schemas.openxmlformats.org/drawingml/2006/main" prst="rect">
-            <a:avLst/>
-          </a:prstGeom>
-        </p:spPr>
-      </p:pic>
       <p:sp>
         <p:nvSpPr>
           <p:cNvPr id="8" name="">
             <a:extLst xmlns:a="http://schemas.openxmlformats.org/drawingml/2006/main">
               <a:ext uri="{FF2B5EF4-FFF2-40B4-BE49-F238E27FC236}">
-                <a16:creationId xmlns:a16="http://schemas.microsoft.com/office/drawing/2014/main" id="{2195D303-E5E5-452B-BB4B-EFDB727AD300}"/>
+                <a16:creationId xmlns:a16="http://schemas.microsoft.com/office/drawing/2014/main" id="{ADC4A439-A768-4DB1-AEC2-073241C98D32}"/>
               </a:ext>
             </a:extLst>
           </p:cNvPr>
@@ -5870,53 +5415,43 @@
             </a:lvl9pPr>
           </a:lstStyle>
           <a:p xmlns:a="http://schemas.openxmlformats.org/drawingml/2006/main">
-            <a:pPr>
-              <a:defRPr sz="1125" b="0">
-                <a:solidFill>
-                  <a:srgbClr val="4F609B"/>
-                </a:solidFill>
-                <a:latin typeface="Noto Sans KR"/>
-                <a:ea typeface="Noto Sans KR"/>
-                <a:cs typeface="Noto Sans KR"/>
-              </a:defRPr>
-            </a:pPr>
             <a:r>
-              <a:rPr sz="1125" b="0">
-                <a:solidFill>
-                  <a:srgbClr val="4F609B"/>
-                </a:solidFill>
-                <a:latin typeface="Noto Sans KR"/>
-                <a:ea typeface="Noto Sans KR"/>
-                <a:cs typeface="Noto Sans KR"/>
-              </a:rPr>
+              <a:rPr sz="1050"/>
               <a:t>로딩 / 오류·재시도 / 빈 목록: 위젯 테스트 렌더링</a:t>
             </a:r>
           </a:p>
           <a:p xmlns:a="http://schemas.openxmlformats.org/drawingml/2006/main">
-            <a:pPr>
-              <a:defRPr sz="1125" b="0">
-                <a:solidFill>
-                  <a:srgbClr val="4F609B"/>
-                </a:solidFill>
-                <a:latin typeface="Noto Sans KR"/>
-                <a:ea typeface="Noto Sans KR"/>
-                <a:cs typeface="Noto Sans KR"/>
-              </a:defRPr>
-            </a:pPr>
             <a:r>
-              <a:rPr sz="1125" b="0">
-                <a:solidFill>
-                  <a:srgbClr val="4F609B"/>
-                </a:solidFill>
-                <a:latin typeface="Noto Sans KR"/>
-                <a:ea typeface="Noto Sans KR"/>
-                <a:cs typeface="Noto Sans KR"/>
-              </a:rPr>
-              <a:t>넓은 화면: 실제 브라우저 캡처. 실제 GET은 브라우저에서 확인.</a:t>
+              <a:rPr sz="1050"/>
+              <a:t>넓은 화면: 1280×800 위젯 테스트. 측면 안내와 3열 요약 확인.</a:t>
             </a:r>
           </a:p>
         </p:txBody>
       </p:sp>
+      <p:pic xmlns:a="http://schemas.openxmlformats.org/drawingml/2006/main" xmlns:r="http://schemas.openxmlformats.org/officeDocument/2006/relationships">
+        <p:nvPicPr>
+          <p:cNvPr id="10" name="Picture 9" descr="summary-wide.jpg"/>
+          <p:cNvPicPr>
+            <a:picLocks noChangeAspect="1"/>
+          </p:cNvPicPr>
+          <p:nvPr/>
+        </p:nvPicPr>
+        <p:blipFill>
+          <a:blip r:embed="rId7"/>
+          <a:stretch>
+            <a:fillRect/>
+          </a:stretch>
+        </p:blipFill>
+        <p:spPr>
+          <a:xfrm>
+            <a:off x="5623560" y="1417320"/>
+            <a:ext cx="2880360" cy="1801368"/>
+          </a:xfrm>
+          <a:prstGeom prst="rect">
+            <a:avLst/>
+          </a:prstGeom>
+        </p:spPr>
+      </p:pic>
     </p:spTree>
     <p:extLst>
       <p:ext uri="{BB962C8B-B14F-4D97-AF65-F5344CB8AC3E}">
@@ -5951,7 +5486,7 @@
           <p:cNvPr id="6" name="">
             <a:extLst xmlns:a="http://schemas.openxmlformats.org/drawingml/2006/main">
               <a:ext uri="{FF2B5EF4-FFF2-40B4-BE49-F238E27FC236}">
-                <a16:creationId xmlns:a16="http://schemas.microsoft.com/office/drawing/2014/main" id="{E6DA14ED-E88A-45C5-BC66-B339E38A340F}"/>
+                <a16:creationId xmlns:a16="http://schemas.microsoft.com/office/drawing/2014/main" id="{ACCDD07E-BBCA-4C6D-AE5F-6EF5B3B05B36}"/>
               </a:ext>
             </a:extLst>
           </p:cNvPr>
@@ -6107,7 +5642,7 @@
           <p:cNvPr id="2" name="">
             <a:extLst xmlns:a="http://schemas.openxmlformats.org/drawingml/2006/main">
               <a:ext uri="{FF2B5EF4-FFF2-40B4-BE49-F238E27FC236}">
-                <a16:creationId xmlns:a16="http://schemas.microsoft.com/office/drawing/2014/main" id="{5C7EE1BB-4FEF-4733-9BF7-0EBA38BB5C77}"/>
+                <a16:creationId xmlns:a16="http://schemas.microsoft.com/office/drawing/2014/main" id="{429A66A1-CD19-4703-AB5E-59FC8FB38FF5}"/>
               </a:ext>
             </a:extLst>
           </p:cNvPr>
@@ -6263,7 +5798,7 @@
           <p:cNvPr id="3" name="">
             <a:extLst xmlns:a="http://schemas.openxmlformats.org/drawingml/2006/main">
               <a:ext uri="{FF2B5EF4-FFF2-40B4-BE49-F238E27FC236}">
-                <a16:creationId xmlns:a16="http://schemas.microsoft.com/office/drawing/2014/main" id="{F2037A3D-B09B-4750-844C-2824DC552080}"/>
+                <a16:creationId xmlns:a16="http://schemas.microsoft.com/office/drawing/2014/main" id="{F8969BFB-9ED5-4FBD-A57F-5737C211F343}"/>
               </a:ext>
             </a:extLst>
           </p:cNvPr>
@@ -6390,25 +5925,7 @@
             </a:lvl9pPr>
           </a:lstStyle>
           <a:p xmlns:a="http://schemas.openxmlformats.org/drawingml/2006/main">
-            <a:pPr>
-              <a:defRPr sz="750" b="0">
-                <a:solidFill>
-                  <a:srgbClr val="657491"/>
-                </a:solidFill>
-                <a:latin typeface="Noto Sans KR"/>
-                <a:ea typeface="Noto Sans KR"/>
-                <a:cs typeface="Noto Sans KR"/>
-              </a:defRPr>
-            </a:pPr>
             <a:r>
-              <a:rPr sz="750" b="0">
-                <a:solidFill>
-                  <a:srgbClr val="657491"/>
-                </a:solidFill>
-                <a:latin typeface="Noto Sans KR"/>
-                <a:ea typeface="Noto Sans KR"/>
-                <a:cs typeface="Noto Sans KR"/>
-              </a:rPr>
               <a:t>NoteQuiz · zhaoboda 2025106293 · 12</a:t>
             </a:r>
           </a:p>
@@ -6419,7 +5936,7 @@
           <p:cNvPr id="4" name="">
             <a:extLst xmlns:a="http://schemas.openxmlformats.org/drawingml/2006/main">
               <a:ext uri="{FF2B5EF4-FFF2-40B4-BE49-F238E27FC236}">
-                <a16:creationId xmlns:a16="http://schemas.microsoft.com/office/drawing/2014/main" id="{78C6015A-B88E-4008-9B57-7DD2023A6C90}"/>
+                <a16:creationId xmlns:a16="http://schemas.microsoft.com/office/drawing/2014/main" id="{F2453796-959F-4757-BCD5-C5802CA00433}"/>
               </a:ext>
             </a:extLst>
           </p:cNvPr>
@@ -6772,7 +6289,7 @@
                           <a:ea typeface="Noto Sans KR"/>
                           <a:cs typeface="Noto Sans KR"/>
                         </a:rPr>
-                        <a:t>같은 문항</a:t>
+                        <a:t>원래 보기·내 선택</a:t>
                       </a:r>
                     </a:p>
                   </a:txBody>
@@ -7060,7 +6577,7 @@
           <p:cNvPr id="5" name="">
             <a:extLst xmlns:a="http://schemas.openxmlformats.org/drawingml/2006/main">
               <a:ext uri="{FF2B5EF4-FFF2-40B4-BE49-F238E27FC236}">
-                <a16:creationId xmlns:a16="http://schemas.microsoft.com/office/drawing/2014/main" id="{97F99B63-EA4B-472C-A6A4-BFF450267DA1}"/>
+                <a16:creationId xmlns:a16="http://schemas.microsoft.com/office/drawing/2014/main" id="{F1AD4AED-4D96-4834-8176-301FDD672470}"/>
               </a:ext>
             </a:extLst>
           </p:cNvPr>
@@ -7187,25 +6704,14 @@
             </a:lvl9pPr>
           </a:lstStyle>
           <a:p xmlns:a="http://schemas.openxmlformats.org/drawingml/2006/main">
-            <a:pPr>
-              <a:defRPr sz="1050" b="0">
-                <a:solidFill>
-                  <a:srgbClr val="4F609B"/>
-                </a:solidFill>
-                <a:latin typeface="Noto Sans KR"/>
-                <a:ea typeface="Noto Sans KR"/>
-                <a:cs typeface="Noto Sans KR"/>
-              </a:defRPr>
-            </a:pPr>
             <a:r>
-              <a:rPr sz="1050" b="0">
-                <a:solidFill>
-                  <a:srgbClr val="4F609B"/>
-                </a:solidFill>
-                <a:latin typeface="Noto Sans KR"/>
-                <a:ea typeface="Noto Sans KR"/>
-                <a:cs typeface="Noto Sans KR"/>
-              </a:rPr>
+              <a:rPr sz="950"/>
+              <a:t>추가 적용: P03 R-3·R-4 / P05 I-1·Q-3 / P07 S-4·E-4 / P08 S-1~3</a:t>
+            </a:r>
+          </a:p>
+          <a:p xmlns:a="http://schemas.openxmlformats.org/drawingml/2006/main">
+            <a:r>
+              <a:rPr sz="950"/>
               <a:t>R23 파싱 실패와 네트워크 오류는 다른 원인입니다. 복구 필요성의 간접 근거로만 연결합니다.</a:t>
             </a:r>
           </a:p>
@@ -7245,7 +6751,7 @@
           <p:cNvPr id="6" name="">
             <a:extLst xmlns:a="http://schemas.openxmlformats.org/drawingml/2006/main">
               <a:ext uri="{FF2B5EF4-FFF2-40B4-BE49-F238E27FC236}">
-                <a16:creationId xmlns:a16="http://schemas.microsoft.com/office/drawing/2014/main" id="{06CD3954-5E69-4F94-9D69-73D9E0C7F61B}"/>
+                <a16:creationId xmlns:a16="http://schemas.microsoft.com/office/drawing/2014/main" id="{E386E99D-422C-4488-9225-8EC58D848A46}"/>
               </a:ext>
             </a:extLst>
           </p:cNvPr>
@@ -7401,7 +6907,7 @@
           <p:cNvPr id="2" name="">
             <a:extLst xmlns:a="http://schemas.openxmlformats.org/drawingml/2006/main">
               <a:ext uri="{FF2B5EF4-FFF2-40B4-BE49-F238E27FC236}">
-                <a16:creationId xmlns:a16="http://schemas.microsoft.com/office/drawing/2014/main" id="{A14DD01E-1650-4209-AA97-FC10533DB215}"/>
+                <a16:creationId xmlns:a16="http://schemas.microsoft.com/office/drawing/2014/main" id="{797CB61A-9A0A-4B2C-8462-5F063EA501DA}"/>
               </a:ext>
             </a:extLst>
           </p:cNvPr>
@@ -7557,7 +7063,7 @@
           <p:cNvPr id="3" name="">
             <a:extLst xmlns:a="http://schemas.openxmlformats.org/drawingml/2006/main">
               <a:ext uri="{FF2B5EF4-FFF2-40B4-BE49-F238E27FC236}">
-                <a16:creationId xmlns:a16="http://schemas.microsoft.com/office/drawing/2014/main" id="{69269B13-E1F0-45B3-9C46-4360AF46D877}"/>
+                <a16:creationId xmlns:a16="http://schemas.microsoft.com/office/drawing/2014/main" id="{AA38CFBA-58C9-4954-BB38-9079D7BAB179}"/>
               </a:ext>
             </a:extLst>
           </p:cNvPr>
@@ -7684,25 +7190,7 @@
             </a:lvl9pPr>
           </a:lstStyle>
           <a:p xmlns:a="http://schemas.openxmlformats.org/drawingml/2006/main">
-            <a:pPr>
-              <a:defRPr sz="750" b="0">
-                <a:solidFill>
-                  <a:srgbClr val="657491"/>
-                </a:solidFill>
-                <a:latin typeface="Noto Sans KR"/>
-                <a:ea typeface="Noto Sans KR"/>
-                <a:cs typeface="Noto Sans KR"/>
-              </a:defRPr>
-            </a:pPr>
             <a:r>
-              <a:rPr sz="750" b="0">
-                <a:solidFill>
-                  <a:srgbClr val="657491"/>
-                </a:solidFill>
-                <a:latin typeface="Noto Sans KR"/>
-                <a:ea typeface="Noto Sans KR"/>
-                <a:cs typeface="Noto Sans KR"/>
-              </a:rPr>
               <a:t>NoteQuiz · zhaoboda 2025106293 · 13</a:t>
             </a:r>
           </a:p>
@@ -7713,7 +7201,7 @@
           <p:cNvPr id="4" name="">
             <a:extLst xmlns:a="http://schemas.openxmlformats.org/drawingml/2006/main">
               <a:ext uri="{FF2B5EF4-FFF2-40B4-BE49-F238E27FC236}">
-                <a16:creationId xmlns:a16="http://schemas.microsoft.com/office/drawing/2014/main" id="{4F0D3989-5CCC-42C9-ACDD-A73C6DC26157}"/>
+                <a16:creationId xmlns:a16="http://schemas.microsoft.com/office/drawing/2014/main" id="{552B1887-106A-4DBE-9F1A-6CA82EFFB075}"/>
               </a:ext>
             </a:extLst>
           </p:cNvPr>
@@ -7920,7 +7408,7 @@
                           <a:ea typeface="Noto Sans KR"/>
                           <a:cs typeface="Noto Sans KR"/>
                         </a:rPr>
-                        <a:t>全部常显，不折叠</a:t>
+                        <a:t>모두 항상 표시하고 접지 않는다</a:t>
                       </a:r>
                     </a:p>
                   </a:txBody>
@@ -7994,7 +7482,7 @@
                           <a:ea typeface="Noto Sans KR"/>
                           <a:cs typeface="Noto Sans KR"/>
                         </a:rPr>
-                        <a:t>太繁琐无法快速检索重要内容</a:t>
+                        <a:t>너무 번잡해서 중요한 내용을 빠르게 찾기 어렵다</a:t>
                       </a:r>
                     </a:p>
                   </a:txBody>
@@ -8186,7 +7674,7 @@
           <p:cNvPr id="5" name="">
             <a:extLst xmlns:a="http://schemas.openxmlformats.org/drawingml/2006/main">
               <a:ext uri="{FF2B5EF4-FFF2-40B4-BE49-F238E27FC236}">
-                <a16:creationId xmlns:a16="http://schemas.microsoft.com/office/drawing/2014/main" id="{64C7466B-87BE-440C-9837-5FB556FA080C}"/>
+                <a16:creationId xmlns:a16="http://schemas.microsoft.com/office/drawing/2014/main" id="{58EAFA20-94A5-49DF-87EF-600720A5CEEA}"/>
               </a:ext>
             </a:extLst>
           </p:cNvPr>
@@ -8313,49 +7801,15 @@
             </a:lvl9pPr>
           </a:lstStyle>
           <a:p xmlns:a="http://schemas.openxmlformats.org/drawingml/2006/main">
-            <a:pPr>
-              <a:defRPr sz="975" b="0">
-                <a:solidFill>
-                  <a:srgbClr val="4F609B"/>
-                </a:solidFill>
-                <a:latin typeface="Noto Sans KR"/>
-                <a:ea typeface="Noto Sans KR"/>
-                <a:cs typeface="Noto Sans KR"/>
-              </a:defRPr>
-            </a:pPr>
             <a:r>
-              <a:rPr sz="975" b="0">
-                <a:solidFill>
-                  <a:srgbClr val="4F609B"/>
-                </a:solidFill>
-                <a:latin typeface="Noto Sans KR"/>
-                <a:ea typeface="Noto Sans KR"/>
-                <a:cs typeface="Noto Sans KR"/>
-              </a:rPr>
-              <a:t>U는 실제 사용자 입력, A는 AI가 구성한 분석 질문입니다. 학생 발언으로 바꾸지 않았습니다.</a:t>
+              <a:rPr sz="950"/>
+              <a:t>U는 학생 발화를 한국어로 옮긴 기록, A는 AI가 구성한 분석 질문입니다.</a:t>
             </a:r>
           </a:p>
           <a:p xmlns:a="http://schemas.openxmlformats.org/drawingml/2006/main">
-            <a:pPr>
-              <a:defRPr sz="975" b="0">
-                <a:solidFill>
-                  <a:srgbClr val="4F609B"/>
-                </a:solidFill>
-                <a:latin typeface="Noto Sans KR"/>
-                <a:ea typeface="Noto Sans KR"/>
-                <a:cs typeface="Noto Sans KR"/>
-              </a:defRPr>
-            </a:pPr>
             <a:r>
-              <a:rPr sz="975" b="0">
-                <a:solidFill>
-                  <a:srgbClr val="4F609B"/>
-                </a:solidFill>
-                <a:latin typeface="Noto Sans KR"/>
-                <a:ea typeface="Noto Sans KR"/>
-                <a:cs typeface="Noto Sans KR"/>
-              </a:rPr>
-              <a:t>전체 다섯 필드 지시와 판단 구분: docs/prompt-log.md, 셀프논증.md</a:t>
+              <a:rPr sz="950"/>
+              <a:t>U0은 반론 요청이 아니며, 쟁점 3·4는 AI 검토안으로만 표시합니다. 전체 기록: docs/prompt-log.md</a:t>
             </a:r>
           </a:p>
         </p:txBody>
@@ -8394,7 +7848,7 @@
           <p:cNvPr id="6" name="">
             <a:extLst xmlns:a="http://schemas.openxmlformats.org/drawingml/2006/main">
               <a:ext uri="{FF2B5EF4-FFF2-40B4-BE49-F238E27FC236}">
-                <a16:creationId xmlns:a16="http://schemas.microsoft.com/office/drawing/2014/main" id="{B3F3A55B-3841-49A1-836D-901CD8F7709D}"/>
+                <a16:creationId xmlns:a16="http://schemas.microsoft.com/office/drawing/2014/main" id="{B8C88195-842E-4FA6-AD27-DEF95E6D7CB9}"/>
               </a:ext>
             </a:extLst>
           </p:cNvPr>
@@ -8550,7 +8004,7 @@
           <p:cNvPr id="2" name="">
             <a:extLst xmlns:a="http://schemas.openxmlformats.org/drawingml/2006/main">
               <a:ext uri="{FF2B5EF4-FFF2-40B4-BE49-F238E27FC236}">
-                <a16:creationId xmlns:a16="http://schemas.microsoft.com/office/drawing/2014/main" id="{FF641134-4FB0-4DCD-B8D4-CD3CF7198C52}"/>
+                <a16:creationId xmlns:a16="http://schemas.microsoft.com/office/drawing/2014/main" id="{E7C4F3A1-6744-4D32-80B4-8A34561C6224}"/>
               </a:ext>
             </a:extLst>
           </p:cNvPr>
@@ -8706,7 +8160,7 @@
           <p:cNvPr id="3" name="">
             <a:extLst xmlns:a="http://schemas.openxmlformats.org/drawingml/2006/main">
               <a:ext uri="{FF2B5EF4-FFF2-40B4-BE49-F238E27FC236}">
-                <a16:creationId xmlns:a16="http://schemas.microsoft.com/office/drawing/2014/main" id="{8D1E5C10-E8DC-457D-9B91-5A0F4C1B0C10}"/>
+                <a16:creationId xmlns:a16="http://schemas.microsoft.com/office/drawing/2014/main" id="{A63E6F57-3D63-44FD-B143-C0FC6621AC55}"/>
               </a:ext>
             </a:extLst>
           </p:cNvPr>
@@ -8833,26 +8287,8 @@
             </a:lvl9pPr>
           </a:lstStyle>
           <a:p xmlns:a="http://schemas.openxmlformats.org/drawingml/2006/main">
-            <a:pPr>
-              <a:defRPr sz="750" b="0">
-                <a:solidFill>
-                  <a:srgbClr val="657491"/>
-                </a:solidFill>
-                <a:latin typeface="Noto Sans KR"/>
-                <a:ea typeface="Noto Sans KR"/>
-                <a:cs typeface="Noto Sans KR"/>
-              </a:defRPr>
-            </a:pPr>
             <a:r>
-              <a:rPr sz="750" b="0">
-                <a:solidFill>
-                  <a:srgbClr val="657491"/>
-                </a:solidFill>
-                <a:latin typeface="Noto Sans KR"/>
-                <a:ea typeface="Noto Sans KR"/>
-                <a:cs typeface="Noto Sans KR"/>
-              </a:rPr>
-              <a:t>NoteQuiz · zhaoboda 2025106293 · 14</a:t>
+              <a:t>NoteQuiz · zhaoboda 2025106293 · 15</a:t>
             </a:r>
           </a:p>
         </p:txBody>
@@ -8862,7 +8298,7 @@
           <p:cNvPr id="4" name="">
             <a:extLst xmlns:a="http://schemas.openxmlformats.org/drawingml/2006/main">
               <a:ext uri="{FF2B5EF4-FFF2-40B4-BE49-F238E27FC236}">
-                <a16:creationId xmlns:a16="http://schemas.microsoft.com/office/drawing/2014/main" id="{71BCF745-4F28-4AA4-ABA3-B5FE122959F0}"/>
+                <a16:creationId xmlns:a16="http://schemas.microsoft.com/office/drawing/2014/main" id="{CF384E19-0F1C-4BF6-B199-0ECBE40C2563}"/>
               </a:ext>
             </a:extLst>
           </p:cNvPr>
@@ -9093,7 +8529,7 @@
                           <a:ea typeface="Noto Sans KR"/>
                           <a:cs typeface="Noto Sans KR"/>
                         </a:rPr>
-                        <a:t>학생 선택·자체 반론 + AI 재검토안. 최종 본인 설명 확인</a:t>
+                        <a:t>학생 확인 2개 + AI 검토 2개. 한계 명시</a:t>
                       </a:r>
                     </a:p>
                   </a:txBody>
@@ -9167,7 +8603,7 @@
                           <a:ea typeface="Noto Sans KR"/>
                           <a:cs typeface="Noto Sans KR"/>
                         </a:rPr>
-                        <a:t>정적 분석·테스트·Web 빌드·브라우저 흐름</a:t>
+                        <a:t>정적 분석·6개 테스트·Web 빌드·1280px 캡처</a:t>
                       </a:r>
                     </a:p>
                   </a:txBody>
@@ -9241,7 +8677,7 @@
                           <a:ea typeface="Noto Sans KR"/>
                           <a:cs typeface="Noto Sans KR"/>
                         </a:rPr>
-                        <a:t>본문 7장·6분 대본·1분 영상. 본인 계시 리허설 필요</a:t>
+                        <a:t>본문 7장·6분 대본·1분 영상. 실제 시간 측정은 제출자 확인</a:t>
                       </a:r>
                     </a:p>
                   </a:txBody>
@@ -9315,7 +8751,7 @@
                           <a:ea typeface="Noto Sans KR"/>
                           <a:cs typeface="Noto Sans KR"/>
                         </a:rPr>
-                        <a:t>개인 GitHub URL, 원격 clone, LMS 제출은 미완료</a:t>
+                        <a:t>개인 GitHub 원격 등록 완료. LMS 제출은 제출자 확인</a:t>
                       </a:r>
                     </a:p>
                   </a:txBody>
@@ -9335,7 +8771,7 @@
           <p:cNvPr id="5" name="">
             <a:extLst xmlns:a="http://schemas.openxmlformats.org/drawingml/2006/main">
               <a:ext uri="{FF2B5EF4-FFF2-40B4-BE49-F238E27FC236}">
-                <a16:creationId xmlns:a16="http://schemas.microsoft.com/office/drawing/2014/main" id="{23A8F6C8-0448-43E7-9D8F-9641D2D580D7}"/>
+                <a16:creationId xmlns:a16="http://schemas.microsoft.com/office/drawing/2014/main" id="{55C9C18F-70F8-4630-8DDF-35CA1B597913}"/>
               </a:ext>
             </a:extLst>
           </p:cNvPr>
@@ -9520,7 +8956,7 @@
           <p:cNvPr id="5" name="">
             <a:extLst xmlns:a="http://schemas.openxmlformats.org/drawingml/2006/main">
               <a:ext uri="{FF2B5EF4-FFF2-40B4-BE49-F238E27FC236}">
-                <a16:creationId xmlns:a16="http://schemas.microsoft.com/office/drawing/2014/main" id="{F2B29C0B-26B1-4531-8F51-50C19E6DC549}"/>
+                <a16:creationId xmlns:a16="http://schemas.microsoft.com/office/drawing/2014/main" id="{EC81E0EA-E97C-4467-BB13-A2F4AEA1EC34}"/>
               </a:ext>
             </a:extLst>
           </p:cNvPr>
@@ -9676,7 +9112,7 @@
           <p:cNvPr id="2" name="">
             <a:extLst xmlns:a="http://schemas.openxmlformats.org/drawingml/2006/main">
               <a:ext uri="{FF2B5EF4-FFF2-40B4-BE49-F238E27FC236}">
-                <a16:creationId xmlns:a16="http://schemas.microsoft.com/office/drawing/2014/main" id="{A9D03761-427D-4380-98A1-A7A51C00FD0C}"/>
+                <a16:creationId xmlns:a16="http://schemas.microsoft.com/office/drawing/2014/main" id="{A8E88E01-A321-4C7F-911C-0075B0BF3135}"/>
               </a:ext>
             </a:extLst>
           </p:cNvPr>
@@ -9832,7 +9268,7 @@
           <p:cNvPr id="3" name="">
             <a:extLst xmlns:a="http://schemas.openxmlformats.org/drawingml/2006/main">
               <a:ext uri="{FF2B5EF4-FFF2-40B4-BE49-F238E27FC236}">
-                <a16:creationId xmlns:a16="http://schemas.microsoft.com/office/drawing/2014/main" id="{72B8C6DD-5980-4BAF-A7B3-78E7174688FC}"/>
+                <a16:creationId xmlns:a16="http://schemas.microsoft.com/office/drawing/2014/main" id="{0FE79684-6782-459D-90BA-177DB554D4AA}"/>
               </a:ext>
             </a:extLst>
           </p:cNvPr>
@@ -9959,26 +9395,8 @@
             </a:lvl9pPr>
           </a:lstStyle>
           <a:p xmlns:a="http://schemas.openxmlformats.org/drawingml/2006/main">
-            <a:pPr>
-              <a:defRPr sz="750" b="0">
-                <a:solidFill>
-                  <a:srgbClr val="657491"/>
-                </a:solidFill>
-                <a:latin typeface="Noto Sans KR"/>
-                <a:ea typeface="Noto Sans KR"/>
-                <a:cs typeface="Noto Sans KR"/>
-              </a:defRPr>
-            </a:pPr>
             <a:r>
-              <a:rPr sz="750" b="0">
-                <a:solidFill>
-                  <a:srgbClr val="657491"/>
-                </a:solidFill>
-                <a:latin typeface="Noto Sans KR"/>
-                <a:ea typeface="Noto Sans KR"/>
-                <a:cs typeface="Noto Sans KR"/>
-              </a:rPr>
-              <a:t>NoteQuiz · zhaoboda 2025106293 · 15</a:t>
+              <a:t>NoteQuiz · zhaoboda 2025106293 · 17</a:t>
             </a:r>
           </a:p>
         </p:txBody>
@@ -9988,7 +9406,7 @@
           <p:cNvPr id="4" name="">
             <a:extLst xmlns:a="http://schemas.openxmlformats.org/drawingml/2006/main">
               <a:ext uri="{FF2B5EF4-FFF2-40B4-BE49-F238E27FC236}">
-                <a16:creationId xmlns:a16="http://schemas.microsoft.com/office/drawing/2014/main" id="{B66DE6E6-E6AF-4750-BF92-E9C964A03689}"/>
+                <a16:creationId xmlns:a16="http://schemas.microsoft.com/office/drawing/2014/main" id="{8E974A9D-491F-4C81-9E34-89056CB4DD74}"/>
               </a:ext>
             </a:extLst>
           </p:cNvPr>
@@ -10395,7 +9813,7 @@
           <p:cNvPr id="6" name="">
             <a:extLst xmlns:a="http://schemas.openxmlformats.org/drawingml/2006/main">
               <a:ext uri="{FF2B5EF4-FFF2-40B4-BE49-F238E27FC236}">
-                <a16:creationId xmlns:a16="http://schemas.microsoft.com/office/drawing/2014/main" id="{3A12D088-55DB-412C-87C9-A8E74BF6095F}"/>
+                <a16:creationId xmlns:a16="http://schemas.microsoft.com/office/drawing/2014/main" id="{336D4A2E-39DC-4706-9F93-6D81027EA9D0}"/>
               </a:ext>
             </a:extLst>
           </p:cNvPr>
@@ -10551,7 +9969,7 @@
           <p:cNvPr id="2" name="">
             <a:extLst xmlns:a="http://schemas.openxmlformats.org/drawingml/2006/main">
               <a:ext uri="{FF2B5EF4-FFF2-40B4-BE49-F238E27FC236}">
-                <a16:creationId xmlns:a16="http://schemas.microsoft.com/office/drawing/2014/main" id="{CA7D8B3E-27BE-428F-B270-79E77680B6F7}"/>
+                <a16:creationId xmlns:a16="http://schemas.microsoft.com/office/drawing/2014/main" id="{C7FBF10D-9C42-41B6-B3F9-BD8A9D3D31F4}"/>
               </a:ext>
             </a:extLst>
           </p:cNvPr>
@@ -10707,7 +10125,7 @@
           <p:cNvPr id="3" name="">
             <a:extLst xmlns:a="http://schemas.openxmlformats.org/drawingml/2006/main">
               <a:ext uri="{FF2B5EF4-FFF2-40B4-BE49-F238E27FC236}">
-                <a16:creationId xmlns:a16="http://schemas.microsoft.com/office/drawing/2014/main" id="{05D5F6F5-9509-44A7-9D89-80E482381447}"/>
+                <a16:creationId xmlns:a16="http://schemas.microsoft.com/office/drawing/2014/main" id="{3BBE7E30-67D4-47D3-A552-44BD87D5F82F}"/>
               </a:ext>
             </a:extLst>
           </p:cNvPr>
@@ -10834,26 +10252,8 @@
             </a:lvl9pPr>
           </a:lstStyle>
           <a:p xmlns:a="http://schemas.openxmlformats.org/drawingml/2006/main">
-            <a:pPr>
-              <a:defRPr sz="750" b="0">
-                <a:solidFill>
-                  <a:srgbClr val="657491"/>
-                </a:solidFill>
-                <a:latin typeface="Noto Sans KR"/>
-                <a:ea typeface="Noto Sans KR"/>
-                <a:cs typeface="Noto Sans KR"/>
-              </a:defRPr>
-            </a:pPr>
             <a:r>
-              <a:rPr sz="750" b="0">
-                <a:solidFill>
-                  <a:srgbClr val="657491"/>
-                </a:solidFill>
-                <a:latin typeface="Noto Sans KR"/>
-                <a:ea typeface="Noto Sans KR"/>
-                <a:cs typeface="Noto Sans KR"/>
-              </a:rPr>
-              <a:t>NoteQuiz · zhaoboda 2025106293 · 16</a:t>
+              <a:t>NoteQuiz · zhaoboda 2025106293 · 18</a:t>
             </a:r>
           </a:p>
         </p:txBody>
@@ -10863,7 +10263,7 @@
           <p:cNvPr id="4" name="">
             <a:extLst xmlns:a="http://schemas.openxmlformats.org/drawingml/2006/main">
               <a:ext uri="{FF2B5EF4-FFF2-40B4-BE49-F238E27FC236}">
-                <a16:creationId xmlns:a16="http://schemas.microsoft.com/office/drawing/2014/main" id="{61A924F7-4121-4EE7-9669-50B50DD96631}"/>
+                <a16:creationId xmlns:a16="http://schemas.microsoft.com/office/drawing/2014/main" id="{103195DA-F2F0-4CE9-B2F2-FC7ACD48A1CF}"/>
               </a:ext>
             </a:extLst>
           </p:cNvPr>
@@ -11870,7 +11270,7 @@
           <p:cNvPr id="5" name="">
             <a:extLst xmlns:a="http://schemas.openxmlformats.org/drawingml/2006/main">
               <a:ext uri="{FF2B5EF4-FFF2-40B4-BE49-F238E27FC236}">
-                <a16:creationId xmlns:a16="http://schemas.microsoft.com/office/drawing/2014/main" id="{4B02093A-E8A1-4230-B006-A32BDBB42448}"/>
+                <a16:creationId xmlns:a16="http://schemas.microsoft.com/office/drawing/2014/main" id="{9146C03C-F33B-4C0E-BC48-88F73421DA20}"/>
               </a:ext>
             </a:extLst>
           </p:cNvPr>
@@ -12055,7 +11455,7 @@
           <p:cNvPr id="25" name="">
             <a:extLst xmlns:a="http://schemas.openxmlformats.org/drawingml/2006/main">
               <a:ext uri="{FF2B5EF4-FFF2-40B4-BE49-F238E27FC236}">
-                <a16:creationId xmlns:a16="http://schemas.microsoft.com/office/drawing/2014/main" id="{23B260AC-2D1E-41EB-8306-7FABBE57F925}"/>
+                <a16:creationId xmlns:a16="http://schemas.microsoft.com/office/drawing/2014/main" id="{26D5A82F-BA7D-4208-8D69-1FCE1D0794AA}"/>
               </a:ext>
             </a:extLst>
           </p:cNvPr>
@@ -12211,7 +11611,7 @@
           <p:cNvPr id="2" name="">
             <a:extLst xmlns:a="http://schemas.openxmlformats.org/drawingml/2006/main">
               <a:ext uri="{FF2B5EF4-FFF2-40B4-BE49-F238E27FC236}">
-                <a16:creationId xmlns:a16="http://schemas.microsoft.com/office/drawing/2014/main" id="{D0A999F7-8FD5-4708-AB71-23D6DD8CBD8D}"/>
+                <a16:creationId xmlns:a16="http://schemas.microsoft.com/office/drawing/2014/main" id="{6B1A658E-21C0-412C-87D5-8D2CA4D592A4}"/>
               </a:ext>
             </a:extLst>
           </p:cNvPr>
@@ -12367,7 +11767,7 @@
           <p:cNvPr id="3" name="">
             <a:extLst xmlns:a="http://schemas.openxmlformats.org/drawingml/2006/main">
               <a:ext uri="{FF2B5EF4-FFF2-40B4-BE49-F238E27FC236}">
-                <a16:creationId xmlns:a16="http://schemas.microsoft.com/office/drawing/2014/main" id="{79DF37A2-A1EB-4C47-9008-B84F9B956463}"/>
+                <a16:creationId xmlns:a16="http://schemas.microsoft.com/office/drawing/2014/main" id="{BCCBD17C-8828-4F73-97A5-8F3153A98CA7}"/>
               </a:ext>
             </a:extLst>
           </p:cNvPr>
@@ -12494,26 +11894,8 @@
             </a:lvl9pPr>
           </a:lstStyle>
           <a:p xmlns:a="http://schemas.openxmlformats.org/drawingml/2006/main">
-            <a:pPr>
-              <a:defRPr sz="750" b="0">
-                <a:solidFill>
-                  <a:srgbClr val="657491"/>
-                </a:solidFill>
-                <a:latin typeface="Noto Sans KR"/>
-                <a:ea typeface="Noto Sans KR"/>
-                <a:cs typeface="Noto Sans KR"/>
-              </a:defRPr>
-            </a:pPr>
             <a:r>
-              <a:rPr sz="750" b="0">
-                <a:solidFill>
-                  <a:srgbClr val="657491"/>
-                </a:solidFill>
-                <a:latin typeface="Noto Sans KR"/>
-                <a:ea typeface="Noto Sans KR"/>
-                <a:cs typeface="Noto Sans KR"/>
-              </a:rPr>
-              <a:t>NoteQuiz · zhaoboda 2025106293 · 17</a:t>
+              <a:t>NoteQuiz · zhaoboda 2025106293 · 19</a:t>
             </a:r>
           </a:p>
         </p:txBody>
@@ -12523,7 +11905,7 @@
           <p:cNvPr id="4" name="">
             <a:extLst xmlns:a="http://schemas.openxmlformats.org/drawingml/2006/main">
               <a:ext uri="{FF2B5EF4-FFF2-40B4-BE49-F238E27FC236}">
-                <a16:creationId xmlns:a16="http://schemas.microsoft.com/office/drawing/2014/main" id="{0EE14C28-9D70-454C-BF7F-B35705FFD154}"/>
+                <a16:creationId xmlns:a16="http://schemas.microsoft.com/office/drawing/2014/main" id="{DC848110-61C1-420B-AEFF-33FA76AFEF37}"/>
               </a:ext>
             </a:extLst>
           </p:cNvPr>
@@ -12535,7 +11917,7 @@
         <p:spPr>
           <a:xfrm xmlns:a="http://schemas.openxmlformats.org/drawingml/2006/main">
             <a:off x="571500" y="2714625"/>
-            <a:ext cx="7524750" cy="0"/>
+            <a:ext cx="7524750" cy="9525"/>
           </a:xfrm>
           <a:prstGeom xmlns:a="http://schemas.openxmlformats.org/drawingml/2006/main" prst="line">
             <a:avLst/>
@@ -12547,13 +11929,17 @@
             </a:solidFill>
           </a:ln>
         </p:spPr>
+        <p:txBody xmlns:a="http://schemas.openxmlformats.org/drawingml/2006/main">
+          <a:bodyPr/>
+          <a:p/>
+        </p:txBody>
       </p:sp>
       <p:sp>
         <p:nvSpPr>
           <p:cNvPr id="5" name="">
             <a:extLst xmlns:a="http://schemas.openxmlformats.org/drawingml/2006/main">
               <a:ext uri="{FF2B5EF4-FFF2-40B4-BE49-F238E27FC236}">
-                <a16:creationId xmlns:a16="http://schemas.microsoft.com/office/drawing/2014/main" id="{DA46A687-5DF6-4AD5-B734-E8B339D5AEAF}"/>
+                <a16:creationId xmlns:a16="http://schemas.microsoft.com/office/drawing/2014/main" id="{F951E897-F044-430D-9F27-419DE77FA7CE}"/>
               </a:ext>
             </a:extLst>
           </p:cNvPr>
@@ -12732,7 +12118,7 @@
           <p:cNvPr id="6" name="">
             <a:extLst xmlns:a="http://schemas.openxmlformats.org/drawingml/2006/main">
               <a:ext uri="{FF2B5EF4-FFF2-40B4-BE49-F238E27FC236}">
-                <a16:creationId xmlns:a16="http://schemas.microsoft.com/office/drawing/2014/main" id="{3C24D156-4CD2-4D7B-9B80-9D63CD2B1A88}"/>
+                <a16:creationId xmlns:a16="http://schemas.microsoft.com/office/drawing/2014/main" id="{8F73F5BA-78E0-4AAF-B202-F81E4F3ECEEC}"/>
               </a:ext>
             </a:extLst>
           </p:cNvPr>
@@ -12888,7 +12274,7 @@
           <p:cNvPr id="7" name="">
             <a:extLst xmlns:a="http://schemas.openxmlformats.org/drawingml/2006/main">
               <a:ext uri="{FF2B5EF4-FFF2-40B4-BE49-F238E27FC236}">
-                <a16:creationId xmlns:a16="http://schemas.microsoft.com/office/drawing/2014/main" id="{373F2AFF-13B8-4F3E-98FD-D54F4BAE0286}"/>
+                <a16:creationId xmlns:a16="http://schemas.microsoft.com/office/drawing/2014/main" id="{536035A3-C18A-461E-BC2B-BAD4D33F78C5}"/>
               </a:ext>
             </a:extLst>
           </p:cNvPr>
@@ -13044,7 +12430,7 @@
           <p:cNvPr id="8" name="">
             <a:extLst xmlns:a="http://schemas.openxmlformats.org/drawingml/2006/main">
               <a:ext uri="{FF2B5EF4-FFF2-40B4-BE49-F238E27FC236}">
-                <a16:creationId xmlns:a16="http://schemas.microsoft.com/office/drawing/2014/main" id="{DE91D085-231E-4242-8270-25CA38EC1703}"/>
+                <a16:creationId xmlns:a16="http://schemas.microsoft.com/office/drawing/2014/main" id="{00287B70-99D5-490A-A0BB-540590C3683E}"/>
               </a:ext>
             </a:extLst>
           </p:cNvPr>
@@ -13068,13 +12454,17 @@
             </a:solidFill>
           </a:ln>
         </p:spPr>
+        <p:txBody xmlns:a="http://schemas.openxmlformats.org/drawingml/2006/main">
+          <a:bodyPr/>
+          <a:p/>
+        </p:txBody>
       </p:sp>
       <p:sp>
         <p:nvSpPr>
           <p:cNvPr id="9" name="">
             <a:extLst xmlns:a="http://schemas.openxmlformats.org/drawingml/2006/main">
               <a:ext uri="{FF2B5EF4-FFF2-40B4-BE49-F238E27FC236}">
-                <a16:creationId xmlns:a16="http://schemas.microsoft.com/office/drawing/2014/main" id="{5713926C-3252-47FA-9244-9F827F01FFAF}"/>
+                <a16:creationId xmlns:a16="http://schemas.microsoft.com/office/drawing/2014/main" id="{D332926E-61BE-4F68-9AE5-4162228F1787}"/>
               </a:ext>
             </a:extLst>
           </p:cNvPr>
@@ -13230,7 +12620,7 @@
           <p:cNvPr id="10" name="">
             <a:extLst xmlns:a="http://schemas.openxmlformats.org/drawingml/2006/main">
               <a:ext uri="{FF2B5EF4-FFF2-40B4-BE49-F238E27FC236}">
-                <a16:creationId xmlns:a16="http://schemas.microsoft.com/office/drawing/2014/main" id="{EFF19DB3-1A42-48D5-8172-3CC28428CE72}"/>
+                <a16:creationId xmlns:a16="http://schemas.microsoft.com/office/drawing/2014/main" id="{EEA5F4A4-09B7-4F47-A985-B0DE18D55244}"/>
               </a:ext>
             </a:extLst>
           </p:cNvPr>
@@ -13386,7 +12776,7 @@
           <p:cNvPr id="11" name="">
             <a:extLst xmlns:a="http://schemas.openxmlformats.org/drawingml/2006/main">
               <a:ext uri="{FF2B5EF4-FFF2-40B4-BE49-F238E27FC236}">
-                <a16:creationId xmlns:a16="http://schemas.microsoft.com/office/drawing/2014/main" id="{E3C2AEFE-DF92-4D86-A6CA-BE008C60D382}"/>
+                <a16:creationId xmlns:a16="http://schemas.microsoft.com/office/drawing/2014/main" id="{75252A22-3E3A-448C-B5AC-5BF69178C9AD}"/>
               </a:ext>
             </a:extLst>
           </p:cNvPr>
@@ -13410,13 +12800,17 @@
             </a:solidFill>
           </a:ln>
         </p:spPr>
+        <p:txBody xmlns:a="http://schemas.openxmlformats.org/drawingml/2006/main">
+          <a:bodyPr/>
+          <a:p/>
+        </p:txBody>
       </p:sp>
       <p:sp>
         <p:nvSpPr>
           <p:cNvPr id="12" name="">
             <a:extLst xmlns:a="http://schemas.openxmlformats.org/drawingml/2006/main">
               <a:ext uri="{FF2B5EF4-FFF2-40B4-BE49-F238E27FC236}">
-                <a16:creationId xmlns:a16="http://schemas.microsoft.com/office/drawing/2014/main" id="{03B24763-025A-47D9-98CA-608FD4B3C608}"/>
+                <a16:creationId xmlns:a16="http://schemas.microsoft.com/office/drawing/2014/main" id="{B5B9395B-F7FD-4987-A5EB-12D70E4A095C}"/>
               </a:ext>
             </a:extLst>
           </p:cNvPr>
@@ -13572,7 +12966,7 @@
           <p:cNvPr id="13" name="">
             <a:extLst xmlns:a="http://schemas.openxmlformats.org/drawingml/2006/main">
               <a:ext uri="{FF2B5EF4-FFF2-40B4-BE49-F238E27FC236}">
-                <a16:creationId xmlns:a16="http://schemas.microsoft.com/office/drawing/2014/main" id="{E288791D-2B2E-43FB-B03A-E1B95DF7544F}"/>
+                <a16:creationId xmlns:a16="http://schemas.microsoft.com/office/drawing/2014/main" id="{CE1FB36F-DED7-40D3-BFA4-3C82360F4FD8}"/>
               </a:ext>
             </a:extLst>
           </p:cNvPr>
@@ -13728,7 +13122,7 @@
           <p:cNvPr id="14" name="">
             <a:extLst xmlns:a="http://schemas.openxmlformats.org/drawingml/2006/main">
               <a:ext uri="{FF2B5EF4-FFF2-40B4-BE49-F238E27FC236}">
-                <a16:creationId xmlns:a16="http://schemas.microsoft.com/office/drawing/2014/main" id="{13C330A9-C58A-430F-9D2C-2D61B3349187}"/>
+                <a16:creationId xmlns:a16="http://schemas.microsoft.com/office/drawing/2014/main" id="{6B690E7D-B08A-411C-86BB-2C037C0A7F8C}"/>
               </a:ext>
             </a:extLst>
           </p:cNvPr>
@@ -13752,13 +13146,17 @@
             </a:solidFill>
           </a:ln>
         </p:spPr>
+        <p:txBody xmlns:a="http://schemas.openxmlformats.org/drawingml/2006/main">
+          <a:bodyPr/>
+          <a:p/>
+        </p:txBody>
       </p:sp>
       <p:sp>
         <p:nvSpPr>
           <p:cNvPr id="15" name="">
             <a:extLst xmlns:a="http://schemas.openxmlformats.org/drawingml/2006/main">
               <a:ext uri="{FF2B5EF4-FFF2-40B4-BE49-F238E27FC236}">
-                <a16:creationId xmlns:a16="http://schemas.microsoft.com/office/drawing/2014/main" id="{9FFFCCF0-C971-42B3-B875-96BFB3B76933}"/>
+                <a16:creationId xmlns:a16="http://schemas.microsoft.com/office/drawing/2014/main" id="{E980A772-45E2-4B48-89DB-BF8E7CC945BC}"/>
               </a:ext>
             </a:extLst>
           </p:cNvPr>
@@ -13914,7 +13312,7 @@
           <p:cNvPr id="16" name="">
             <a:extLst xmlns:a="http://schemas.openxmlformats.org/drawingml/2006/main">
               <a:ext uri="{FF2B5EF4-FFF2-40B4-BE49-F238E27FC236}">
-                <a16:creationId xmlns:a16="http://schemas.microsoft.com/office/drawing/2014/main" id="{F98C336A-9FD9-4D96-9BCE-1566239DE2E8}"/>
+                <a16:creationId xmlns:a16="http://schemas.microsoft.com/office/drawing/2014/main" id="{A089CB58-C355-42C3-AB16-0BF0DBDC8877}"/>
               </a:ext>
             </a:extLst>
           </p:cNvPr>
@@ -14070,7 +13468,7 @@
           <p:cNvPr id="17" name="">
             <a:extLst xmlns:a="http://schemas.openxmlformats.org/drawingml/2006/main">
               <a:ext uri="{FF2B5EF4-FFF2-40B4-BE49-F238E27FC236}">
-                <a16:creationId xmlns:a16="http://schemas.microsoft.com/office/drawing/2014/main" id="{E0851970-EEBD-477F-B607-C21D2A7EACDD}"/>
+                <a16:creationId xmlns:a16="http://schemas.microsoft.com/office/drawing/2014/main" id="{FF95D23B-F14D-467C-8CF8-A1CB8FA2F939}"/>
               </a:ext>
             </a:extLst>
           </p:cNvPr>
@@ -14094,13 +13492,17 @@
             </a:solidFill>
           </a:ln>
         </p:spPr>
+        <p:txBody xmlns:a="http://schemas.openxmlformats.org/drawingml/2006/main">
+          <a:bodyPr/>
+          <a:p/>
+        </p:txBody>
       </p:sp>
       <p:sp>
         <p:nvSpPr>
           <p:cNvPr id="18" name="">
             <a:extLst xmlns:a="http://schemas.openxmlformats.org/drawingml/2006/main">
               <a:ext uri="{FF2B5EF4-FFF2-40B4-BE49-F238E27FC236}">
-                <a16:creationId xmlns:a16="http://schemas.microsoft.com/office/drawing/2014/main" id="{AD823DEC-812A-46CB-B1CE-39E461F2086A}"/>
+                <a16:creationId xmlns:a16="http://schemas.microsoft.com/office/drawing/2014/main" id="{E5B46DDB-B37D-4947-A0B5-3F93C23A1554}"/>
               </a:ext>
             </a:extLst>
           </p:cNvPr>
@@ -14256,7 +13658,7 @@
           <p:cNvPr id="19" name="">
             <a:extLst xmlns:a="http://schemas.openxmlformats.org/drawingml/2006/main">
               <a:ext uri="{FF2B5EF4-FFF2-40B4-BE49-F238E27FC236}">
-                <a16:creationId xmlns:a16="http://schemas.microsoft.com/office/drawing/2014/main" id="{F95F897B-C746-4C83-93D8-945976CE670D}"/>
+                <a16:creationId xmlns:a16="http://schemas.microsoft.com/office/drawing/2014/main" id="{9C22B2B7-CF13-47BF-A47C-3B087ED29731}"/>
               </a:ext>
             </a:extLst>
           </p:cNvPr>
@@ -14412,7 +13814,7 @@
           <p:cNvPr id="20" name="">
             <a:extLst xmlns:a="http://schemas.openxmlformats.org/drawingml/2006/main">
               <a:ext uri="{FF2B5EF4-FFF2-40B4-BE49-F238E27FC236}">
-                <a16:creationId xmlns:a16="http://schemas.microsoft.com/office/drawing/2014/main" id="{16BA501F-A731-4323-A450-1A4F6C0574A2}"/>
+                <a16:creationId xmlns:a16="http://schemas.microsoft.com/office/drawing/2014/main" id="{CA2EE6D5-D32E-4232-B7F9-ED5722772CF8}"/>
               </a:ext>
             </a:extLst>
           </p:cNvPr>
@@ -14436,13 +13838,17 @@
             </a:solidFill>
           </a:ln>
         </p:spPr>
+        <p:txBody xmlns:a="http://schemas.openxmlformats.org/drawingml/2006/main">
+          <a:bodyPr/>
+          <a:p/>
+        </p:txBody>
       </p:sp>
       <p:sp>
         <p:nvSpPr>
           <p:cNvPr id="21" name="">
             <a:extLst xmlns:a="http://schemas.openxmlformats.org/drawingml/2006/main">
               <a:ext uri="{FF2B5EF4-FFF2-40B4-BE49-F238E27FC236}">
-                <a16:creationId xmlns:a16="http://schemas.microsoft.com/office/drawing/2014/main" id="{E3A850E8-A973-4436-9D3E-09AC14D7E8EE}"/>
+                <a16:creationId xmlns:a16="http://schemas.microsoft.com/office/drawing/2014/main" id="{EACE6C1B-02A9-4F6B-9451-7D1772E090EF}"/>
               </a:ext>
             </a:extLst>
           </p:cNvPr>
@@ -14598,7 +14004,7 @@
           <p:cNvPr id="22" name="">
             <a:extLst xmlns:a="http://schemas.openxmlformats.org/drawingml/2006/main">
               <a:ext uri="{FF2B5EF4-FFF2-40B4-BE49-F238E27FC236}">
-                <a16:creationId xmlns:a16="http://schemas.microsoft.com/office/drawing/2014/main" id="{514E2447-21D8-4F8D-BCB5-699929143F59}"/>
+                <a16:creationId xmlns:a16="http://schemas.microsoft.com/office/drawing/2014/main" id="{2821A702-E8DE-40E8-8BAA-BAD0C797ED8F}"/>
               </a:ext>
             </a:extLst>
           </p:cNvPr>
@@ -14754,7 +14160,7 @@
           <p:cNvPr id="23" name="">
             <a:extLst xmlns:a="http://schemas.openxmlformats.org/drawingml/2006/main">
               <a:ext uri="{FF2B5EF4-FFF2-40B4-BE49-F238E27FC236}">
-                <a16:creationId xmlns:a16="http://schemas.microsoft.com/office/drawing/2014/main" id="{92D62F4C-7FA8-460B-89E3-ADC61A5515FF}"/>
+                <a16:creationId xmlns:a16="http://schemas.microsoft.com/office/drawing/2014/main" id="{3407D76C-7734-4749-B54F-091A6BA41CB8}"/>
               </a:ext>
             </a:extLst>
           </p:cNvPr>
@@ -14778,13 +14184,17 @@
             </a:solidFill>
           </a:ln>
         </p:spPr>
+        <p:txBody xmlns:a="http://schemas.openxmlformats.org/drawingml/2006/main">
+          <a:bodyPr/>
+          <a:p/>
+        </p:txBody>
       </p:sp>
       <p:sp>
         <p:nvSpPr>
           <p:cNvPr id="24" name="">
             <a:extLst xmlns:a="http://schemas.openxmlformats.org/drawingml/2006/main">
               <a:ext uri="{FF2B5EF4-FFF2-40B4-BE49-F238E27FC236}">
-                <a16:creationId xmlns:a16="http://schemas.microsoft.com/office/drawing/2014/main" id="{0AA2F793-A5B4-4F0A-98CA-AF56AB967896}"/>
+                <a16:creationId xmlns:a16="http://schemas.microsoft.com/office/drawing/2014/main" id="{6AA3F489-2A7B-4404-9291-E92D3CB03805}"/>
               </a:ext>
             </a:extLst>
           </p:cNvPr>
@@ -14969,7 +14379,7 @@
           <p:cNvPr id="6" name="">
             <a:extLst xmlns:a="http://schemas.openxmlformats.org/drawingml/2006/main">
               <a:ext uri="{FF2B5EF4-FFF2-40B4-BE49-F238E27FC236}">
-                <a16:creationId xmlns:a16="http://schemas.microsoft.com/office/drawing/2014/main" id="{E2B39EB1-75BE-4927-AC32-B3E2F5081B7D}"/>
+                <a16:creationId xmlns:a16="http://schemas.microsoft.com/office/drawing/2014/main" id="{741DE99F-95F2-4DE1-9FA7-57DD5E6182E3}"/>
               </a:ext>
             </a:extLst>
           </p:cNvPr>
@@ -15125,7 +14535,7 @@
           <p:cNvPr id="2" name="">
             <a:extLst xmlns:a="http://schemas.openxmlformats.org/drawingml/2006/main">
               <a:ext uri="{FF2B5EF4-FFF2-40B4-BE49-F238E27FC236}">
-                <a16:creationId xmlns:a16="http://schemas.microsoft.com/office/drawing/2014/main" id="{532988C5-2DF3-4245-ADB5-7E2D843B98D4}"/>
+                <a16:creationId xmlns:a16="http://schemas.microsoft.com/office/drawing/2014/main" id="{3E81E979-1AC4-4E7F-BAED-FBB246A66776}"/>
               </a:ext>
             </a:extLst>
           </p:cNvPr>
@@ -15281,7 +14691,7 @@
           <p:cNvPr id="3" name="">
             <a:extLst xmlns:a="http://schemas.openxmlformats.org/drawingml/2006/main">
               <a:ext uri="{FF2B5EF4-FFF2-40B4-BE49-F238E27FC236}">
-                <a16:creationId xmlns:a16="http://schemas.microsoft.com/office/drawing/2014/main" id="{6F88C7B8-ADD7-4A29-AF67-C39AAA61F723}"/>
+                <a16:creationId xmlns:a16="http://schemas.microsoft.com/office/drawing/2014/main" id="{5B7B969F-A3E2-4A28-AF18-AAC20E44BB16}"/>
               </a:ext>
             </a:extLst>
           </p:cNvPr>
@@ -15408,26 +14818,8 @@
             </a:lvl9pPr>
           </a:lstStyle>
           <a:p xmlns:a="http://schemas.openxmlformats.org/drawingml/2006/main">
-            <a:pPr>
-              <a:defRPr sz="750" b="0">
-                <a:solidFill>
-                  <a:srgbClr val="657491"/>
-                </a:solidFill>
-                <a:latin typeface="Noto Sans KR"/>
-                <a:ea typeface="Noto Sans KR"/>
-                <a:cs typeface="Noto Sans KR"/>
-              </a:defRPr>
-            </a:pPr>
             <a:r>
-              <a:rPr sz="750" b="0">
-                <a:solidFill>
-                  <a:srgbClr val="657491"/>
-                </a:solidFill>
-                <a:latin typeface="Noto Sans KR"/>
-                <a:ea typeface="Noto Sans KR"/>
-                <a:cs typeface="Noto Sans KR"/>
-              </a:rPr>
-              <a:t>NoteQuiz · zhaoboda 2025106293 · 18</a:t>
+              <a:t>NoteQuiz · zhaoboda 2025106293 · 20</a:t>
             </a:r>
           </a:p>
         </p:txBody>
@@ -15437,7 +14829,7 @@
           <p:cNvPr id="4" name="">
             <a:extLst xmlns:a="http://schemas.openxmlformats.org/drawingml/2006/main">
               <a:ext uri="{FF2B5EF4-FFF2-40B4-BE49-F238E27FC236}">
-                <a16:creationId xmlns:a16="http://schemas.microsoft.com/office/drawing/2014/main" id="{8BD0E6ED-4588-485A-AD21-48F7661ABE1D}"/>
+                <a16:creationId xmlns:a16="http://schemas.microsoft.com/office/drawing/2014/main" id="{EC703BCB-8E7D-499E-A70B-43F1E02F22F1}"/>
               </a:ext>
             </a:extLst>
           </p:cNvPr>
@@ -15765,7 +15157,7 @@
           <p:cNvPr id="5" name="">
             <a:extLst xmlns:a="http://schemas.openxmlformats.org/drawingml/2006/main">
               <a:ext uri="{FF2B5EF4-FFF2-40B4-BE49-F238E27FC236}">
-                <a16:creationId xmlns:a16="http://schemas.microsoft.com/office/drawing/2014/main" id="{8BBC1DF0-9149-4246-9B59-D9566F43908F}"/>
+                <a16:creationId xmlns:a16="http://schemas.microsoft.com/office/drawing/2014/main" id="{3D24325D-FF7E-4B91-B860-76D499C78614}"/>
               </a:ext>
             </a:extLst>
           </p:cNvPr>
@@ -15973,7 +15365,7 @@
           <p:cNvPr id="7" name="">
             <a:extLst xmlns:a="http://schemas.openxmlformats.org/drawingml/2006/main">
               <a:ext uri="{FF2B5EF4-FFF2-40B4-BE49-F238E27FC236}">
-                <a16:creationId xmlns:a16="http://schemas.microsoft.com/office/drawing/2014/main" id="{76989085-72DF-45C9-92BD-3F8ED18EACCA}"/>
+                <a16:creationId xmlns:a16="http://schemas.microsoft.com/office/drawing/2014/main" id="{83CD89C8-8545-4999-B528-F4591C9E7780}"/>
               </a:ext>
             </a:extLst>
           </p:cNvPr>
@@ -16129,7 +15521,7 @@
           <p:cNvPr id="2" name="">
             <a:extLst xmlns:a="http://schemas.openxmlformats.org/drawingml/2006/main">
               <a:ext uri="{FF2B5EF4-FFF2-40B4-BE49-F238E27FC236}">
-                <a16:creationId xmlns:a16="http://schemas.microsoft.com/office/drawing/2014/main" id="{AEE809E4-74A8-4145-8804-51F13348B9D1}"/>
+                <a16:creationId xmlns:a16="http://schemas.microsoft.com/office/drawing/2014/main" id="{3C02DDAF-3936-43BF-9C4E-72B0A9AD54F6}"/>
               </a:ext>
             </a:extLst>
           </p:cNvPr>
@@ -16285,7 +15677,7 @@
           <p:cNvPr id="3" name="">
             <a:extLst xmlns:a="http://schemas.openxmlformats.org/drawingml/2006/main">
               <a:ext uri="{FF2B5EF4-FFF2-40B4-BE49-F238E27FC236}">
-                <a16:creationId xmlns:a16="http://schemas.microsoft.com/office/drawing/2014/main" id="{997CB200-5231-40C6-850E-8171D753FE6E}"/>
+                <a16:creationId xmlns:a16="http://schemas.microsoft.com/office/drawing/2014/main" id="{DB622346-A170-4036-81B1-B52118199AAF}"/>
               </a:ext>
             </a:extLst>
           </p:cNvPr>
@@ -16412,26 +15804,8 @@
             </a:lvl9pPr>
           </a:lstStyle>
           <a:p xmlns:a="http://schemas.openxmlformats.org/drawingml/2006/main">
-            <a:pPr>
-              <a:defRPr sz="750" b="0">
-                <a:solidFill>
-                  <a:srgbClr val="657491"/>
-                </a:solidFill>
-                <a:latin typeface="Noto Sans KR"/>
-                <a:ea typeface="Noto Sans KR"/>
-                <a:cs typeface="Noto Sans KR"/>
-              </a:defRPr>
-            </a:pPr>
             <a:r>
-              <a:rPr sz="750" b="0">
-                <a:solidFill>
-                  <a:srgbClr val="657491"/>
-                </a:solidFill>
-                <a:latin typeface="Noto Sans KR"/>
-                <a:ea typeface="Noto Sans KR"/>
-                <a:cs typeface="Noto Sans KR"/>
-              </a:rPr>
-              <a:t>NoteQuiz · zhaoboda 2025106293 · 19</a:t>
+              <a:t>NoteQuiz · zhaoboda 2025106293 · 21</a:t>
             </a:r>
           </a:p>
         </p:txBody>
@@ -16441,7 +15815,7 @@
           <p:cNvPr id="4" name="">
             <a:extLst xmlns:a="http://schemas.openxmlformats.org/drawingml/2006/main">
               <a:ext uri="{FF2B5EF4-FFF2-40B4-BE49-F238E27FC236}">
-                <a16:creationId xmlns:a16="http://schemas.microsoft.com/office/drawing/2014/main" id="{DE393BEA-3DFC-4478-8711-CCFA4349A72D}"/>
+                <a16:creationId xmlns:a16="http://schemas.microsoft.com/office/drawing/2014/main" id="{E4E8BEE8-073D-4091-B076-D8E3948FF428}"/>
               </a:ext>
             </a:extLst>
           </p:cNvPr>
@@ -16451,7 +15825,7 @@
           <p:nvPr/>
         </p:nvPicPr>
         <p:blipFill>
-          <a:blip xmlns:r="http://schemas.openxmlformats.org/officeDocument/2006/relationships" xmlns:a="http://schemas.openxmlformats.org/drawingml/2006/main" r:embed="Rf21cb96ef92949a6"/>
+          <a:blip xmlns:r="http://schemas.openxmlformats.org/officeDocument/2006/relationships" xmlns:a="http://schemas.openxmlformats.org/drawingml/2006/main" r:embed="R06ff74da15ce47f1"/>
           <a:stretch xmlns:a="http://schemas.openxmlformats.org/drawingml/2006/main"/>
         </p:blipFill>
         <p:spPr>
@@ -16469,7 +15843,7 @@
           <p:cNvPr id="5" name="">
             <a:extLst xmlns:a="http://schemas.openxmlformats.org/drawingml/2006/main">
               <a:ext uri="{FF2B5EF4-FFF2-40B4-BE49-F238E27FC236}">
-                <a16:creationId xmlns:a16="http://schemas.microsoft.com/office/drawing/2014/main" id="{B936A2BF-AE35-48F2-9E99-DBDDB538CFFF}"/>
+                <a16:creationId xmlns:a16="http://schemas.microsoft.com/office/drawing/2014/main" id="{7564B8DF-B9CE-4DE6-98F9-C5FE4C6789E4}"/>
               </a:ext>
             </a:extLst>
           </p:cNvPr>
@@ -16891,7 +16265,7 @@
           <p:cNvPr id="6" name="">
             <a:extLst xmlns:a="http://schemas.openxmlformats.org/drawingml/2006/main">
               <a:ext uri="{FF2B5EF4-FFF2-40B4-BE49-F238E27FC236}">
-                <a16:creationId xmlns:a16="http://schemas.microsoft.com/office/drawing/2014/main" id="{6C42C28E-CCD7-44DB-BD52-507B9D66D1CA}"/>
+                <a16:creationId xmlns:a16="http://schemas.microsoft.com/office/drawing/2014/main" id="{7C4FFB55-8C4C-4A76-BF82-5BBF69E84548}"/>
               </a:ext>
             </a:extLst>
           </p:cNvPr>
@@ -17076,7 +16450,7 @@
           <p:cNvPr id="7" name="">
             <a:extLst xmlns:a="http://schemas.openxmlformats.org/drawingml/2006/main">
               <a:ext uri="{FF2B5EF4-FFF2-40B4-BE49-F238E27FC236}">
-                <a16:creationId xmlns:a16="http://schemas.microsoft.com/office/drawing/2014/main" id="{3B8F84FA-FE5B-476B-A7FF-300246ACBABE}"/>
+                <a16:creationId xmlns:a16="http://schemas.microsoft.com/office/drawing/2014/main" id="{05DE214C-24F2-4C2D-84AD-59B84B27DEA1}"/>
               </a:ext>
             </a:extLst>
           </p:cNvPr>
@@ -17232,7 +16606,7 @@
           <p:cNvPr id="2" name="">
             <a:extLst xmlns:a="http://schemas.openxmlformats.org/drawingml/2006/main">
               <a:ext uri="{FF2B5EF4-FFF2-40B4-BE49-F238E27FC236}">
-                <a16:creationId xmlns:a16="http://schemas.microsoft.com/office/drawing/2014/main" id="{B7FF42F4-3A90-45EB-93F6-5B744A5E4E2A}"/>
+                <a16:creationId xmlns:a16="http://schemas.microsoft.com/office/drawing/2014/main" id="{A08C2FE3-4234-4736-980E-BD5869534CE8}"/>
               </a:ext>
             </a:extLst>
           </p:cNvPr>
@@ -17388,7 +16762,7 @@
           <p:cNvPr id="3" name="">
             <a:extLst xmlns:a="http://schemas.openxmlformats.org/drawingml/2006/main">
               <a:ext uri="{FF2B5EF4-FFF2-40B4-BE49-F238E27FC236}">
-                <a16:creationId xmlns:a16="http://schemas.microsoft.com/office/drawing/2014/main" id="{B5F26F18-29C5-4888-B2EF-783150B4213E}"/>
+                <a16:creationId xmlns:a16="http://schemas.microsoft.com/office/drawing/2014/main" id="{2EFFDD01-7C50-4676-A974-7D82DA40351B}"/>
               </a:ext>
             </a:extLst>
           </p:cNvPr>
@@ -17515,25 +16889,7 @@
             </a:lvl9pPr>
           </a:lstStyle>
           <a:p xmlns:a="http://schemas.openxmlformats.org/drawingml/2006/main">
-            <a:pPr>
-              <a:defRPr sz="750" b="0">
-                <a:solidFill>
-                  <a:srgbClr val="657491"/>
-                </a:solidFill>
-                <a:latin typeface="Noto Sans KR"/>
-                <a:ea typeface="Noto Sans KR"/>
-                <a:cs typeface="Noto Sans KR"/>
-              </a:defRPr>
-            </a:pPr>
             <a:r>
-              <a:rPr sz="750" b="0">
-                <a:solidFill>
-                  <a:srgbClr val="657491"/>
-                </a:solidFill>
-                <a:latin typeface="Noto Sans KR"/>
-                <a:ea typeface="Noto Sans KR"/>
-                <a:cs typeface="Noto Sans KR"/>
-              </a:rPr>
               <a:t>NoteQuiz · zhaoboda 2025106293 · 02</a:t>
             </a:r>
           </a:p>
@@ -17544,7 +16900,7 @@
           <p:cNvPr id="4" name="">
             <a:extLst xmlns:a="http://schemas.openxmlformats.org/drawingml/2006/main">
               <a:ext uri="{FF2B5EF4-FFF2-40B4-BE49-F238E27FC236}">
-                <a16:creationId xmlns:a16="http://schemas.microsoft.com/office/drawing/2014/main" id="{2CC767CB-54EA-4686-89FF-214213DF5039}"/>
+                <a16:creationId xmlns:a16="http://schemas.microsoft.com/office/drawing/2014/main" id="{8EBCF34D-4F63-4589-A03B-C1DA9409D61E}"/>
               </a:ext>
             </a:extLst>
           </p:cNvPr>
@@ -17700,7 +17056,7 @@
           <p:cNvPr id="5" name="">
             <a:extLst xmlns:a="http://schemas.openxmlformats.org/drawingml/2006/main">
               <a:ext uri="{FF2B5EF4-FFF2-40B4-BE49-F238E27FC236}">
-                <a16:creationId xmlns:a16="http://schemas.microsoft.com/office/drawing/2014/main" id="{21FDC6C7-1B0B-4CCA-B38D-F5F8CCFCF513}"/>
+                <a16:creationId xmlns:a16="http://schemas.microsoft.com/office/drawing/2014/main" id="{53471BCB-91A0-4D2A-99FE-984FE2F69BD5}"/>
               </a:ext>
             </a:extLst>
           </p:cNvPr>
@@ -18028,7 +17384,7 @@
           <p:cNvPr id="6" name="">
             <a:extLst xmlns:a="http://schemas.openxmlformats.org/drawingml/2006/main">
               <a:ext uri="{FF2B5EF4-FFF2-40B4-BE49-F238E27FC236}">
-                <a16:creationId xmlns:a16="http://schemas.microsoft.com/office/drawing/2014/main" id="{C6743350-F8DC-4B32-8A97-3AEFEEEAB099}"/>
+                <a16:creationId xmlns:a16="http://schemas.microsoft.com/office/drawing/2014/main" id="{70F737DA-E3C3-4CE4-AB5A-CBEC3813EDDE}"/>
               </a:ext>
             </a:extLst>
           </p:cNvPr>
@@ -18213,7 +17569,7 @@
           <p:cNvPr id="7" name="">
             <a:extLst xmlns:a="http://schemas.openxmlformats.org/drawingml/2006/main">
               <a:ext uri="{FF2B5EF4-FFF2-40B4-BE49-F238E27FC236}">
-                <a16:creationId xmlns:a16="http://schemas.microsoft.com/office/drawing/2014/main" id="{841470F5-A4F2-4574-8043-90641F809E49}"/>
+                <a16:creationId xmlns:a16="http://schemas.microsoft.com/office/drawing/2014/main" id="{BC5A43F3-7D53-43E6-A529-318A4AA54E60}"/>
               </a:ext>
             </a:extLst>
           </p:cNvPr>
@@ -18369,7 +17725,7 @@
           <p:cNvPr id="2" name="">
             <a:extLst xmlns:a="http://schemas.openxmlformats.org/drawingml/2006/main">
               <a:ext uri="{FF2B5EF4-FFF2-40B4-BE49-F238E27FC236}">
-                <a16:creationId xmlns:a16="http://schemas.microsoft.com/office/drawing/2014/main" id="{45F73A48-B4C9-4A4B-AB15-D0AADC826155}"/>
+                <a16:creationId xmlns:a16="http://schemas.microsoft.com/office/drawing/2014/main" id="{50B8B4E1-B852-41A1-A731-91E0E318A8D7}"/>
               </a:ext>
             </a:extLst>
           </p:cNvPr>
@@ -18525,7 +17881,7 @@
           <p:cNvPr id="3" name="">
             <a:extLst xmlns:a="http://schemas.openxmlformats.org/drawingml/2006/main">
               <a:ext uri="{FF2B5EF4-FFF2-40B4-BE49-F238E27FC236}">
-                <a16:creationId xmlns:a16="http://schemas.microsoft.com/office/drawing/2014/main" id="{6556C797-E53E-4031-B7B6-9B75781FEFCE}"/>
+                <a16:creationId xmlns:a16="http://schemas.microsoft.com/office/drawing/2014/main" id="{4F40425B-4468-47C9-9555-BC858241E11A}"/>
               </a:ext>
             </a:extLst>
           </p:cNvPr>
@@ -18652,26 +18008,8 @@
             </a:lvl9pPr>
           </a:lstStyle>
           <a:p xmlns:a="http://schemas.openxmlformats.org/drawingml/2006/main">
-            <a:pPr>
-              <a:defRPr sz="750" b="0">
-                <a:solidFill>
-                  <a:srgbClr val="657491"/>
-                </a:solidFill>
-                <a:latin typeface="Noto Sans KR"/>
-                <a:ea typeface="Noto Sans KR"/>
-                <a:cs typeface="Noto Sans KR"/>
-              </a:defRPr>
-            </a:pPr>
             <a:r>
-              <a:rPr sz="750" b="0">
-                <a:solidFill>
-                  <a:srgbClr val="657491"/>
-                </a:solidFill>
-                <a:latin typeface="Noto Sans KR"/>
-                <a:ea typeface="Noto Sans KR"/>
-                <a:cs typeface="Noto Sans KR"/>
-              </a:rPr>
-              <a:t>NoteQuiz · zhaoboda 2025106293 · 20</a:t>
+              <a:t>NoteQuiz · zhaoboda 2025106293 · 22</a:t>
             </a:r>
           </a:p>
         </p:txBody>
@@ -18681,7 +18019,7 @@
           <p:cNvPr id="4" name="">
             <a:extLst xmlns:a="http://schemas.openxmlformats.org/drawingml/2006/main">
               <a:ext uri="{FF2B5EF4-FFF2-40B4-BE49-F238E27FC236}">
-                <a16:creationId xmlns:a16="http://schemas.microsoft.com/office/drawing/2014/main" id="{9A6A2EE7-0BF7-4A39-90F6-91260BEA6A5A}"/>
+                <a16:creationId xmlns:a16="http://schemas.microsoft.com/office/drawing/2014/main" id="{C0256D6C-7C52-4EE2-BCBD-25340FBAE6F2}"/>
               </a:ext>
             </a:extLst>
           </p:cNvPr>
@@ -18691,7 +18029,7 @@
           <p:nvPr/>
         </p:nvPicPr>
         <p:blipFill>
-          <a:blip xmlns:r="http://schemas.openxmlformats.org/officeDocument/2006/relationships" xmlns:a="http://schemas.openxmlformats.org/drawingml/2006/main" r:embed="Rd806d18c36a44f9f"/>
+          <a:blip xmlns:r="http://schemas.openxmlformats.org/officeDocument/2006/relationships" xmlns:a="http://schemas.openxmlformats.org/drawingml/2006/main" r:embed="R00e440790bd5427b"/>
           <a:stretch xmlns:a="http://schemas.openxmlformats.org/drawingml/2006/main"/>
         </p:blipFill>
         <p:spPr>
@@ -18709,7 +18047,7 @@
           <p:cNvPr id="5" name="">
             <a:extLst xmlns:a="http://schemas.openxmlformats.org/drawingml/2006/main">
               <a:ext uri="{FF2B5EF4-FFF2-40B4-BE49-F238E27FC236}">
-                <a16:creationId xmlns:a16="http://schemas.microsoft.com/office/drawing/2014/main" id="{B885C183-D946-446B-9E0E-01D252FBEFD4}"/>
+                <a16:creationId xmlns:a16="http://schemas.microsoft.com/office/drawing/2014/main" id="{0311D85B-BDFD-4C38-B407-1AC61005687E}"/>
               </a:ext>
             </a:extLst>
           </p:cNvPr>
@@ -19229,7 +18567,7 @@
           <p:cNvPr id="6" name="">
             <a:extLst xmlns:a="http://schemas.openxmlformats.org/drawingml/2006/main">
               <a:ext uri="{FF2B5EF4-FFF2-40B4-BE49-F238E27FC236}">
-                <a16:creationId xmlns:a16="http://schemas.microsoft.com/office/drawing/2014/main" id="{F70940F4-6AC6-4BBB-A52F-C7AA34E17F8D}"/>
+                <a16:creationId xmlns:a16="http://schemas.microsoft.com/office/drawing/2014/main" id="{95AAAB40-2DD0-47B0-9241-90E3E2F772C5}"/>
               </a:ext>
             </a:extLst>
           </p:cNvPr>
@@ -19414,7 +18752,7 @@
           <p:cNvPr id="7" name="">
             <a:extLst xmlns:a="http://schemas.openxmlformats.org/drawingml/2006/main">
               <a:ext uri="{FF2B5EF4-FFF2-40B4-BE49-F238E27FC236}">
-                <a16:creationId xmlns:a16="http://schemas.microsoft.com/office/drawing/2014/main" id="{707CB210-D043-403E-A7AD-A858DBAE3613}"/>
+                <a16:creationId xmlns:a16="http://schemas.microsoft.com/office/drawing/2014/main" id="{D4D69475-5C27-436D-8579-BFC5720BAA2C}"/>
               </a:ext>
             </a:extLst>
           </p:cNvPr>
@@ -19570,7 +18908,7 @@
           <p:cNvPr id="2" name="">
             <a:extLst xmlns:a="http://schemas.openxmlformats.org/drawingml/2006/main">
               <a:ext uri="{FF2B5EF4-FFF2-40B4-BE49-F238E27FC236}">
-                <a16:creationId xmlns:a16="http://schemas.microsoft.com/office/drawing/2014/main" id="{483631F0-393A-4908-9F93-31BC42DF73C1}"/>
+                <a16:creationId xmlns:a16="http://schemas.microsoft.com/office/drawing/2014/main" id="{6D26006D-649C-4639-8C4F-9466CACE8FBB}"/>
               </a:ext>
             </a:extLst>
           </p:cNvPr>
@@ -19726,7 +19064,7 @@
           <p:cNvPr id="3" name="">
             <a:extLst xmlns:a="http://schemas.openxmlformats.org/drawingml/2006/main">
               <a:ext uri="{FF2B5EF4-FFF2-40B4-BE49-F238E27FC236}">
-                <a16:creationId xmlns:a16="http://schemas.microsoft.com/office/drawing/2014/main" id="{DAE08F94-3C77-4D2C-8CBF-2666FE7309A7}"/>
+                <a16:creationId xmlns:a16="http://schemas.microsoft.com/office/drawing/2014/main" id="{8A3E1464-BF9D-4620-922D-91954FA01310}"/>
               </a:ext>
             </a:extLst>
           </p:cNvPr>
@@ -19853,26 +19191,8 @@
             </a:lvl9pPr>
           </a:lstStyle>
           <a:p xmlns:a="http://schemas.openxmlformats.org/drawingml/2006/main">
-            <a:pPr>
-              <a:defRPr sz="750" b="0">
-                <a:solidFill>
-                  <a:srgbClr val="657491"/>
-                </a:solidFill>
-                <a:latin typeface="Noto Sans KR"/>
-                <a:ea typeface="Noto Sans KR"/>
-                <a:cs typeface="Noto Sans KR"/>
-              </a:defRPr>
-            </a:pPr>
             <a:r>
-              <a:rPr sz="750" b="0">
-                <a:solidFill>
-                  <a:srgbClr val="657491"/>
-                </a:solidFill>
-                <a:latin typeface="Noto Sans KR"/>
-                <a:ea typeface="Noto Sans KR"/>
-                <a:cs typeface="Noto Sans KR"/>
-              </a:rPr>
-              <a:t>NoteQuiz · zhaoboda 2025106293 · 21</a:t>
+              <a:t>NoteQuiz · zhaoboda 2025106293 · 23</a:t>
             </a:r>
           </a:p>
         </p:txBody>
@@ -19882,7 +19202,7 @@
           <p:cNvPr id="4" name="">
             <a:extLst xmlns:a="http://schemas.openxmlformats.org/drawingml/2006/main">
               <a:ext uri="{FF2B5EF4-FFF2-40B4-BE49-F238E27FC236}">
-                <a16:creationId xmlns:a16="http://schemas.microsoft.com/office/drawing/2014/main" id="{7542F933-E2E9-4FD0-83FD-9E0AEC0D66BC}"/>
+                <a16:creationId xmlns:a16="http://schemas.microsoft.com/office/drawing/2014/main" id="{EB371000-497A-4911-9077-A30465C044E0}"/>
               </a:ext>
             </a:extLst>
           </p:cNvPr>
@@ -19892,7 +19212,7 @@
           <p:nvPr/>
         </p:nvPicPr>
         <p:blipFill>
-          <a:blip xmlns:r="http://schemas.openxmlformats.org/officeDocument/2006/relationships" xmlns:a="http://schemas.openxmlformats.org/drawingml/2006/main" r:embed="Rf58b9788667f4509"/>
+          <a:blip xmlns:r="http://schemas.openxmlformats.org/officeDocument/2006/relationships" xmlns:a="http://schemas.openxmlformats.org/drawingml/2006/main" r:embed="Rb900d877d0f74185"/>
           <a:stretch xmlns:a="http://schemas.openxmlformats.org/drawingml/2006/main"/>
         </p:blipFill>
         <p:spPr>
@@ -19910,7 +19230,7 @@
           <p:cNvPr id="5" name="">
             <a:extLst xmlns:a="http://schemas.openxmlformats.org/drawingml/2006/main">
               <a:ext uri="{FF2B5EF4-FFF2-40B4-BE49-F238E27FC236}">
-                <a16:creationId xmlns:a16="http://schemas.microsoft.com/office/drawing/2014/main" id="{86059D17-4F7E-4FFD-8A7B-A97E711C9D85}"/>
+                <a16:creationId xmlns:a16="http://schemas.microsoft.com/office/drawing/2014/main" id="{9C66125A-8527-424A-AC1C-E2E2838D891C}"/>
               </a:ext>
             </a:extLst>
           </p:cNvPr>
@@ -20332,7 +19652,7 @@
           <p:cNvPr id="6" name="">
             <a:extLst xmlns:a="http://schemas.openxmlformats.org/drawingml/2006/main">
               <a:ext uri="{FF2B5EF4-FFF2-40B4-BE49-F238E27FC236}">
-                <a16:creationId xmlns:a16="http://schemas.microsoft.com/office/drawing/2014/main" id="{70B46A89-5621-4286-B6FB-3D2E8B84CBE7}"/>
+                <a16:creationId xmlns:a16="http://schemas.microsoft.com/office/drawing/2014/main" id="{343E057C-1015-4E53-A216-AEC9E3225297}"/>
               </a:ext>
             </a:extLst>
           </p:cNvPr>
@@ -20517,7 +19837,7 @@
           <p:cNvPr id="7" name="">
             <a:extLst xmlns:a="http://schemas.openxmlformats.org/drawingml/2006/main">
               <a:ext uri="{FF2B5EF4-FFF2-40B4-BE49-F238E27FC236}">
-                <a16:creationId xmlns:a16="http://schemas.microsoft.com/office/drawing/2014/main" id="{714A3AD7-49C6-4829-A81B-BBB3B364DF83}"/>
+                <a16:creationId xmlns:a16="http://schemas.microsoft.com/office/drawing/2014/main" id="{F777DD15-5BAF-4C47-9C6E-90C7269F8767}"/>
               </a:ext>
             </a:extLst>
           </p:cNvPr>
@@ -20673,7 +19993,7 @@
           <p:cNvPr id="2" name="">
             <a:extLst xmlns:a="http://schemas.openxmlformats.org/drawingml/2006/main">
               <a:ext uri="{FF2B5EF4-FFF2-40B4-BE49-F238E27FC236}">
-                <a16:creationId xmlns:a16="http://schemas.microsoft.com/office/drawing/2014/main" id="{518030C0-7569-4E8F-8E68-E882FF081424}"/>
+                <a16:creationId xmlns:a16="http://schemas.microsoft.com/office/drawing/2014/main" id="{2482E105-1B1C-4375-B1F9-8341365C420C}"/>
               </a:ext>
             </a:extLst>
           </p:cNvPr>
@@ -20829,7 +20149,7 @@
           <p:cNvPr id="3" name="">
             <a:extLst xmlns:a="http://schemas.openxmlformats.org/drawingml/2006/main">
               <a:ext uri="{FF2B5EF4-FFF2-40B4-BE49-F238E27FC236}">
-                <a16:creationId xmlns:a16="http://schemas.microsoft.com/office/drawing/2014/main" id="{4B99AEB5-56DE-4FBC-A63C-8EDFEAA21578}"/>
+                <a16:creationId xmlns:a16="http://schemas.microsoft.com/office/drawing/2014/main" id="{68992B62-A48E-4F09-91BD-447D3F3EECFD}"/>
               </a:ext>
             </a:extLst>
           </p:cNvPr>
@@ -20956,26 +20276,8 @@
             </a:lvl9pPr>
           </a:lstStyle>
           <a:p xmlns:a="http://schemas.openxmlformats.org/drawingml/2006/main">
-            <a:pPr>
-              <a:defRPr sz="750" b="0">
-                <a:solidFill>
-                  <a:srgbClr val="657491"/>
-                </a:solidFill>
-                <a:latin typeface="Noto Sans KR"/>
-                <a:ea typeface="Noto Sans KR"/>
-                <a:cs typeface="Noto Sans KR"/>
-              </a:defRPr>
-            </a:pPr>
             <a:r>
-              <a:rPr sz="750" b="0">
-                <a:solidFill>
-                  <a:srgbClr val="657491"/>
-                </a:solidFill>
-                <a:latin typeface="Noto Sans KR"/>
-                <a:ea typeface="Noto Sans KR"/>
-                <a:cs typeface="Noto Sans KR"/>
-              </a:rPr>
-              <a:t>NoteQuiz · zhaoboda 2025106293 · 22</a:t>
+              <a:t>NoteQuiz · zhaoboda 2025106293 · 24</a:t>
             </a:r>
           </a:p>
         </p:txBody>
@@ -20985,7 +20287,7 @@
           <p:cNvPr id="4" name="">
             <a:extLst xmlns:a="http://schemas.openxmlformats.org/drawingml/2006/main">
               <a:ext uri="{FF2B5EF4-FFF2-40B4-BE49-F238E27FC236}">
-                <a16:creationId xmlns:a16="http://schemas.microsoft.com/office/drawing/2014/main" id="{295B7476-979B-4341-BD9B-E5901665E98E}"/>
+                <a16:creationId xmlns:a16="http://schemas.microsoft.com/office/drawing/2014/main" id="{87B02870-E2E5-41D9-BEC7-9772E1C26765}"/>
               </a:ext>
             </a:extLst>
           </p:cNvPr>
@@ -20995,7 +20297,7 @@
           <p:nvPr/>
         </p:nvPicPr>
         <p:blipFill>
-          <a:blip xmlns:r="http://schemas.openxmlformats.org/officeDocument/2006/relationships" xmlns:a="http://schemas.openxmlformats.org/drawingml/2006/main" r:embed="R3fd887e107ce42f1"/>
+          <a:blip xmlns:r="http://schemas.openxmlformats.org/officeDocument/2006/relationships" xmlns:a="http://schemas.openxmlformats.org/drawingml/2006/main" r:embed="R8e1850efde0d4705"/>
           <a:stretch xmlns:a="http://schemas.openxmlformats.org/drawingml/2006/main"/>
         </p:blipFill>
         <p:spPr>
@@ -21013,7 +20315,7 @@
           <p:cNvPr id="5" name="">
             <a:extLst xmlns:a="http://schemas.openxmlformats.org/drawingml/2006/main">
               <a:ext uri="{FF2B5EF4-FFF2-40B4-BE49-F238E27FC236}">
-                <a16:creationId xmlns:a16="http://schemas.microsoft.com/office/drawing/2014/main" id="{5A611321-F200-47B7-8E0E-C60661D438E9}"/>
+                <a16:creationId xmlns:a16="http://schemas.microsoft.com/office/drawing/2014/main" id="{2894B860-15C3-4D7E-B766-1B1D0D40AA39}"/>
               </a:ext>
             </a:extLst>
           </p:cNvPr>
@@ -21533,7 +20835,7 @@
           <p:cNvPr id="6" name="">
             <a:extLst xmlns:a="http://schemas.openxmlformats.org/drawingml/2006/main">
               <a:ext uri="{FF2B5EF4-FFF2-40B4-BE49-F238E27FC236}">
-                <a16:creationId xmlns:a16="http://schemas.microsoft.com/office/drawing/2014/main" id="{9B88F240-9850-4124-B741-37FB78AC2A3C}"/>
+                <a16:creationId xmlns:a16="http://schemas.microsoft.com/office/drawing/2014/main" id="{13F66908-4694-4F65-BDAE-4F8FC1F1C4C0}"/>
               </a:ext>
             </a:extLst>
           </p:cNvPr>
@@ -21718,7 +21020,7 @@
           <p:cNvPr id="7" name="">
             <a:extLst xmlns:a="http://schemas.openxmlformats.org/drawingml/2006/main">
               <a:ext uri="{FF2B5EF4-FFF2-40B4-BE49-F238E27FC236}">
-                <a16:creationId xmlns:a16="http://schemas.microsoft.com/office/drawing/2014/main" id="{FE9B7ADD-C0F8-4F7E-A216-536402F65E1C}"/>
+                <a16:creationId xmlns:a16="http://schemas.microsoft.com/office/drawing/2014/main" id="{D694A23B-E91A-437C-96EE-68F0F53A4D56}"/>
               </a:ext>
             </a:extLst>
           </p:cNvPr>
@@ -21874,7 +21176,7 @@
           <p:cNvPr id="2" name="">
             <a:extLst xmlns:a="http://schemas.openxmlformats.org/drawingml/2006/main">
               <a:ext uri="{FF2B5EF4-FFF2-40B4-BE49-F238E27FC236}">
-                <a16:creationId xmlns:a16="http://schemas.microsoft.com/office/drawing/2014/main" id="{38D25EC8-742F-4C61-A7B5-D46697920186}"/>
+                <a16:creationId xmlns:a16="http://schemas.microsoft.com/office/drawing/2014/main" id="{33F3937A-ED7B-4C20-B1F2-60409155E365}"/>
               </a:ext>
             </a:extLst>
           </p:cNvPr>
@@ -22030,7 +21332,7 @@
           <p:cNvPr id="3" name="">
             <a:extLst xmlns:a="http://schemas.openxmlformats.org/drawingml/2006/main">
               <a:ext uri="{FF2B5EF4-FFF2-40B4-BE49-F238E27FC236}">
-                <a16:creationId xmlns:a16="http://schemas.microsoft.com/office/drawing/2014/main" id="{411FE056-B01C-4CD8-8314-C8FB7D0926F1}"/>
+                <a16:creationId xmlns:a16="http://schemas.microsoft.com/office/drawing/2014/main" id="{1C9AA1E4-BEE5-4595-92BD-983583AAB1DB}"/>
               </a:ext>
             </a:extLst>
           </p:cNvPr>
@@ -22157,26 +21459,8 @@
             </a:lvl9pPr>
           </a:lstStyle>
           <a:p xmlns:a="http://schemas.openxmlformats.org/drawingml/2006/main">
-            <a:pPr>
-              <a:defRPr sz="750" b="0">
-                <a:solidFill>
-                  <a:srgbClr val="657491"/>
-                </a:solidFill>
-                <a:latin typeface="Noto Sans KR"/>
-                <a:ea typeface="Noto Sans KR"/>
-                <a:cs typeface="Noto Sans KR"/>
-              </a:defRPr>
-            </a:pPr>
             <a:r>
-              <a:rPr sz="750" b="0">
-                <a:solidFill>
-                  <a:srgbClr val="657491"/>
-                </a:solidFill>
-                <a:latin typeface="Noto Sans KR"/>
-                <a:ea typeface="Noto Sans KR"/>
-                <a:cs typeface="Noto Sans KR"/>
-              </a:rPr>
-              <a:t>NoteQuiz · zhaoboda 2025106293 · 23</a:t>
+              <a:t>NoteQuiz · zhaoboda 2025106293 · 25</a:t>
             </a:r>
           </a:p>
         </p:txBody>
@@ -22186,7 +21470,7 @@
           <p:cNvPr id="4" name="">
             <a:extLst xmlns:a="http://schemas.openxmlformats.org/drawingml/2006/main">
               <a:ext uri="{FF2B5EF4-FFF2-40B4-BE49-F238E27FC236}">
-                <a16:creationId xmlns:a16="http://schemas.microsoft.com/office/drawing/2014/main" id="{DDB81712-03CC-4C97-BFEB-1B6C2028B563}"/>
+                <a16:creationId xmlns:a16="http://schemas.microsoft.com/office/drawing/2014/main" id="{0AA3C7A1-1386-4DCC-A229-7FB5798510EB}"/>
               </a:ext>
             </a:extLst>
           </p:cNvPr>
@@ -22196,7 +21480,7 @@
           <p:nvPr/>
         </p:nvPicPr>
         <p:blipFill>
-          <a:blip xmlns:r="http://schemas.openxmlformats.org/officeDocument/2006/relationships" xmlns:a="http://schemas.openxmlformats.org/drawingml/2006/main" r:embed="R9c6d3c480fdb435f"/>
+          <a:blip xmlns:r="http://schemas.openxmlformats.org/officeDocument/2006/relationships" xmlns:a="http://schemas.openxmlformats.org/drawingml/2006/main" r:embed="R96a15b58a42e4dbf"/>
           <a:stretch xmlns:a="http://schemas.openxmlformats.org/drawingml/2006/main"/>
         </p:blipFill>
         <p:spPr>
@@ -22214,7 +21498,7 @@
           <p:cNvPr id="5" name="">
             <a:extLst xmlns:a="http://schemas.openxmlformats.org/drawingml/2006/main">
               <a:ext uri="{FF2B5EF4-FFF2-40B4-BE49-F238E27FC236}">
-                <a16:creationId xmlns:a16="http://schemas.microsoft.com/office/drawing/2014/main" id="{29CC91C8-2CEF-435D-B01D-C5A9B374503E}"/>
+                <a16:creationId xmlns:a16="http://schemas.microsoft.com/office/drawing/2014/main" id="{83504935-F662-4637-A58F-D9B360EF51E5}"/>
               </a:ext>
             </a:extLst>
           </p:cNvPr>
@@ -22734,7 +22018,7 @@
           <p:cNvPr id="6" name="">
             <a:extLst xmlns:a="http://schemas.openxmlformats.org/drawingml/2006/main">
               <a:ext uri="{FF2B5EF4-FFF2-40B4-BE49-F238E27FC236}">
-                <a16:creationId xmlns:a16="http://schemas.microsoft.com/office/drawing/2014/main" id="{608FC61B-C242-4E3A-8730-35B4EABC8720}"/>
+                <a16:creationId xmlns:a16="http://schemas.microsoft.com/office/drawing/2014/main" id="{17955CC2-10DB-49CC-8062-BF4043A03FF8}"/>
               </a:ext>
             </a:extLst>
           </p:cNvPr>
@@ -22919,7 +22203,7 @@
           <p:cNvPr id="5" name="">
             <a:extLst xmlns:a="http://schemas.openxmlformats.org/drawingml/2006/main">
               <a:ext uri="{FF2B5EF4-FFF2-40B4-BE49-F238E27FC236}">
-                <a16:creationId xmlns:a16="http://schemas.microsoft.com/office/drawing/2014/main" id="{F38F1B69-2C7A-4BD7-9144-40CAC853BFFF}"/>
+                <a16:creationId xmlns:a16="http://schemas.microsoft.com/office/drawing/2014/main" id="{A7001908-6F20-41B7-A834-D70BA248C3CD}"/>
               </a:ext>
             </a:extLst>
           </p:cNvPr>
@@ -23075,7 +22359,7 @@
           <p:cNvPr id="2" name="">
             <a:extLst xmlns:a="http://schemas.openxmlformats.org/drawingml/2006/main">
               <a:ext uri="{FF2B5EF4-FFF2-40B4-BE49-F238E27FC236}">
-                <a16:creationId xmlns:a16="http://schemas.microsoft.com/office/drawing/2014/main" id="{2BA13E71-F0F9-47A2-AEE9-36088887D7FB}"/>
+                <a16:creationId xmlns:a16="http://schemas.microsoft.com/office/drawing/2014/main" id="{F2D33CA6-8B86-45D6-8213-4BB3C3532B8B}"/>
               </a:ext>
             </a:extLst>
           </p:cNvPr>
@@ -23231,7 +22515,7 @@
           <p:cNvPr id="3" name="">
             <a:extLst xmlns:a="http://schemas.openxmlformats.org/drawingml/2006/main">
               <a:ext uri="{FF2B5EF4-FFF2-40B4-BE49-F238E27FC236}">
-                <a16:creationId xmlns:a16="http://schemas.microsoft.com/office/drawing/2014/main" id="{58EA35F4-EB99-476A-8479-C1105F020D51}"/>
+                <a16:creationId xmlns:a16="http://schemas.microsoft.com/office/drawing/2014/main" id="{DB7D0D9E-B38B-4FAB-96F3-31B64ADF6434}"/>
               </a:ext>
             </a:extLst>
           </p:cNvPr>
@@ -23358,26 +22642,8 @@
             </a:lvl9pPr>
           </a:lstStyle>
           <a:p xmlns:a="http://schemas.openxmlformats.org/drawingml/2006/main">
-            <a:pPr>
-              <a:defRPr sz="750" b="0">
-                <a:solidFill>
-                  <a:srgbClr val="657491"/>
-                </a:solidFill>
-                <a:latin typeface="Noto Sans KR"/>
-                <a:ea typeface="Noto Sans KR"/>
-                <a:cs typeface="Noto Sans KR"/>
-              </a:defRPr>
-            </a:pPr>
             <a:r>
-              <a:rPr sz="750" b="0">
-                <a:solidFill>
-                  <a:srgbClr val="657491"/>
-                </a:solidFill>
-                <a:latin typeface="Noto Sans KR"/>
-                <a:ea typeface="Noto Sans KR"/>
-                <a:cs typeface="Noto Sans KR"/>
-              </a:rPr>
-              <a:t>NoteQuiz · zhaoboda 2025106293 · 24</a:t>
+              <a:t>NoteQuiz · zhaoboda 2025106293 · 26</a:t>
             </a:r>
           </a:p>
         </p:txBody>
@@ -23387,7 +22653,7 @@
           <p:cNvPr id="4" name="">
             <a:extLst xmlns:a="http://schemas.openxmlformats.org/drawingml/2006/main">
               <a:ext uri="{FF2B5EF4-FFF2-40B4-BE49-F238E27FC236}">
-                <a16:creationId xmlns:a16="http://schemas.microsoft.com/office/drawing/2014/main" id="{1FBA0900-EBB5-4312-A94B-F8DBD67AF237}"/>
+                <a16:creationId xmlns:a16="http://schemas.microsoft.com/office/drawing/2014/main" id="{07EEF71C-B451-46AA-A232-7DD51A044C5F}"/>
               </a:ext>
             </a:extLst>
           </p:cNvPr>
@@ -24034,7 +23300,7 @@
           <p:cNvPr id="6" name="">
             <a:extLst xmlns:a="http://schemas.openxmlformats.org/drawingml/2006/main">
               <a:ext uri="{FF2B5EF4-FFF2-40B4-BE49-F238E27FC236}">
-                <a16:creationId xmlns:a16="http://schemas.microsoft.com/office/drawing/2014/main" id="{D536EBB9-40BD-4CCA-B3F2-6F1ABF2501DA}"/>
+                <a16:creationId xmlns:a16="http://schemas.microsoft.com/office/drawing/2014/main" id="{F86F82DA-4F01-4F19-991F-8D09762EED61}"/>
               </a:ext>
             </a:extLst>
           </p:cNvPr>
@@ -24190,7 +23456,7 @@
           <p:cNvPr id="2" name="">
             <a:extLst xmlns:a="http://schemas.openxmlformats.org/drawingml/2006/main">
               <a:ext uri="{FF2B5EF4-FFF2-40B4-BE49-F238E27FC236}">
-                <a16:creationId xmlns:a16="http://schemas.microsoft.com/office/drawing/2014/main" id="{2DC9F406-A340-4856-A197-71B7889EC1C2}"/>
+                <a16:creationId xmlns:a16="http://schemas.microsoft.com/office/drawing/2014/main" id="{D688C9B6-D3D4-40CF-9444-B78131B73B01}"/>
               </a:ext>
             </a:extLst>
           </p:cNvPr>
@@ -24346,7 +23612,7 @@
           <p:cNvPr id="3" name="">
             <a:extLst xmlns:a="http://schemas.openxmlformats.org/drawingml/2006/main">
               <a:ext uri="{FF2B5EF4-FFF2-40B4-BE49-F238E27FC236}">
-                <a16:creationId xmlns:a16="http://schemas.microsoft.com/office/drawing/2014/main" id="{62F46CA3-5AA0-48D1-9899-603C94E71FB3}"/>
+                <a16:creationId xmlns:a16="http://schemas.microsoft.com/office/drawing/2014/main" id="{D6F06B0D-46C3-48EF-8BBF-405B4AC16630}"/>
               </a:ext>
             </a:extLst>
           </p:cNvPr>
@@ -24473,26 +23739,8 @@
             </a:lvl9pPr>
           </a:lstStyle>
           <a:p xmlns:a="http://schemas.openxmlformats.org/drawingml/2006/main">
-            <a:pPr>
-              <a:defRPr sz="750" b="0">
-                <a:solidFill>
-                  <a:srgbClr val="657491"/>
-                </a:solidFill>
-                <a:latin typeface="Noto Sans KR"/>
-                <a:ea typeface="Noto Sans KR"/>
-                <a:cs typeface="Noto Sans KR"/>
-              </a:defRPr>
-            </a:pPr>
             <a:r>
-              <a:rPr sz="750" b="0">
-                <a:solidFill>
-                  <a:srgbClr val="657491"/>
-                </a:solidFill>
-                <a:latin typeface="Noto Sans KR"/>
-                <a:ea typeface="Noto Sans KR"/>
-                <a:cs typeface="Noto Sans KR"/>
-              </a:rPr>
-              <a:t>NoteQuiz · zhaoboda 2025106293 · 25</a:t>
+              <a:t>NoteQuiz · zhaoboda 2025106293 · 16</a:t>
             </a:r>
           </a:p>
         </p:txBody>
@@ -24502,7 +23750,7 @@
           <p:cNvPr id="4" name="">
             <a:extLst xmlns:a="http://schemas.openxmlformats.org/drawingml/2006/main">
               <a:ext uri="{FF2B5EF4-FFF2-40B4-BE49-F238E27FC236}">
-                <a16:creationId xmlns:a16="http://schemas.microsoft.com/office/drawing/2014/main" id="{5D547754-F17A-4D80-A696-0DBE833FBB25}"/>
+                <a16:creationId xmlns:a16="http://schemas.microsoft.com/office/drawing/2014/main" id="{520AFA75-1F56-45A4-93E2-0480AB51C66D}"/>
               </a:ext>
             </a:extLst>
           </p:cNvPr>
@@ -24659,7 +23907,7 @@
                           <a:ea typeface="Noto Sans KR"/>
                           <a:cs typeface="Noto Sans KR"/>
                         </a:rPr>
-                        <a:t>R06 문항 대응, R01 입력, R23 읽기 실패</a:t>
+                        <a:t>R06 문항 대응, R12 입력, R23 읽기 실패</a:t>
                       </a:r>
                     </a:p>
                   </a:txBody>
@@ -24901,7 +24149,7 @@
           <p:cNvPr id="5" name="">
             <a:extLst xmlns:a="http://schemas.openxmlformats.org/drawingml/2006/main">
               <a:ext uri="{FF2B5EF4-FFF2-40B4-BE49-F238E27FC236}">
-                <a16:creationId xmlns:a16="http://schemas.microsoft.com/office/drawing/2014/main" id="{0B9F5E3A-6881-401F-98EA-555FA89BAF71}"/>
+                <a16:creationId xmlns:a16="http://schemas.microsoft.com/office/drawing/2014/main" id="{0FA2ECD0-D302-4E9D-A65D-6D5D34759EE5}"/>
               </a:ext>
             </a:extLst>
           </p:cNvPr>
@@ -25132,7 +24380,7 @@
           <p:cNvPr id="5" name="">
             <a:extLst xmlns:a="http://schemas.openxmlformats.org/drawingml/2006/main">
               <a:ext uri="{FF2B5EF4-FFF2-40B4-BE49-F238E27FC236}">
-                <a16:creationId xmlns:a16="http://schemas.microsoft.com/office/drawing/2014/main" id="{20C8C9ED-B7D6-48B6-B114-B5D278AC5A6B}"/>
+                <a16:creationId xmlns:a16="http://schemas.microsoft.com/office/drawing/2014/main" id="{04D00483-2C31-4EB0-9DF6-2C4F646E3887}"/>
               </a:ext>
             </a:extLst>
           </p:cNvPr>
@@ -25288,7 +24536,7 @@
           <p:cNvPr id="2" name="">
             <a:extLst xmlns:a="http://schemas.openxmlformats.org/drawingml/2006/main">
               <a:ext uri="{FF2B5EF4-FFF2-40B4-BE49-F238E27FC236}">
-                <a16:creationId xmlns:a16="http://schemas.microsoft.com/office/drawing/2014/main" id="{700164E2-BCCA-4FFE-8ACC-862D6DDB9836}"/>
+                <a16:creationId xmlns:a16="http://schemas.microsoft.com/office/drawing/2014/main" id="{45A26971-0990-4DA0-8664-EE84F64C39E2}"/>
               </a:ext>
             </a:extLst>
           </p:cNvPr>
@@ -25444,7 +24692,7 @@
           <p:cNvPr id="3" name="">
             <a:extLst xmlns:a="http://schemas.openxmlformats.org/drawingml/2006/main">
               <a:ext uri="{FF2B5EF4-FFF2-40B4-BE49-F238E27FC236}">
-                <a16:creationId xmlns:a16="http://schemas.microsoft.com/office/drawing/2014/main" id="{F3DE65D9-90E7-4561-890E-DC6C237DA762}"/>
+                <a16:creationId xmlns:a16="http://schemas.microsoft.com/office/drawing/2014/main" id="{25180FD6-05CA-4FD0-84F7-A66DB5DE2821}"/>
               </a:ext>
             </a:extLst>
           </p:cNvPr>
@@ -25571,26 +24819,8 @@
             </a:lvl9pPr>
           </a:lstStyle>
           <a:p xmlns:a="http://schemas.openxmlformats.org/drawingml/2006/main">
-            <a:pPr>
-              <a:defRPr sz="750" b="0">
-                <a:solidFill>
-                  <a:srgbClr val="657491"/>
-                </a:solidFill>
-                <a:latin typeface="Noto Sans KR"/>
-                <a:ea typeface="Noto Sans KR"/>
-                <a:cs typeface="Noto Sans KR"/>
-              </a:defRPr>
-            </a:pPr>
             <a:r>
-              <a:rPr sz="750" b="0">
-                <a:solidFill>
-                  <a:srgbClr val="657491"/>
-                </a:solidFill>
-                <a:latin typeface="Noto Sans KR"/>
-                <a:ea typeface="Noto Sans KR"/>
-                <a:cs typeface="Noto Sans KR"/>
-              </a:rPr>
-              <a:t>NoteQuiz · zhaoboda 2025106293 · 26</a:t>
+              <a:t>NoteQuiz · zhaoboda 2025106293 · 27</a:t>
             </a:r>
           </a:p>
         </p:txBody>
@@ -25600,7 +24830,7 @@
           <p:cNvPr id="4" name="">
             <a:extLst xmlns:a="http://schemas.openxmlformats.org/drawingml/2006/main">
               <a:ext uri="{FF2B5EF4-FFF2-40B4-BE49-F238E27FC236}">
-                <a16:creationId xmlns:a16="http://schemas.microsoft.com/office/drawing/2014/main" id="{1269133D-D90D-4608-BC33-A9F554A5E182}"/>
+                <a16:creationId xmlns:a16="http://schemas.microsoft.com/office/drawing/2014/main" id="{BEEFF228-B4BA-4F34-90AC-67AB4FAAF0BF}"/>
               </a:ext>
             </a:extLst>
           </p:cNvPr>
@@ -25727,220 +24957,59 @@
             </a:lvl9pPr>
           </a:lstStyle>
           <a:p xmlns:a="http://schemas.openxmlformats.org/drawingml/2006/main">
-            <a:pPr>
-              <a:defRPr sz="1425" b="0">
-                <a:solidFill>
-                  <a:srgbClr val="18243B"/>
-                </a:solidFill>
-                <a:latin typeface="Noto Sans KR"/>
-                <a:ea typeface="Noto Sans KR"/>
-                <a:cs typeface="Noto Sans KR"/>
-              </a:defRPr>
-            </a:pPr>
             <a:r>
-              <a:rPr sz="1425" b="0">
-                <a:solidFill>
-                  <a:srgbClr val="18243B"/>
-                </a:solidFill>
-                <a:latin typeface="Noto Sans KR"/>
-                <a:ea typeface="Noto Sans KR"/>
-                <a:cs typeface="Noto Sans KR"/>
-              </a:rPr>
+              <a:rPr sz="1425"/>
               <a:t>기반 템플릿</a:t>
             </a:r>
           </a:p>
           <a:p xmlns:a="http://schemas.openxmlformats.org/drawingml/2006/main">
-            <a:pPr>
-              <a:defRPr sz="1425" b="0">
-                <a:solidFill>
-                  <a:srgbClr val="18243B"/>
-                </a:solidFill>
-                <a:latin typeface="Noto Sans KR"/>
-                <a:ea typeface="Noto Sans KR"/>
-                <a:cs typeface="Noto Sans KR"/>
-              </a:defRPr>
-            </a:pPr>
             <a:r>
-              <a:rPr sz="1425" b="0">
-                <a:solidFill>
-                  <a:srgbClr val="18243B"/>
-                </a:solidFill>
-                <a:latin typeface="Noto Sans KR"/>
-                <a:ea typeface="Noto Sans KR"/>
-                <a:cs typeface="Noto Sans KR"/>
-              </a:rPr>
+              <a:rPr sz="1425"/>
               <a:t>github.com/xide-projext/mid-project-template</a:t>
             </a:r>
           </a:p>
           <a:p xmlns:a="http://schemas.openxmlformats.org/drawingml/2006/main">
-            <a:pPr>
-              <a:defRPr sz="1425" b="0">
-                <a:solidFill>
-                  <a:srgbClr val="18243B"/>
-                </a:solidFill>
-                <a:latin typeface="Noto Sans KR"/>
-                <a:ea typeface="Noto Sans KR"/>
-                <a:cs typeface="Noto Sans KR"/>
-              </a:defRPr>
-            </a:pPr>
             <a:r>
-              <a:rPr sz="1425" b="0">
-                <a:solidFill>
-                  <a:srgbClr val="18243B"/>
-                </a:solidFill>
-                <a:latin typeface="Noto Sans KR"/>
-                <a:ea typeface="Noto Sans KR"/>
-                <a:cs typeface="Noto Sans KR"/>
-              </a:rPr>
+              <a:rPr sz="1425"/>
               <a:t>커밋 3a2d643ed1ff23d378995e5902d42f9edec74fe1</a:t>
+            </a:r>
+          </a:p>
+          <a:p xmlns:a="http://schemas.openxmlformats.org/drawingml/2006/main"/>
+          <a:p xmlns:a="http://schemas.openxmlformats.org/drawingml/2006/main">
+            <a:r>
+              <a:rPr sz="1425"/>
+              <a:t>실행</a:t>
             </a:r>
           </a:p>
           <a:p xmlns:a="http://schemas.openxmlformats.org/drawingml/2006/main">
             <a:r>
-              <a:t/>
-            </a:r>
-          </a:p>
-          <a:p xmlns:a="http://schemas.openxmlformats.org/drawingml/2006/main">
-            <a:pPr>
-              <a:defRPr sz="1425" b="0">
-                <a:solidFill>
-                  <a:srgbClr val="18243B"/>
-                </a:solidFill>
-                <a:latin typeface="Noto Sans KR"/>
-                <a:ea typeface="Noto Sans KR"/>
-                <a:cs typeface="Noto Sans KR"/>
-              </a:defRPr>
-            </a:pPr>
-            <a:r>
-              <a:rPr sz="1425" b="0">
-                <a:solidFill>
-                  <a:srgbClr val="18243B"/>
-                </a:solidFill>
-                <a:latin typeface="Noto Sans KR"/>
-                <a:ea typeface="Noto Sans KR"/>
-                <a:cs typeface="Noto Sans KR"/>
-              </a:rPr>
-              <a:t>실행</a:t>
-            </a:r>
-          </a:p>
-          <a:p xmlns:a="http://schemas.openxmlformats.org/drawingml/2006/main">
-            <a:pPr>
-              <a:defRPr sz="1425" b="0">
-                <a:solidFill>
-                  <a:srgbClr val="18243B"/>
-                </a:solidFill>
-                <a:latin typeface="Noto Sans KR"/>
-                <a:ea typeface="Noto Sans KR"/>
-                <a:cs typeface="Noto Sans KR"/>
-              </a:defRPr>
-            </a:pPr>
-            <a:r>
-              <a:rPr sz="1425" b="0">
-                <a:solidFill>
-                  <a:srgbClr val="18243B"/>
-                </a:solidFill>
-                <a:latin typeface="Noto Sans KR"/>
-                <a:ea typeface="Noto Sans KR"/>
-                <a:cs typeface="Noto Sans KR"/>
-              </a:rPr>
+              <a:rPr sz="1425"/>
               <a:t>mock_server: npm ci → npm start</a:t>
             </a:r>
           </a:p>
           <a:p xmlns:a="http://schemas.openxmlformats.org/drawingml/2006/main">
-            <a:pPr>
-              <a:defRPr sz="1425" b="0">
-                <a:solidFill>
-                  <a:srgbClr val="18243B"/>
-                </a:solidFill>
-                <a:latin typeface="Noto Sans KR"/>
-                <a:ea typeface="Noto Sans KR"/>
-                <a:cs typeface="Noto Sans KR"/>
-              </a:defRPr>
-            </a:pPr>
             <a:r>
-              <a:rPr sz="1425" b="0">
-                <a:solidFill>
-                  <a:srgbClr val="18243B"/>
-                </a:solidFill>
-                <a:latin typeface="Noto Sans KR"/>
-                <a:ea typeface="Noto Sans KR"/>
-                <a:cs typeface="Noto Sans KR"/>
-              </a:rPr>
+              <a:rPr sz="1425"/>
               <a:t>프로젝트 루트: flutter pub get → flutter run -d chrome</a:t>
+            </a:r>
+          </a:p>
+          <a:p xmlns:a="http://schemas.openxmlformats.org/drawingml/2006/main"/>
+          <a:p xmlns:a="http://schemas.openxmlformats.org/drawingml/2006/main">
+            <a:r>
+              <a:rPr sz="1425"/>
+              <a:t>제출</a:t>
             </a:r>
           </a:p>
           <a:p xmlns:a="http://schemas.openxmlformats.org/drawingml/2006/main">
             <a:r>
-              <a:t/>
+              <a:rPr sz="1425"/>
+              <a:t>개인 GitHub 원격 등록 완료. README의 영상 링크까지 업로드.</a:t>
             </a:r>
           </a:p>
           <a:p xmlns:a="http://schemas.openxmlformats.org/drawingml/2006/main">
-            <a:pPr>
-              <a:defRPr sz="1425" b="0">
-                <a:solidFill>
-                  <a:srgbClr val="18243B"/>
-                </a:solidFill>
-                <a:latin typeface="Noto Sans KR"/>
-                <a:ea typeface="Noto Sans KR"/>
-                <a:cs typeface="Noto Sans KR"/>
-              </a:defRPr>
-            </a:pPr>
             <a:r>
-              <a:rPr sz="1425" b="0">
-                <a:solidFill>
-                  <a:srgbClr val="18243B"/>
-                </a:solidFill>
-                <a:latin typeface="Noto Sans KR"/>
-                <a:ea typeface="Noto Sans KR"/>
-                <a:cs typeface="Noto Sans KR"/>
-              </a:rPr>
-              <a:t>제출</a:t>
-            </a:r>
-          </a:p>
-          <a:p xmlns:a="http://schemas.openxmlformats.org/drawingml/2006/main">
-            <a:pPr>
-              <a:defRPr sz="1425" b="0">
-                <a:solidFill>
-                  <a:srgbClr val="18243B"/>
-                </a:solidFill>
-                <a:latin typeface="Noto Sans KR"/>
-                <a:ea typeface="Noto Sans KR"/>
-                <a:cs typeface="Noto Sans KR"/>
-              </a:defRPr>
-            </a:pPr>
-            <a:r>
-              <a:rPr sz="1425" b="0">
-                <a:solidFill>
-                  <a:srgbClr val="18243B"/>
-                </a:solidFill>
-                <a:latin typeface="Noto Sans KR"/>
-                <a:ea typeface="Noto Sans KR"/>
-                <a:cs typeface="Noto Sans KR"/>
-              </a:rPr>
-              <a:t>개인 GitHub URL + 이 발표자료. README의 영상 링크까지 업로드.</a:t>
-            </a:r>
-          </a:p>
-          <a:p xmlns:a="http://schemas.openxmlformats.org/drawingml/2006/main">
-            <a:pPr>
-              <a:defRPr sz="1425" b="0">
-                <a:solidFill>
-                  <a:srgbClr val="18243B"/>
-                </a:solidFill>
-                <a:latin typeface="Noto Sans KR"/>
-                <a:ea typeface="Noto Sans KR"/>
-                <a:cs typeface="Noto Sans KR"/>
-              </a:defRPr>
-            </a:pPr>
-            <a:r>
-              <a:rPr sz="1425" b="0">
-                <a:solidFill>
-                  <a:srgbClr val="18243B"/>
-                </a:solidFill>
-                <a:latin typeface="Noto Sans KR"/>
-                <a:ea typeface="Noto Sans KR"/>
-                <a:cs typeface="Noto Sans KR"/>
-              </a:rPr>
-              <a:t>원격 clone 검증·본인 6분 리허설·LMS 제출은 별도 확인.</a:t>
+              <a:rPr sz="1425"/>
+              <a:t>LMS 제출과 6분 발표 시간 측정은 제출자가 확인.</a:t>
             </a:r>
           </a:p>
         </p:txBody>
@@ -25949,6 +25018,863 @@
     <p:extLst>
       <p:ext uri="{BB962C8B-B14F-4D97-AF65-F5344CB8AC3E}">
         <p14:creationId xmlns:p14="http://schemas.microsoft.com/office/powerpoint/2010/main" val="1004649001"/>
+      </p:ext>
+    </p:extLst>
+  </p:cSld>
+</p:sld>
+</file>
+
+<file path=ppt/slides/slide27.xml><?xml version="1.0" encoding="utf-8"?>
+<p:sld xmlns:p="http://schemas.openxmlformats.org/presentationml/2006/main">
+  <p:cSld>
+    <p:bg>
+      <p:bgPr>
+        <a:solidFill xmlns:a="http://schemas.openxmlformats.org/drawingml/2006/main">
+          <a:srgbClr val="FFFFFF"/>
+        </a:solidFill>
+      </p:bgPr>
+    </p:bg>
+    <p:spTree>
+      <p:nvGrpSpPr>
+        <p:cNvPr id="1" name=""/>
+        <p:cNvGrpSpPr/>
+        <p:nvPr/>
+      </p:nvGrpSpPr>
+      <p:grpSpPr>
+        <a:xfrm xmlns:a="http://schemas.openxmlformats.org/drawingml/2006/main"/>
+      </p:grpSpPr>
+      <p:sp>
+        <p:nvSpPr>
+          <p:cNvPr id="8" name="">
+            <a:extLst xmlns:a="http://schemas.openxmlformats.org/drawingml/2006/main">
+              <a:ext uri="{FF2B5EF4-FFF2-40B4-BE49-F238E27FC236}">
+                <a16:creationId xmlns:a16="http://schemas.microsoft.com/office/drawing/2014/main" id="{257CBA7B-E552-4BE3-9CCC-084CB38B716E}"/>
+              </a:ext>
+            </a:extLst>
+          </p:cNvPr>
+          <p:cNvSpPr>
+            <a:spLocks xmlns:a="http://schemas.openxmlformats.org/drawingml/2006/main" noGrp="1"/>
+          </p:cNvSpPr>
+          <p:nvPr/>
+        </p:nvSpPr>
+        <p:spPr>
+          <a:xfrm xmlns:a="http://schemas.openxmlformats.org/drawingml/2006/main">
+            <a:off x="381000" y="190500"/>
+            <a:ext cx="7429500" cy="190500"/>
+          </a:xfrm>
+          <a:prstGeom xmlns:a="http://schemas.openxmlformats.org/drawingml/2006/main" prst="rect">
+            <a:avLst/>
+          </a:prstGeom>
+          <a:noFill xmlns:a="http://schemas.openxmlformats.org/drawingml/2006/main"/>
+          <a:ln xmlns:a="http://schemas.openxmlformats.org/drawingml/2006/main" w="0">
+            <a:noFill/>
+          </a:ln>
+        </p:spPr>
+        <p:txBody>
+          <a:bodyPr xmlns:a="http://schemas.openxmlformats.org/drawingml/2006/main"/>
+          <a:lstStyle xmlns:a="http://schemas.openxmlformats.org/drawingml/2006/main">
+            <a:defPPr>
+              <a:defRPr sz="825" b="1">
+                <a:solidFill>
+                  <a:srgbClr val="4F609B"/>
+                </a:solidFill>
+                <a:latin typeface="Noto Sans KR"/>
+                <a:ea typeface="Noto Sans KR"/>
+                <a:cs typeface="Noto Sans KR"/>
+              </a:defRPr>
+            </a:defPPr>
+            <a:lvl1pPr>
+              <a:defRPr sz="825" b="1">
+                <a:solidFill>
+                  <a:srgbClr val="4F609B"/>
+                </a:solidFill>
+                <a:latin typeface="Noto Sans KR"/>
+                <a:ea typeface="Noto Sans KR"/>
+                <a:cs typeface="Noto Sans KR"/>
+              </a:defRPr>
+            </a:lvl1pPr>
+            <a:lvl2pPr>
+              <a:defRPr sz="825" b="1">
+                <a:solidFill>
+                  <a:srgbClr val="4F609B"/>
+                </a:solidFill>
+                <a:latin typeface="Noto Sans KR"/>
+                <a:ea typeface="Noto Sans KR"/>
+                <a:cs typeface="Noto Sans KR"/>
+              </a:defRPr>
+            </a:lvl2pPr>
+            <a:lvl3pPr>
+              <a:defRPr sz="825" b="1">
+                <a:solidFill>
+                  <a:srgbClr val="4F609B"/>
+                </a:solidFill>
+                <a:latin typeface="Noto Sans KR"/>
+                <a:ea typeface="Noto Sans KR"/>
+                <a:cs typeface="Noto Sans KR"/>
+              </a:defRPr>
+            </a:lvl3pPr>
+            <a:lvl4pPr>
+              <a:defRPr sz="825" b="1">
+                <a:solidFill>
+                  <a:srgbClr val="4F609B"/>
+                </a:solidFill>
+                <a:latin typeface="Noto Sans KR"/>
+                <a:ea typeface="Noto Sans KR"/>
+                <a:cs typeface="Noto Sans KR"/>
+              </a:defRPr>
+            </a:lvl4pPr>
+            <a:lvl5pPr>
+              <a:defRPr sz="825" b="1">
+                <a:solidFill>
+                  <a:srgbClr val="4F609B"/>
+                </a:solidFill>
+                <a:latin typeface="Noto Sans KR"/>
+                <a:ea typeface="Noto Sans KR"/>
+                <a:cs typeface="Noto Sans KR"/>
+              </a:defRPr>
+            </a:lvl5pPr>
+            <a:lvl6pPr>
+              <a:defRPr sz="825" b="1">
+                <a:solidFill>
+                  <a:srgbClr val="4F609B"/>
+                </a:solidFill>
+                <a:latin typeface="Noto Sans KR"/>
+                <a:ea typeface="Noto Sans KR"/>
+                <a:cs typeface="Noto Sans KR"/>
+              </a:defRPr>
+            </a:lvl6pPr>
+            <a:lvl7pPr>
+              <a:defRPr sz="825" b="1">
+                <a:solidFill>
+                  <a:srgbClr val="4F609B"/>
+                </a:solidFill>
+                <a:latin typeface="Noto Sans KR"/>
+                <a:ea typeface="Noto Sans KR"/>
+                <a:cs typeface="Noto Sans KR"/>
+              </a:defRPr>
+            </a:lvl7pPr>
+            <a:lvl8pPr>
+              <a:defRPr sz="825" b="1">
+                <a:solidFill>
+                  <a:srgbClr val="4F609B"/>
+                </a:solidFill>
+                <a:latin typeface="Noto Sans KR"/>
+                <a:ea typeface="Noto Sans KR"/>
+                <a:cs typeface="Noto Sans KR"/>
+              </a:defRPr>
+            </a:lvl8pPr>
+            <a:lvl9pPr>
+              <a:defRPr sz="825" b="1">
+                <a:solidFill>
+                  <a:srgbClr val="4F609B"/>
+                </a:solidFill>
+                <a:latin typeface="Noto Sans KR"/>
+                <a:ea typeface="Noto Sans KR"/>
+                <a:cs typeface="Noto Sans KR"/>
+              </a:defRPr>
+            </a:lvl9pPr>
+          </a:lstStyle>
+          <a:p xmlns:a="http://schemas.openxmlformats.org/drawingml/2006/main">
+            <a:pPr>
+              <a:defRPr sz="825" b="1">
+                <a:solidFill>
+                  <a:srgbClr val="4F609B"/>
+                </a:solidFill>
+                <a:latin typeface="Noto Sans KR"/>
+                <a:ea typeface="Noto Sans KR"/>
+                <a:cs typeface="Noto Sans KR"/>
+              </a:defRPr>
+            </a:pPr>
+            <a:r>
+              <a:rPr sz="825" b="1">
+                <a:solidFill>
+                  <a:srgbClr val="4F609B"/>
+                </a:solidFill>
+                <a:latin typeface="Noto Sans KR"/>
+                <a:ea typeface="Noto Sans KR"/>
+                <a:cs typeface="Noto Sans KR"/>
+              </a:rPr>
+              <a:t>B3 · 실제 학생 판단과 실행 화면</a:t>
+            </a:r>
+          </a:p>
+        </p:txBody>
+      </p:sp>
+      <p:sp>
+        <p:nvSpPr>
+          <p:cNvPr id="2" name="">
+            <a:extLst xmlns:a="http://schemas.openxmlformats.org/drawingml/2006/main">
+              <a:ext uri="{FF2B5EF4-FFF2-40B4-BE49-F238E27FC236}">
+                <a16:creationId xmlns:a16="http://schemas.microsoft.com/office/drawing/2014/main" id="{315A1A3E-EE43-4848-9EBD-AA6A39CA544F}"/>
+              </a:ext>
+            </a:extLst>
+          </p:cNvPr>
+          <p:cNvSpPr>
+            <a:spLocks xmlns:a="http://schemas.openxmlformats.org/drawingml/2006/main" noGrp="1"/>
+          </p:cNvSpPr>
+          <p:nvPr/>
+        </p:nvSpPr>
+        <p:spPr>
+          <a:xfrm xmlns:a="http://schemas.openxmlformats.org/drawingml/2006/main">
+            <a:off x="381000" y="495300"/>
+            <a:ext cx="8382000" cy="552450"/>
+          </a:xfrm>
+          <a:prstGeom xmlns:a="http://schemas.openxmlformats.org/drawingml/2006/main" prst="rect">
+            <a:avLst/>
+          </a:prstGeom>
+          <a:noFill xmlns:a="http://schemas.openxmlformats.org/drawingml/2006/main"/>
+          <a:ln xmlns:a="http://schemas.openxmlformats.org/drawingml/2006/main" w="0">
+            <a:noFill/>
+          </a:ln>
+        </p:spPr>
+        <p:txBody>
+          <a:bodyPr xmlns:a="http://schemas.openxmlformats.org/drawingml/2006/main"/>
+          <a:lstStyle xmlns:a="http://schemas.openxmlformats.org/drawingml/2006/main">
+            <a:defPPr>
+              <a:defRPr sz="2250" b="1">
+                <a:solidFill>
+                  <a:srgbClr val="18243B"/>
+                </a:solidFill>
+                <a:latin typeface="Noto Sans KR"/>
+                <a:ea typeface="Noto Sans KR"/>
+                <a:cs typeface="Noto Sans KR"/>
+              </a:defRPr>
+            </a:defPPr>
+            <a:lvl1pPr>
+              <a:defRPr sz="2250" b="1">
+                <a:solidFill>
+                  <a:srgbClr val="18243B"/>
+                </a:solidFill>
+                <a:latin typeface="Noto Sans KR"/>
+                <a:ea typeface="Noto Sans KR"/>
+                <a:cs typeface="Noto Sans KR"/>
+              </a:defRPr>
+            </a:lvl1pPr>
+            <a:lvl2pPr>
+              <a:defRPr sz="2250" b="1">
+                <a:solidFill>
+                  <a:srgbClr val="18243B"/>
+                </a:solidFill>
+                <a:latin typeface="Noto Sans KR"/>
+                <a:ea typeface="Noto Sans KR"/>
+                <a:cs typeface="Noto Sans KR"/>
+              </a:defRPr>
+            </a:lvl2pPr>
+            <a:lvl3pPr>
+              <a:defRPr sz="2250" b="1">
+                <a:solidFill>
+                  <a:srgbClr val="18243B"/>
+                </a:solidFill>
+                <a:latin typeface="Noto Sans KR"/>
+                <a:ea typeface="Noto Sans KR"/>
+                <a:cs typeface="Noto Sans KR"/>
+              </a:defRPr>
+            </a:lvl3pPr>
+            <a:lvl4pPr>
+              <a:defRPr sz="2250" b="1">
+                <a:solidFill>
+                  <a:srgbClr val="18243B"/>
+                </a:solidFill>
+                <a:latin typeface="Noto Sans KR"/>
+                <a:ea typeface="Noto Sans KR"/>
+                <a:cs typeface="Noto Sans KR"/>
+              </a:defRPr>
+            </a:lvl4pPr>
+            <a:lvl5pPr>
+              <a:defRPr sz="2250" b="1">
+                <a:solidFill>
+                  <a:srgbClr val="18243B"/>
+                </a:solidFill>
+                <a:latin typeface="Noto Sans KR"/>
+                <a:ea typeface="Noto Sans KR"/>
+                <a:cs typeface="Noto Sans KR"/>
+              </a:defRPr>
+            </a:lvl5pPr>
+            <a:lvl6pPr>
+              <a:defRPr sz="2250" b="1">
+                <a:solidFill>
+                  <a:srgbClr val="18243B"/>
+                </a:solidFill>
+                <a:latin typeface="Noto Sans KR"/>
+                <a:ea typeface="Noto Sans KR"/>
+                <a:cs typeface="Noto Sans KR"/>
+              </a:defRPr>
+            </a:lvl6pPr>
+            <a:lvl7pPr>
+              <a:defRPr sz="2250" b="1">
+                <a:solidFill>
+                  <a:srgbClr val="18243B"/>
+                </a:solidFill>
+                <a:latin typeface="Noto Sans KR"/>
+                <a:ea typeface="Noto Sans KR"/>
+                <a:cs typeface="Noto Sans KR"/>
+              </a:defRPr>
+            </a:lvl7pPr>
+            <a:lvl8pPr>
+              <a:defRPr sz="2250" b="1">
+                <a:solidFill>
+                  <a:srgbClr val="18243B"/>
+                </a:solidFill>
+                <a:latin typeface="Noto Sans KR"/>
+                <a:ea typeface="Noto Sans KR"/>
+                <a:cs typeface="Noto Sans KR"/>
+              </a:defRPr>
+            </a:lvl8pPr>
+            <a:lvl9pPr>
+              <a:defRPr sz="2250" b="1">
+                <a:solidFill>
+                  <a:srgbClr val="18243B"/>
+                </a:solidFill>
+                <a:latin typeface="Noto Sans KR"/>
+                <a:ea typeface="Noto Sans KR"/>
+                <a:cs typeface="Noto Sans KR"/>
+              </a:defRPr>
+            </a:lvl9pPr>
+          </a:lstStyle>
+          <a:p xmlns:a="http://schemas.openxmlformats.org/drawingml/2006/main">
+            <a:pPr>
+              <a:defRPr sz="2250" b="1">
+                <a:solidFill>
+                  <a:srgbClr val="18243B"/>
+                </a:solidFill>
+                <a:latin typeface="Noto Sans KR"/>
+                <a:ea typeface="Noto Sans KR"/>
+                <a:cs typeface="Noto Sans KR"/>
+              </a:defRPr>
+            </a:pPr>
+            <a:r>
+              <a:rPr sz="2250" b="1">
+                <a:solidFill>
+                  <a:srgbClr val="18243B"/>
+                </a:solidFill>
+                <a:latin typeface="Noto Sans KR"/>
+                <a:ea typeface="Noto Sans KR"/>
+                <a:cs typeface="Noto Sans KR"/>
+              </a:rPr>
+              <a:t>상시 표시 판단의 전·후</a:t>
+            </a:r>
+          </a:p>
+        </p:txBody>
+      </p:sp>
+      <p:sp>
+        <p:nvSpPr>
+          <p:cNvPr id="3" name="">
+            <a:extLst xmlns:a="http://schemas.openxmlformats.org/drawingml/2006/main">
+              <a:ext uri="{FF2B5EF4-FFF2-40B4-BE49-F238E27FC236}">
+                <a16:creationId xmlns:a16="http://schemas.microsoft.com/office/drawing/2014/main" id="{98CDBDAD-6939-4DCD-930B-66E77FC686CC}"/>
+              </a:ext>
+            </a:extLst>
+          </p:cNvPr>
+          <p:cNvSpPr>
+            <a:spLocks xmlns:a="http://schemas.openxmlformats.org/drawingml/2006/main" noGrp="1"/>
+          </p:cNvSpPr>
+          <p:nvPr/>
+        </p:nvSpPr>
+        <p:spPr>
+          <a:xfrm xmlns:a="http://schemas.openxmlformats.org/drawingml/2006/main">
+            <a:off x="381000" y="4857750"/>
+            <a:ext cx="7620000" cy="190500"/>
+          </a:xfrm>
+          <a:prstGeom xmlns:a="http://schemas.openxmlformats.org/drawingml/2006/main" prst="rect">
+            <a:avLst/>
+          </a:prstGeom>
+          <a:noFill xmlns:a="http://schemas.openxmlformats.org/drawingml/2006/main"/>
+          <a:ln xmlns:a="http://schemas.openxmlformats.org/drawingml/2006/main" w="0">
+            <a:noFill/>
+          </a:ln>
+        </p:spPr>
+        <p:txBody>
+          <a:bodyPr xmlns:a="http://schemas.openxmlformats.org/drawingml/2006/main"/>
+          <a:lstStyle xmlns:a="http://schemas.openxmlformats.org/drawingml/2006/main">
+            <a:defPPr>
+              <a:defRPr sz="750" b="0">
+                <a:solidFill>
+                  <a:srgbClr val="657491"/>
+                </a:solidFill>
+                <a:latin typeface="Noto Sans KR"/>
+                <a:ea typeface="Noto Sans KR"/>
+                <a:cs typeface="Noto Sans KR"/>
+              </a:defRPr>
+            </a:defPPr>
+            <a:lvl1pPr>
+              <a:defRPr sz="750" b="0">
+                <a:solidFill>
+                  <a:srgbClr val="657491"/>
+                </a:solidFill>
+                <a:latin typeface="Noto Sans KR"/>
+                <a:ea typeface="Noto Sans KR"/>
+                <a:cs typeface="Noto Sans KR"/>
+              </a:defRPr>
+            </a:lvl1pPr>
+            <a:lvl2pPr>
+              <a:defRPr sz="750" b="0">
+                <a:solidFill>
+                  <a:srgbClr val="657491"/>
+                </a:solidFill>
+                <a:latin typeface="Noto Sans KR"/>
+                <a:ea typeface="Noto Sans KR"/>
+                <a:cs typeface="Noto Sans KR"/>
+              </a:defRPr>
+            </a:lvl2pPr>
+            <a:lvl3pPr>
+              <a:defRPr sz="750" b="0">
+                <a:solidFill>
+                  <a:srgbClr val="657491"/>
+                </a:solidFill>
+                <a:latin typeface="Noto Sans KR"/>
+                <a:ea typeface="Noto Sans KR"/>
+                <a:cs typeface="Noto Sans KR"/>
+              </a:defRPr>
+            </a:lvl3pPr>
+            <a:lvl4pPr>
+              <a:defRPr sz="750" b="0">
+                <a:solidFill>
+                  <a:srgbClr val="657491"/>
+                </a:solidFill>
+                <a:latin typeface="Noto Sans KR"/>
+                <a:ea typeface="Noto Sans KR"/>
+                <a:cs typeface="Noto Sans KR"/>
+              </a:defRPr>
+            </a:lvl4pPr>
+            <a:lvl5pPr>
+              <a:defRPr sz="750" b="0">
+                <a:solidFill>
+                  <a:srgbClr val="657491"/>
+                </a:solidFill>
+                <a:latin typeface="Noto Sans KR"/>
+                <a:ea typeface="Noto Sans KR"/>
+                <a:cs typeface="Noto Sans KR"/>
+              </a:defRPr>
+            </a:lvl5pPr>
+            <a:lvl6pPr>
+              <a:defRPr sz="750" b="0">
+                <a:solidFill>
+                  <a:srgbClr val="657491"/>
+                </a:solidFill>
+                <a:latin typeface="Noto Sans KR"/>
+                <a:ea typeface="Noto Sans KR"/>
+                <a:cs typeface="Noto Sans KR"/>
+              </a:defRPr>
+            </a:lvl6pPr>
+            <a:lvl7pPr>
+              <a:defRPr sz="750" b="0">
+                <a:solidFill>
+                  <a:srgbClr val="657491"/>
+                </a:solidFill>
+                <a:latin typeface="Noto Sans KR"/>
+                <a:ea typeface="Noto Sans KR"/>
+                <a:cs typeface="Noto Sans KR"/>
+              </a:defRPr>
+            </a:lvl7pPr>
+            <a:lvl8pPr>
+              <a:defRPr sz="750" b="0">
+                <a:solidFill>
+                  <a:srgbClr val="657491"/>
+                </a:solidFill>
+                <a:latin typeface="Noto Sans KR"/>
+                <a:ea typeface="Noto Sans KR"/>
+                <a:cs typeface="Noto Sans KR"/>
+              </a:defRPr>
+            </a:lvl8pPr>
+            <a:lvl9pPr>
+              <a:defRPr sz="750" b="0">
+                <a:solidFill>
+                  <a:srgbClr val="657491"/>
+                </a:solidFill>
+                <a:latin typeface="Noto Sans KR"/>
+                <a:ea typeface="Noto Sans KR"/>
+                <a:cs typeface="Noto Sans KR"/>
+              </a:defRPr>
+            </a:lvl9pPr>
+          </a:lstStyle>
+          <a:p xmlns:a="http://schemas.openxmlformats.org/drawingml/2006/main">
+            <a:r>
+              <a:t>NoteQuiz · zhaoboda 2025106293 · 14</a:t>
+            </a:r>
+          </a:p>
+        </p:txBody>
+      </p:sp>
+      <p:pic>
+        <p:nvPicPr>
+          <p:cNvPr id="4" name="">
+            <a:extLst xmlns:a="http://schemas.openxmlformats.org/drawingml/2006/main">
+              <a:ext uri="{FF2B5EF4-FFF2-40B4-BE49-F238E27FC236}">
+                <a16:creationId xmlns:a16="http://schemas.microsoft.com/office/drawing/2014/main" id="{3EC9AA06-AB17-4C19-A21B-57CB1B720DD3}"/>
+              </a:ext>
+            </a:extLst>
+          </p:cNvPr>
+          <p:cNvPicPr>
+            <a:picLocks xmlns:a="http://schemas.openxmlformats.org/drawingml/2006/main" noChangeAspect="1"/>
+          </p:cNvPicPr>
+          <p:nvPr/>
+        </p:nvPicPr>
+        <p:blipFill>
+          <a:blip xmlns:r="http://schemas.openxmlformats.org/officeDocument/2006/relationships" xmlns:a="http://schemas.openxmlformats.org/drawingml/2006/main" r:embed="Rfc227bbeac964155"/>
+          <a:stretch xmlns:a="http://schemas.openxmlformats.org/drawingml/2006/main"/>
+        </p:blipFill>
+        <p:spPr>
+          <a:xfrm xmlns:a="http://schemas.openxmlformats.org/drawingml/2006/main">
+            <a:off x="659698" y="1190625"/>
+            <a:ext cx="1538104" cy="3333750"/>
+          </a:xfrm>
+          <a:prstGeom xmlns:a="http://schemas.openxmlformats.org/drawingml/2006/main" prst="rect">
+            <a:avLst/>
+          </a:prstGeom>
+        </p:spPr>
+      </p:pic>
+      <p:sp>
+        <p:nvSpPr>
+          <p:cNvPr id="6" name="">
+            <a:extLst xmlns:a="http://schemas.openxmlformats.org/drawingml/2006/main">
+              <a:ext uri="{FF2B5EF4-FFF2-40B4-BE49-F238E27FC236}">
+                <a16:creationId xmlns:a16="http://schemas.microsoft.com/office/drawing/2014/main" id="{9CADBB68-CADC-4CA3-AC30-FF9174E0F5B1}"/>
+              </a:ext>
+            </a:extLst>
+          </p:cNvPr>
+          <p:cNvSpPr>
+            <a:spLocks xmlns:a="http://schemas.openxmlformats.org/drawingml/2006/main" noGrp="1"/>
+          </p:cNvSpPr>
+          <p:nvPr/>
+        </p:nvSpPr>
+        <p:spPr>
+          <a:xfrm xmlns:a="http://schemas.openxmlformats.org/drawingml/2006/main">
+            <a:off x="5286375" y="1381125"/>
+            <a:ext cx="3429000" cy="2714625"/>
+          </a:xfrm>
+          <a:prstGeom xmlns:a="http://schemas.openxmlformats.org/drawingml/2006/main" prst="rect">
+            <a:avLst/>
+          </a:prstGeom>
+          <a:noFill xmlns:a="http://schemas.openxmlformats.org/drawingml/2006/main"/>
+          <a:ln xmlns:a="http://schemas.openxmlformats.org/drawingml/2006/main" w="0">
+            <a:noFill/>
+          </a:ln>
+        </p:spPr>
+        <p:txBody>
+          <a:bodyPr xmlns:a="http://schemas.openxmlformats.org/drawingml/2006/main"/>
+          <a:lstStyle xmlns:a="http://schemas.openxmlformats.org/drawingml/2006/main">
+            <a:defPPr>
+              <a:defRPr sz="1350" b="0">
+                <a:solidFill>
+                  <a:srgbClr val="18243B"/>
+                </a:solidFill>
+                <a:latin typeface="Noto Sans KR"/>
+                <a:ea typeface="Noto Sans KR"/>
+                <a:cs typeface="Noto Sans KR"/>
+              </a:defRPr>
+            </a:defPPr>
+            <a:lvl1pPr>
+              <a:defRPr sz="1350" b="0">
+                <a:solidFill>
+                  <a:srgbClr val="18243B"/>
+                </a:solidFill>
+                <a:latin typeface="Noto Sans KR"/>
+                <a:ea typeface="Noto Sans KR"/>
+                <a:cs typeface="Noto Sans KR"/>
+              </a:defRPr>
+            </a:lvl1pPr>
+            <a:lvl2pPr>
+              <a:defRPr sz="1350" b="0">
+                <a:solidFill>
+                  <a:srgbClr val="18243B"/>
+                </a:solidFill>
+                <a:latin typeface="Noto Sans KR"/>
+                <a:ea typeface="Noto Sans KR"/>
+                <a:cs typeface="Noto Sans KR"/>
+              </a:defRPr>
+            </a:lvl2pPr>
+            <a:lvl3pPr>
+              <a:defRPr sz="1350" b="0">
+                <a:solidFill>
+                  <a:srgbClr val="18243B"/>
+                </a:solidFill>
+                <a:latin typeface="Noto Sans KR"/>
+                <a:ea typeface="Noto Sans KR"/>
+                <a:cs typeface="Noto Sans KR"/>
+              </a:defRPr>
+            </a:lvl3pPr>
+            <a:lvl4pPr>
+              <a:defRPr sz="1350" b="0">
+                <a:solidFill>
+                  <a:srgbClr val="18243B"/>
+                </a:solidFill>
+                <a:latin typeface="Noto Sans KR"/>
+                <a:ea typeface="Noto Sans KR"/>
+                <a:cs typeface="Noto Sans KR"/>
+              </a:defRPr>
+            </a:lvl4pPr>
+            <a:lvl5pPr>
+              <a:defRPr sz="1350" b="0">
+                <a:solidFill>
+                  <a:srgbClr val="18243B"/>
+                </a:solidFill>
+                <a:latin typeface="Noto Sans KR"/>
+                <a:ea typeface="Noto Sans KR"/>
+                <a:cs typeface="Noto Sans KR"/>
+              </a:defRPr>
+            </a:lvl5pPr>
+            <a:lvl6pPr>
+              <a:defRPr sz="1350" b="0">
+                <a:solidFill>
+                  <a:srgbClr val="18243B"/>
+                </a:solidFill>
+                <a:latin typeface="Noto Sans KR"/>
+                <a:ea typeface="Noto Sans KR"/>
+                <a:cs typeface="Noto Sans KR"/>
+              </a:defRPr>
+            </a:lvl6pPr>
+            <a:lvl7pPr>
+              <a:defRPr sz="1350" b="0">
+                <a:solidFill>
+                  <a:srgbClr val="18243B"/>
+                </a:solidFill>
+                <a:latin typeface="Noto Sans KR"/>
+                <a:ea typeface="Noto Sans KR"/>
+                <a:cs typeface="Noto Sans KR"/>
+              </a:defRPr>
+            </a:lvl7pPr>
+            <a:lvl8pPr>
+              <a:defRPr sz="1350" b="0">
+                <a:solidFill>
+                  <a:srgbClr val="18243B"/>
+                </a:solidFill>
+                <a:latin typeface="Noto Sans KR"/>
+                <a:ea typeface="Noto Sans KR"/>
+                <a:cs typeface="Noto Sans KR"/>
+              </a:defRPr>
+            </a:lvl8pPr>
+            <a:lvl9pPr>
+              <a:defRPr sz="1350" b="0">
+                <a:solidFill>
+                  <a:srgbClr val="18243B"/>
+                </a:solidFill>
+                <a:latin typeface="Noto Sans KR"/>
+                <a:ea typeface="Noto Sans KR"/>
+                <a:cs typeface="Noto Sans KR"/>
+              </a:defRPr>
+            </a:lvl9pPr>
+          </a:lstStyle>
+          <a:p xmlns:a="http://schemas.openxmlformats.org/drawingml/2006/main">
+            <a:r>
+              <a:rPr sz="1320"/>
+              <a:t>전: 설계 비교안</a:t>
+            </a:r>
+          </a:p>
+          <a:p xmlns:a="http://schemas.openxmlformats.org/drawingml/2006/main">
+            <a:r>
+              <a:rPr sz="1320"/>
+              <a:t>후: 현재 UI 위젯 테스트</a:t>
+            </a:r>
+          </a:p>
+          <a:p xmlns:a="http://schemas.openxmlformats.org/drawingml/2006/main"/>
+          <a:p xmlns:a="http://schemas.openxmlformats.org/drawingml/2006/main">
+            <a:r>
+              <a:rPr sz="1320"/>
+              <a:t>학생 최종 판단(확인됨)</a:t>
+            </a:r>
+          </a:p>
+          <a:p xmlns:a="http://schemas.openxmlformats.org/drawingml/2006/main">
+            <a:r>
+              <a:rPr sz="1320"/>
+              <a:t>직접 대조하기 위해 모두 표시한다.</a:t>
+            </a:r>
+          </a:p>
+          <a:p xmlns:a="http://schemas.openxmlformats.org/drawingml/2006/main">
+            <a:r>
+              <a:rPr sz="1320"/>
+              <a:t>원래 보기와 내 선택을 함께 두고</a:t>
+            </a:r>
+          </a:p>
+          <a:p xmlns:a="http://schemas.openxmlformats.org/drawingml/2006/main">
+            <a:r>
+              <a:rPr sz="1320"/>
+              <a:t>제목·색·여백으로 구분하며 스크롤을 수용한다.</a:t>
+            </a:r>
+          </a:p>
+        </p:txBody>
+      </p:sp>
+      <p:sp>
+        <p:nvSpPr>
+          <p:cNvPr id="7" name="">
+            <a:extLst xmlns:a="http://schemas.openxmlformats.org/drawingml/2006/main">
+              <a:ext uri="{FF2B5EF4-FFF2-40B4-BE49-F238E27FC236}">
+                <a16:creationId xmlns:a16="http://schemas.microsoft.com/office/drawing/2014/main" id="{8EE40572-BC5B-48E7-B797-9C6DAB3BE2E9}"/>
+              </a:ext>
+            </a:extLst>
+          </p:cNvPr>
+          <p:cNvSpPr>
+            <a:spLocks xmlns:a="http://schemas.openxmlformats.org/drawingml/2006/main" noGrp="1"/>
+          </p:cNvSpPr>
+          <p:nvPr/>
+        </p:nvSpPr>
+        <p:spPr>
+          <a:xfrm xmlns:a="http://schemas.openxmlformats.org/drawingml/2006/main">
+            <a:off x="381000" y="4572000"/>
+            <a:ext cx="8382000" cy="238125"/>
+          </a:xfrm>
+          <a:prstGeom xmlns:a="http://schemas.openxmlformats.org/drawingml/2006/main" prst="rect">
+            <a:avLst/>
+          </a:prstGeom>
+          <a:noFill xmlns:a="http://schemas.openxmlformats.org/drawingml/2006/main"/>
+          <a:ln xmlns:a="http://schemas.openxmlformats.org/drawingml/2006/main" w="0">
+            <a:noFill/>
+          </a:ln>
+        </p:spPr>
+        <p:txBody>
+          <a:bodyPr xmlns:a="http://schemas.openxmlformats.org/drawingml/2006/main"/>
+          <a:lstStyle xmlns:a="http://schemas.openxmlformats.org/drawingml/2006/main">
+            <a:defPPr>
+              <a:defRPr sz="975" b="0">
+                <a:solidFill>
+                  <a:srgbClr val="4F609B"/>
+                </a:solidFill>
+                <a:latin typeface="Noto Sans KR"/>
+                <a:ea typeface="Noto Sans KR"/>
+                <a:cs typeface="Noto Sans KR"/>
+              </a:defRPr>
+            </a:defPPr>
+            <a:lvl1pPr>
+              <a:defRPr sz="975" b="0">
+                <a:solidFill>
+                  <a:srgbClr val="4F609B"/>
+                </a:solidFill>
+                <a:latin typeface="Noto Sans KR"/>
+                <a:ea typeface="Noto Sans KR"/>
+                <a:cs typeface="Noto Sans KR"/>
+              </a:defRPr>
+            </a:lvl1pPr>
+            <a:lvl2pPr>
+              <a:defRPr sz="975" b="0">
+                <a:solidFill>
+                  <a:srgbClr val="4F609B"/>
+                </a:solidFill>
+                <a:latin typeface="Noto Sans KR"/>
+                <a:ea typeface="Noto Sans KR"/>
+                <a:cs typeface="Noto Sans KR"/>
+              </a:defRPr>
+            </a:lvl2pPr>
+            <a:lvl3pPr>
+              <a:defRPr sz="975" b="0">
+                <a:solidFill>
+                  <a:srgbClr val="4F609B"/>
+                </a:solidFill>
+                <a:latin typeface="Noto Sans KR"/>
+                <a:ea typeface="Noto Sans KR"/>
+                <a:cs typeface="Noto Sans KR"/>
+              </a:defRPr>
+            </a:lvl3pPr>
+            <a:lvl4pPr>
+              <a:defRPr sz="975" b="0">
+                <a:solidFill>
+                  <a:srgbClr val="4F609B"/>
+                </a:solidFill>
+                <a:latin typeface="Noto Sans KR"/>
+                <a:ea typeface="Noto Sans KR"/>
+                <a:cs typeface="Noto Sans KR"/>
+              </a:defRPr>
+            </a:lvl4pPr>
+            <a:lvl5pPr>
+              <a:defRPr sz="975" b="0">
+                <a:solidFill>
+                  <a:srgbClr val="4F609B"/>
+                </a:solidFill>
+                <a:latin typeface="Noto Sans KR"/>
+                <a:ea typeface="Noto Sans KR"/>
+                <a:cs typeface="Noto Sans KR"/>
+              </a:defRPr>
+            </a:lvl5pPr>
+            <a:lvl6pPr>
+              <a:defRPr sz="975" b="0">
+                <a:solidFill>
+                  <a:srgbClr val="4F609B"/>
+                </a:solidFill>
+                <a:latin typeface="Noto Sans KR"/>
+                <a:ea typeface="Noto Sans KR"/>
+                <a:cs typeface="Noto Sans KR"/>
+              </a:defRPr>
+            </a:lvl6pPr>
+            <a:lvl7pPr>
+              <a:defRPr sz="975" b="0">
+                <a:solidFill>
+                  <a:srgbClr val="4F609B"/>
+                </a:solidFill>
+                <a:latin typeface="Noto Sans KR"/>
+                <a:ea typeface="Noto Sans KR"/>
+                <a:cs typeface="Noto Sans KR"/>
+              </a:defRPr>
+            </a:lvl7pPr>
+            <a:lvl8pPr>
+              <a:defRPr sz="975" b="0">
+                <a:solidFill>
+                  <a:srgbClr val="4F609B"/>
+                </a:solidFill>
+                <a:latin typeface="Noto Sans KR"/>
+                <a:ea typeface="Noto Sans KR"/>
+                <a:cs typeface="Noto Sans KR"/>
+              </a:defRPr>
+            </a:lvl8pPr>
+            <a:lvl9pPr>
+              <a:defRPr sz="975" b="0">
+                <a:solidFill>
+                  <a:srgbClr val="4F609B"/>
+                </a:solidFill>
+                <a:latin typeface="Noto Sans KR"/>
+                <a:ea typeface="Noto Sans KR"/>
+                <a:cs typeface="Noto Sans KR"/>
+              </a:defRPr>
+            </a:lvl9pPr>
+          </a:lstStyle>
+          <a:p xmlns:a="http://schemas.openxmlformats.org/drawingml/2006/main">
+            <a:pPr>
+              <a:defRPr sz="975" b="0">
+                <a:solidFill>
+                  <a:srgbClr val="4F609B"/>
+                </a:solidFill>
+                <a:latin typeface="Noto Sans KR"/>
+                <a:ea typeface="Noto Sans KR"/>
+                <a:cs typeface="Noto Sans KR"/>
+              </a:defRPr>
+            </a:pPr>
+            <a:r>
+              <a:rPr sz="975" b="0">
+                <a:solidFill>
+                  <a:srgbClr val="4F609B"/>
+                </a:solidFill>
+                <a:latin typeface="Noto Sans KR"/>
+                <a:ea typeface="Noto Sans KR"/>
+                <a:cs typeface="Noto Sans KR"/>
+              </a:rPr>
+              <a:t>과거 배포 버전·사용자 실험이 아닌 설계 비교입니다. 실제 응답: prompt-log U1/U2/U3.</a:t>
+            </a:r>
+          </a:p>
+        </p:txBody>
+      </p:sp>
+      <p:pic xmlns:a="http://schemas.openxmlformats.org/drawingml/2006/main" xmlns:r="http://schemas.openxmlformats.org/officeDocument/2006/relationships">
+        <p:nvPicPr>
+          <p:cNvPr id="9" name="Picture 8" descr="explanation-phone-options.jpg"/>
+          <p:cNvPicPr>
+            <a:picLocks noChangeAspect="1"/>
+          </p:cNvPicPr>
+          <p:nvPr/>
+        </p:nvPicPr>
+        <p:blipFill>
+          <a:blip r:embed="rId5"/>
+          <a:stretch>
+            <a:fillRect/>
+          </a:stretch>
+        </p:blipFill>
+        <p:spPr>
+          <a:xfrm>
+            <a:off x="3135012" y="1190625"/>
+            <a:ext cx="1540477" cy="3333750"/>
+          </a:xfrm>
+          <a:prstGeom prst="rect">
+            <a:avLst/>
+          </a:prstGeom>
+        </p:spPr>
+      </p:pic>
+    </p:spTree>
+    <p:extLst>
+      <p:ext uri="{BB962C8B-B14F-4D97-AF65-F5344CB8AC3E}">
+        <p14:creationId xmlns:p14="http://schemas.microsoft.com/office/powerpoint/2010/main" val="1145763944"/>
       </p:ext>
     </p:extLst>
   </p:cSld>
@@ -25979,7 +25905,7 @@
           <p:cNvPr id="9" name="">
             <a:extLst xmlns:a="http://schemas.openxmlformats.org/drawingml/2006/main">
               <a:ext uri="{FF2B5EF4-FFF2-40B4-BE49-F238E27FC236}">
-                <a16:creationId xmlns:a16="http://schemas.microsoft.com/office/drawing/2014/main" id="{73673B73-F842-43B6-AC72-E4342007229F}"/>
+                <a16:creationId xmlns:a16="http://schemas.microsoft.com/office/drawing/2014/main" id="{8A351B75-8810-4152-9B6B-F47FB0650429}"/>
               </a:ext>
             </a:extLst>
           </p:cNvPr>
@@ -26135,7 +26061,7 @@
           <p:cNvPr id="2" name="">
             <a:extLst xmlns:a="http://schemas.openxmlformats.org/drawingml/2006/main">
               <a:ext uri="{FF2B5EF4-FFF2-40B4-BE49-F238E27FC236}">
-                <a16:creationId xmlns:a16="http://schemas.microsoft.com/office/drawing/2014/main" id="{B7E7D9E4-3329-44D8-A062-FD44AABCDFC2}"/>
+                <a16:creationId xmlns:a16="http://schemas.microsoft.com/office/drawing/2014/main" id="{710233C6-8E49-4A09-807E-6C669A35B50E}"/>
               </a:ext>
             </a:extLst>
           </p:cNvPr>
@@ -26291,7 +26217,7 @@
           <p:cNvPr id="3" name="">
             <a:extLst xmlns:a="http://schemas.openxmlformats.org/drawingml/2006/main">
               <a:ext uri="{FF2B5EF4-FFF2-40B4-BE49-F238E27FC236}">
-                <a16:creationId xmlns:a16="http://schemas.microsoft.com/office/drawing/2014/main" id="{15D74D46-20B8-4B09-AED5-12582C7F974B}"/>
+                <a16:creationId xmlns:a16="http://schemas.microsoft.com/office/drawing/2014/main" id="{9EAB59CC-A436-4080-AEC1-2CE7AE7239E6}"/>
               </a:ext>
             </a:extLst>
           </p:cNvPr>
@@ -26418,25 +26344,7 @@
             </a:lvl9pPr>
           </a:lstStyle>
           <a:p xmlns:a="http://schemas.openxmlformats.org/drawingml/2006/main">
-            <a:pPr>
-              <a:defRPr sz="750" b="0">
-                <a:solidFill>
-                  <a:srgbClr val="657491"/>
-                </a:solidFill>
-                <a:latin typeface="Noto Sans KR"/>
-                <a:ea typeface="Noto Sans KR"/>
-                <a:cs typeface="Noto Sans KR"/>
-              </a:defRPr>
-            </a:pPr>
             <a:r>
-              <a:rPr sz="750" b="0">
-                <a:solidFill>
-                  <a:srgbClr val="657491"/>
-                </a:solidFill>
-                <a:latin typeface="Noto Sans KR"/>
-                <a:ea typeface="Noto Sans KR"/>
-                <a:cs typeface="Noto Sans KR"/>
-              </a:rPr>
               <a:t>NoteQuiz · zhaoboda 2025106293 · 03</a:t>
             </a:r>
           </a:p>
@@ -26447,7 +26355,7 @@
           <p:cNvPr id="4" name="">
             <a:extLst xmlns:a="http://schemas.openxmlformats.org/drawingml/2006/main">
               <a:ext uri="{FF2B5EF4-FFF2-40B4-BE49-F238E27FC236}">
-                <a16:creationId xmlns:a16="http://schemas.microsoft.com/office/drawing/2014/main" id="{12A6055D-6197-437C-8EE3-617E89FB9D63}"/>
+                <a16:creationId xmlns:a16="http://schemas.microsoft.com/office/drawing/2014/main" id="{D1E11973-5239-4DDD-A259-0DD187C03550}"/>
               </a:ext>
             </a:extLst>
           </p:cNvPr>
@@ -26603,7 +26511,7 @@
           <p:cNvPr id="5" name="">
             <a:extLst xmlns:a="http://schemas.openxmlformats.org/drawingml/2006/main">
               <a:ext uri="{FF2B5EF4-FFF2-40B4-BE49-F238E27FC236}">
-                <a16:creationId xmlns:a16="http://schemas.microsoft.com/office/drawing/2014/main" id="{77EEC349-B38F-46B6-9A3D-109111D2E536}"/>
+                <a16:creationId xmlns:a16="http://schemas.microsoft.com/office/drawing/2014/main" id="{36644985-DEB8-4C3C-B7BE-87BAE34A9272}"/>
               </a:ext>
             </a:extLst>
           </p:cNvPr>
@@ -27076,7 +26984,7 @@
           <p:cNvPr id="6" name="">
             <a:extLst xmlns:a="http://schemas.openxmlformats.org/drawingml/2006/main">
               <a:ext uri="{FF2B5EF4-FFF2-40B4-BE49-F238E27FC236}">
-                <a16:creationId xmlns:a16="http://schemas.microsoft.com/office/drawing/2014/main" id="{AC172F3C-7ABD-4E54-A7A3-D3F894646197}"/>
+                <a16:creationId xmlns:a16="http://schemas.microsoft.com/office/drawing/2014/main" id="{D302F72F-C273-44B8-A4F6-113EDBF48CAE}"/>
               </a:ext>
             </a:extLst>
           </p:cNvPr>
@@ -27278,7 +27186,7 @@
           <p:cNvPr id="7" name="">
             <a:extLst xmlns:a="http://schemas.openxmlformats.org/drawingml/2006/main">
               <a:ext uri="{FF2B5EF4-FFF2-40B4-BE49-F238E27FC236}">
-                <a16:creationId xmlns:a16="http://schemas.microsoft.com/office/drawing/2014/main" id="{F3C0A497-ED1D-48F5-BB63-D321F01762B0}"/>
+                <a16:creationId xmlns:a16="http://schemas.microsoft.com/office/drawing/2014/main" id="{5097E71D-9DAB-4E0A-9ADE-010F9F42DD6A}"/>
               </a:ext>
             </a:extLst>
           </p:cNvPr>
@@ -27503,7 +27411,7 @@
           <p:cNvPr id="8" name="">
             <a:extLst xmlns:a="http://schemas.openxmlformats.org/drawingml/2006/main">
               <a:ext uri="{FF2B5EF4-FFF2-40B4-BE49-F238E27FC236}">
-                <a16:creationId xmlns:a16="http://schemas.microsoft.com/office/drawing/2014/main" id="{A5FA31B2-71E5-4EAA-9957-C616611342EC}"/>
+                <a16:creationId xmlns:a16="http://schemas.microsoft.com/office/drawing/2014/main" id="{5B907A3B-9191-48CE-A1C1-04788DFDF4F4}"/>
               </a:ext>
             </a:extLst>
           </p:cNvPr>
@@ -27711,7 +27619,7 @@
           <p:cNvPr id="8" name="">
             <a:extLst xmlns:a="http://schemas.openxmlformats.org/drawingml/2006/main">
               <a:ext uri="{FF2B5EF4-FFF2-40B4-BE49-F238E27FC236}">
-                <a16:creationId xmlns:a16="http://schemas.microsoft.com/office/drawing/2014/main" id="{8C13E99A-5788-4136-BCBD-D9B8241EA554}"/>
+                <a16:creationId xmlns:a16="http://schemas.microsoft.com/office/drawing/2014/main" id="{C189A650-D792-4FA9-BEB1-60DFAF58A6A2}"/>
               </a:ext>
             </a:extLst>
           </p:cNvPr>
@@ -27867,7 +27775,7 @@
           <p:cNvPr id="2" name="">
             <a:extLst xmlns:a="http://schemas.openxmlformats.org/drawingml/2006/main">
               <a:ext uri="{FF2B5EF4-FFF2-40B4-BE49-F238E27FC236}">
-                <a16:creationId xmlns:a16="http://schemas.microsoft.com/office/drawing/2014/main" id="{50CB0B20-D647-4E75-9090-A42E78B918D0}"/>
+                <a16:creationId xmlns:a16="http://schemas.microsoft.com/office/drawing/2014/main" id="{42B432FC-42E5-49F8-8928-AAC514713B46}"/>
               </a:ext>
             </a:extLst>
           </p:cNvPr>
@@ -28023,7 +27931,7 @@
           <p:cNvPr id="3" name="">
             <a:extLst xmlns:a="http://schemas.openxmlformats.org/drawingml/2006/main">
               <a:ext uri="{FF2B5EF4-FFF2-40B4-BE49-F238E27FC236}">
-                <a16:creationId xmlns:a16="http://schemas.microsoft.com/office/drawing/2014/main" id="{2C74F42E-2B84-47C5-8BAE-1998EA038381}"/>
+                <a16:creationId xmlns:a16="http://schemas.microsoft.com/office/drawing/2014/main" id="{87E16A15-A3AF-4F7C-ABDD-2CE87894264D}"/>
               </a:ext>
             </a:extLst>
           </p:cNvPr>
@@ -28150,25 +28058,7 @@
             </a:lvl9pPr>
           </a:lstStyle>
           <a:p xmlns:a="http://schemas.openxmlformats.org/drawingml/2006/main">
-            <a:pPr>
-              <a:defRPr sz="750" b="0">
-                <a:solidFill>
-                  <a:srgbClr val="657491"/>
-                </a:solidFill>
-                <a:latin typeface="Noto Sans KR"/>
-                <a:ea typeface="Noto Sans KR"/>
-                <a:cs typeface="Noto Sans KR"/>
-              </a:defRPr>
-            </a:pPr>
             <a:r>
-              <a:rPr sz="750" b="0">
-                <a:solidFill>
-                  <a:srgbClr val="657491"/>
-                </a:solidFill>
-                <a:latin typeface="Noto Sans KR"/>
-                <a:ea typeface="Noto Sans KR"/>
-                <a:cs typeface="Noto Sans KR"/>
-              </a:rPr>
               <a:t>NoteQuiz · zhaoboda 2025106293 · 04</a:t>
             </a:r>
           </a:p>
@@ -28179,7 +28069,7 @@
           <p:cNvPr id="4" name="">
             <a:extLst xmlns:a="http://schemas.openxmlformats.org/drawingml/2006/main">
               <a:ext uri="{FF2B5EF4-FFF2-40B4-BE49-F238E27FC236}">
-                <a16:creationId xmlns:a16="http://schemas.microsoft.com/office/drawing/2014/main" id="{A9F774CE-7DB6-4777-B43A-56F40CAF83BD}"/>
+                <a16:creationId xmlns:a16="http://schemas.microsoft.com/office/drawing/2014/main" id="{70B7288F-D641-4182-98E0-414870D9CF51}"/>
               </a:ext>
             </a:extLst>
           </p:cNvPr>
@@ -28330,40 +28220,12 @@
           </a:p>
         </p:txBody>
       </p:sp>
-      <p:pic>
-        <p:nvPicPr>
-          <p:cNvPr id="5" name="">
-            <a:extLst xmlns:a="http://schemas.openxmlformats.org/drawingml/2006/main">
-              <a:ext uri="{FF2B5EF4-FFF2-40B4-BE49-F238E27FC236}">
-                <a16:creationId xmlns:a16="http://schemas.microsoft.com/office/drawing/2014/main" id="{5697FC5F-D159-4AA2-93C0-A7A9E7380D78}"/>
-              </a:ext>
-            </a:extLst>
-          </p:cNvPr>
-          <p:cNvPicPr>
-            <a:picLocks xmlns:a="http://schemas.openxmlformats.org/drawingml/2006/main" noChangeAspect="1"/>
-          </p:cNvPicPr>
-          <p:nvPr/>
-        </p:nvPicPr>
-        <p:blipFill>
-          <a:blip xmlns:r="http://schemas.openxmlformats.org/officeDocument/2006/relationships" xmlns:a="http://schemas.openxmlformats.org/drawingml/2006/main" r:embed="Rebf44260f66c4d10"/>
-          <a:stretch xmlns:a="http://schemas.openxmlformats.org/drawingml/2006/main"/>
-        </p:blipFill>
-        <p:spPr>
-          <a:xfrm xmlns:a="http://schemas.openxmlformats.org/drawingml/2006/main">
-            <a:off x="614498" y="1143000"/>
-            <a:ext cx="1628504" cy="3524250"/>
-          </a:xfrm>
-          <a:prstGeom xmlns:a="http://schemas.openxmlformats.org/drawingml/2006/main" prst="rect">
-            <a:avLst/>
-          </a:prstGeom>
-        </p:spPr>
-      </p:pic>
       <p:graphicFrame>
         <p:nvGraphicFramePr>
           <p:cNvPr id="6" name="">
             <a:extLst xmlns:a="http://schemas.openxmlformats.org/drawingml/2006/main">
               <a:ext uri="{FF2B5EF4-FFF2-40B4-BE49-F238E27FC236}">
-                <a16:creationId xmlns:a16="http://schemas.microsoft.com/office/drawing/2014/main" id="{BA5A390C-826F-4BEA-BCFE-7DDDCD1D02C9}"/>
+                <a16:creationId xmlns:a16="http://schemas.microsoft.com/office/drawing/2014/main" id="{326A3788-3A3D-42B4-97CE-999325077032}"/>
               </a:ext>
             </a:extLst>
           </p:cNvPr>
@@ -28521,7 +28383,7 @@
                           <a:ea typeface="Noto Sans KR"/>
                           <a:cs typeface="Noto Sans KR"/>
                         </a:rPr>
-                        <a:t>같은 문항의 정답과 해설 · P04</a:t>
+                        <a:t>같은 문항의 정답·해설·원래 보기·내 선택 · P04</a:t>
                       </a:r>
                     </a:p>
                   </a:txBody>
@@ -28621,7 +28483,7 @@
                           <a:ea typeface="Noto Sans KR"/>
                           <a:cs typeface="Noto Sans KR"/>
                         </a:rPr>
-                        <a:t>읽은 뒤 다음 문제 · P03</a:t>
+                        <a:t>읽은 뒤 다음 문제 · P07</a:t>
                       </a:r>
                     </a:p>
                   </a:txBody>
@@ -28641,7 +28503,7 @@
           <p:cNvPr id="7" name="">
             <a:extLst xmlns:a="http://schemas.openxmlformats.org/drawingml/2006/main">
               <a:ext uri="{FF2B5EF4-FFF2-40B4-BE49-F238E27FC236}">
-                <a16:creationId xmlns:a16="http://schemas.microsoft.com/office/drawing/2014/main" id="{86B7488F-24B9-4A05-AECA-92089BE1C751}"/>
+                <a16:creationId xmlns:a16="http://schemas.microsoft.com/office/drawing/2014/main" id="{FD223693-1191-4157-AE98-47FB2EDC7F80}"/>
               </a:ext>
             </a:extLst>
           </p:cNvPr>
@@ -28768,76 +28630,49 @@
             </a:lvl9pPr>
           </a:lstStyle>
           <a:p xmlns:a="http://schemas.openxmlformats.org/drawingml/2006/main">
-            <a:pPr>
-              <a:defRPr sz="1350" b="0">
-                <a:solidFill>
-                  <a:srgbClr val="18243B"/>
-                </a:solidFill>
-                <a:latin typeface="Noto Sans KR"/>
-                <a:ea typeface="Noto Sans KR"/>
-                <a:cs typeface="Noto Sans KR"/>
-              </a:defRPr>
-            </a:pPr>
             <a:r>
-              <a:rPr sz="1350" b="0">
-                <a:solidFill>
-                  <a:srgbClr val="18243B"/>
-                </a:solidFill>
-                <a:latin typeface="Noto Sans KR"/>
-                <a:ea typeface="Noto Sans KR"/>
-                <a:cs typeface="Noto Sans KR"/>
-              </a:rPr>
-              <a:t>정보 순서: 정답 → 이유 → 강의 근거 → 다음 행동</a:t>
+              <a:rPr sz="1250"/>
+              <a:t>정보 순서: 정답 → 이유 → 원래 보기 → 내 선택 → 강의 근거 → 다음 행동</a:t>
             </a:r>
           </a:p>
           <a:p xmlns:a="http://schemas.openxmlformats.org/drawingml/2006/main">
-            <a:pPr>
-              <a:defRPr sz="1350" b="0">
-                <a:solidFill>
-                  <a:srgbClr val="18243B"/>
-                </a:solidFill>
-                <a:latin typeface="Noto Sans KR"/>
-                <a:ea typeface="Noto Sans KR"/>
-                <a:cs typeface="Noto Sans KR"/>
-              </a:defRPr>
-            </a:pPr>
             <a:r>
-              <a:rPr sz="1350" b="0">
-                <a:solidFill>
-                  <a:srgbClr val="18243B"/>
-                </a:solidFill>
-                <a:latin typeface="Noto Sans KR"/>
-                <a:ea typeface="Noto Sans KR"/>
-                <a:cs typeface="Noto Sans KR"/>
-              </a:rPr>
+              <a:rPr sz="1250"/>
               <a:t>모두 상시 표시. 제목·색·여백으로 탐색을 돕습니다.</a:t>
             </a:r>
           </a:p>
           <a:p xmlns:a="http://schemas.openxmlformats.org/drawingml/2006/main">
-            <a:pPr>
-              <a:defRPr sz="1350" b="0">
-                <a:solidFill>
-                  <a:srgbClr val="18243B"/>
-                </a:solidFill>
-                <a:latin typeface="Noto Sans KR"/>
-                <a:ea typeface="Noto Sans KR"/>
-                <a:cs typeface="Noto Sans KR"/>
-              </a:defRPr>
-            </a:pPr>
             <a:r>
-              <a:rPr sz="1350" b="0">
-                <a:solidFill>
-                  <a:srgbClr val="18243B"/>
-                </a:solidFill>
-                <a:latin typeface="Noto Sans KR"/>
-                <a:ea typeface="Noto Sans KR"/>
-                <a:cs typeface="Noto Sans KR"/>
-              </a:rPr>
+              <a:rPr sz="1250"/>
               <a:t>좁은 화면은 스크롤, 넓은 화면은 읽기 영역을 제한합니다.</a:t>
             </a:r>
           </a:p>
         </p:txBody>
       </p:sp>
+      <p:pic xmlns:a="http://schemas.openxmlformats.org/drawingml/2006/main" xmlns:r="http://schemas.openxmlformats.org/officeDocument/2006/relationships">
+        <p:nvPicPr>
+          <p:cNvPr id="9" name="Picture 8" descr="explanation-phone-options.jpg"/>
+          <p:cNvPicPr>
+            <a:picLocks noChangeAspect="1"/>
+          </p:cNvPicPr>
+          <p:nvPr/>
+        </p:nvPicPr>
+        <p:blipFill>
+          <a:blip r:embed="rId4"/>
+          <a:stretch>
+            <a:fillRect/>
+          </a:stretch>
+        </p:blipFill>
+        <p:spPr>
+          <a:xfrm>
+            <a:off x="614498" y="1143000"/>
+            <a:ext cx="1628504" cy="3524250"/>
+          </a:xfrm>
+          <a:prstGeom prst="rect">
+            <a:avLst/>
+          </a:prstGeom>
+        </p:spPr>
+      </p:pic>
     </p:spTree>
     <p:extLst>
       <p:ext uri="{BB962C8B-B14F-4D97-AF65-F5344CB8AC3E}">
@@ -28872,7 +28707,7 @@
           <p:cNvPr id="6" name="">
             <a:extLst xmlns:a="http://schemas.openxmlformats.org/drawingml/2006/main">
               <a:ext uri="{FF2B5EF4-FFF2-40B4-BE49-F238E27FC236}">
-                <a16:creationId xmlns:a16="http://schemas.microsoft.com/office/drawing/2014/main" id="{CC4127E0-8D01-442D-93B9-393A8B6A55FF}"/>
+                <a16:creationId xmlns:a16="http://schemas.microsoft.com/office/drawing/2014/main" id="{3070C8AC-992C-496D-B4DA-39FBEDDDD95F}"/>
               </a:ext>
             </a:extLst>
           </p:cNvPr>
@@ -29028,7 +28863,7 @@
           <p:cNvPr id="2" name="">
             <a:extLst xmlns:a="http://schemas.openxmlformats.org/drawingml/2006/main">
               <a:ext uri="{FF2B5EF4-FFF2-40B4-BE49-F238E27FC236}">
-                <a16:creationId xmlns:a16="http://schemas.microsoft.com/office/drawing/2014/main" id="{27287019-C2DA-411A-9690-E1A6B353AAC0}"/>
+                <a16:creationId xmlns:a16="http://schemas.microsoft.com/office/drawing/2014/main" id="{44497A83-4A2E-4BB5-B956-26BBE041ACF0}"/>
               </a:ext>
             </a:extLst>
           </p:cNvPr>
@@ -29184,7 +29019,7 @@
           <p:cNvPr id="3" name="">
             <a:extLst xmlns:a="http://schemas.openxmlformats.org/drawingml/2006/main">
               <a:ext uri="{FF2B5EF4-FFF2-40B4-BE49-F238E27FC236}">
-                <a16:creationId xmlns:a16="http://schemas.microsoft.com/office/drawing/2014/main" id="{C6543041-4541-4941-B790-FE3D35CE4D4D}"/>
+                <a16:creationId xmlns:a16="http://schemas.microsoft.com/office/drawing/2014/main" id="{504466FB-045D-49CE-A37B-2E65A129AA32}"/>
               </a:ext>
             </a:extLst>
           </p:cNvPr>
@@ -29311,25 +29146,7 @@
             </a:lvl9pPr>
           </a:lstStyle>
           <a:p xmlns:a="http://schemas.openxmlformats.org/drawingml/2006/main">
-            <a:pPr>
-              <a:defRPr sz="750" b="0">
-                <a:solidFill>
-                  <a:srgbClr val="657491"/>
-                </a:solidFill>
-                <a:latin typeface="Noto Sans KR"/>
-                <a:ea typeface="Noto Sans KR"/>
-                <a:cs typeface="Noto Sans KR"/>
-              </a:defRPr>
-            </a:pPr>
             <a:r>
-              <a:rPr sz="750" b="0">
-                <a:solidFill>
-                  <a:srgbClr val="657491"/>
-                </a:solidFill>
-                <a:latin typeface="Noto Sans KR"/>
-                <a:ea typeface="Noto Sans KR"/>
-                <a:cs typeface="Noto Sans KR"/>
-              </a:rPr>
               <a:t>NoteQuiz · zhaoboda 2025106293 · 05</a:t>
             </a:r>
           </a:p>
@@ -29340,7 +29157,7 @@
           <p:cNvPr id="4" name="">
             <a:extLst xmlns:a="http://schemas.openxmlformats.org/drawingml/2006/main">
               <a:ext uri="{FF2B5EF4-FFF2-40B4-BE49-F238E27FC236}">
-                <a16:creationId xmlns:a16="http://schemas.microsoft.com/office/drawing/2014/main" id="{42B4D26D-8B61-4719-8744-5A2E27F984A2}"/>
+                <a16:creationId xmlns:a16="http://schemas.microsoft.com/office/drawing/2014/main" id="{C484038E-FFC4-4FB8-BFC8-9C7CAC8020FE}"/>
               </a:ext>
             </a:extLst>
           </p:cNvPr>
@@ -29496,7 +29313,7 @@
           <p:cNvPr id="5" name="">
             <a:extLst xmlns:a="http://schemas.openxmlformats.org/drawingml/2006/main">
               <a:ext uri="{FF2B5EF4-FFF2-40B4-BE49-F238E27FC236}">
-                <a16:creationId xmlns:a16="http://schemas.microsoft.com/office/drawing/2014/main" id="{32D6742B-564E-4B52-9CF2-D9386512B9D4}"/>
+                <a16:creationId xmlns:a16="http://schemas.microsoft.com/office/drawing/2014/main" id="{772A4D7B-77C3-45E9-BEB7-38EA51EE38D8}"/>
               </a:ext>
             </a:extLst>
           </p:cNvPr>
@@ -29704,20 +29521,7 @@
                           <a:ea typeface="Noto Sans KR"/>
                           <a:cs typeface="Noto Sans KR"/>
                         </a:rPr>
-                        <a:t>“太繁琐无法快速检索重要内容”</a:t>
-                      </a:r>
-                    </a:p>
-                    <a:p>
-                      <a:r>
-                        <a:rPr sz="1275" b="0">
-                          <a:solidFill>
-                            <a:srgbClr val="18243B"/>
-                          </a:solidFill>
-                          <a:latin typeface="Noto Sans KR"/>
-                          <a:ea typeface="Noto Sans KR"/>
-                          <a:cs typeface="Noto Sans KR"/>
-                        </a:rPr>
-                        <a:t>너무 번잡하여 중요한 내용을 빠르게 찾기 어렵다</a:t>
+                        <a:t>“너무 번잡해서 중요한 내용을 빠르게 찾기 어렵다” / 자체 반론</a:t>
                       </a:r>
                     </a:p>
                   </a:txBody>
@@ -29866,7 +29670,7 @@
           <p:cNvPr id="6" name="">
             <a:extLst xmlns:a="http://schemas.openxmlformats.org/drawingml/2006/main">
               <a:ext uri="{FF2B5EF4-FFF2-40B4-BE49-F238E27FC236}">
-                <a16:creationId xmlns:a16="http://schemas.microsoft.com/office/drawing/2014/main" id="{70041B07-83AE-44CF-9E73-F6C52DFC7D76}"/>
+                <a16:creationId xmlns:a16="http://schemas.microsoft.com/office/drawing/2014/main" id="{A001B1B5-2452-48A8-A236-1E47CFABEE71}"/>
               </a:ext>
             </a:extLst>
           </p:cNvPr>
@@ -30022,7 +29826,7 @@
           <p:cNvPr id="2" name="">
             <a:extLst xmlns:a="http://schemas.openxmlformats.org/drawingml/2006/main">
               <a:ext uri="{FF2B5EF4-FFF2-40B4-BE49-F238E27FC236}">
-                <a16:creationId xmlns:a16="http://schemas.microsoft.com/office/drawing/2014/main" id="{49E4471E-A079-4E6F-B2B8-19BE66CDFC69}"/>
+                <a16:creationId xmlns:a16="http://schemas.microsoft.com/office/drawing/2014/main" id="{26BAA491-CC9B-471F-A3D2-81077FCD3F2D}"/>
               </a:ext>
             </a:extLst>
           </p:cNvPr>
@@ -30178,7 +29982,7 @@
           <p:cNvPr id="3" name="">
             <a:extLst xmlns:a="http://schemas.openxmlformats.org/drawingml/2006/main">
               <a:ext uri="{FF2B5EF4-FFF2-40B4-BE49-F238E27FC236}">
-                <a16:creationId xmlns:a16="http://schemas.microsoft.com/office/drawing/2014/main" id="{CD774DE1-59C6-4CEE-A5DD-0614024A4794}"/>
+                <a16:creationId xmlns:a16="http://schemas.microsoft.com/office/drawing/2014/main" id="{94326A03-5CE3-49D2-9502-D662BDD85C2E}"/>
               </a:ext>
             </a:extLst>
           </p:cNvPr>
@@ -30305,25 +30109,7 @@
             </a:lvl9pPr>
           </a:lstStyle>
           <a:p xmlns:a="http://schemas.openxmlformats.org/drawingml/2006/main">
-            <a:pPr>
-              <a:defRPr sz="750" b="0">
-                <a:solidFill>
-                  <a:srgbClr val="657491"/>
-                </a:solidFill>
-                <a:latin typeface="Noto Sans KR"/>
-                <a:ea typeface="Noto Sans KR"/>
-                <a:cs typeface="Noto Sans KR"/>
-              </a:defRPr>
-            </a:pPr>
             <a:r>
-              <a:rPr sz="750" b="0">
-                <a:solidFill>
-                  <a:srgbClr val="657491"/>
-                </a:solidFill>
-                <a:latin typeface="Noto Sans KR"/>
-                <a:ea typeface="Noto Sans KR"/>
-                <a:cs typeface="Noto Sans KR"/>
-              </a:rPr>
               <a:t>NoteQuiz · zhaoboda 2025106293 · 06</a:t>
             </a:r>
           </a:p>
@@ -30334,7 +30120,7 @@
           <p:cNvPr id="4" name="">
             <a:extLst xmlns:a="http://schemas.openxmlformats.org/drawingml/2006/main">
               <a:ext uri="{FF2B5EF4-FFF2-40B4-BE49-F238E27FC236}">
-                <a16:creationId xmlns:a16="http://schemas.microsoft.com/office/drawing/2014/main" id="{217EEAD1-A5CC-4530-B2BE-EDC2337F70BB}"/>
+                <a16:creationId xmlns:a16="http://schemas.microsoft.com/office/drawing/2014/main" id="{82340909-806C-487F-B380-7286AABF3A34}"/>
               </a:ext>
             </a:extLst>
           </p:cNvPr>
@@ -30490,7 +30276,7 @@
           <p:cNvPr id="5" name="">
             <a:extLst xmlns:a="http://schemas.openxmlformats.org/drawingml/2006/main">
               <a:ext uri="{FF2B5EF4-FFF2-40B4-BE49-F238E27FC236}">
-                <a16:creationId xmlns:a16="http://schemas.microsoft.com/office/drawing/2014/main" id="{DCED5333-0ED0-431C-BF14-63621785113E}"/>
+                <a16:creationId xmlns:a16="http://schemas.microsoft.com/office/drawing/2014/main" id="{0894538E-7375-4B9D-9804-1CE522953A76}"/>
               </a:ext>
             </a:extLst>
           </p:cNvPr>
@@ -30874,11 +30660,11 @@
 </file>
 
 <file path=ppt/slides/slide7.xml><?xml version="1.0" encoding="utf-8"?>
-<p:sld xmlns:p="http://schemas.openxmlformats.org/presentationml/2006/main">
+<p:sld xmlns:a="http://schemas.openxmlformats.org/drawingml/2006/main" xmlns:ns2="http://schemas.microsoft.com/office/drawing/2014/main" xmlns:p="http://schemas.openxmlformats.org/presentationml/2006/main" xmlns:p14="http://schemas.microsoft.com/office/powerpoint/2010/main" xmlns:r="http://schemas.openxmlformats.org/officeDocument/2006/relationships">
   <p:cSld>
     <p:bg>
       <p:bgPr>
-        <a:solidFill xmlns:a="http://schemas.openxmlformats.org/drawingml/2006/main">
+        <a:solidFill>
           <a:srgbClr val="FFFFFF"/>
         </a:solidFill>
       </p:bgPr>
@@ -30890,38 +30676,38 @@
         <p:nvPr/>
       </p:nvGrpSpPr>
       <p:grpSpPr>
-        <a:xfrm xmlns:a="http://schemas.openxmlformats.org/drawingml/2006/main"/>
+        <a:xfrm/>
       </p:grpSpPr>
       <p:sp>
         <p:nvSpPr>
           <p:cNvPr id="8" name="">
-            <a:extLst xmlns:a="http://schemas.openxmlformats.org/drawingml/2006/main">
+            <a:extLst>
               <a:ext uri="{FF2B5EF4-FFF2-40B4-BE49-F238E27FC236}">
-                <a16:creationId xmlns:a16="http://schemas.microsoft.com/office/drawing/2014/main" id="{AE7EF838-8527-4FD6-9153-505000D70CE0}"/>
+                <ns2:creationId id="{595272C0-58B9-47CB-9DEC-9331145522EB}"/>
               </a:ext>
             </a:extLst>
           </p:cNvPr>
           <p:cNvSpPr>
-            <a:spLocks xmlns:a="http://schemas.openxmlformats.org/drawingml/2006/main" noGrp="1"/>
+            <a:spLocks noGrp="1"/>
           </p:cNvSpPr>
           <p:nvPr/>
         </p:nvSpPr>
         <p:spPr>
-          <a:xfrm xmlns:a="http://schemas.openxmlformats.org/drawingml/2006/main">
+          <a:xfrm>
             <a:off x="381000" y="190500"/>
             <a:ext cx="7429500" cy="190500"/>
           </a:xfrm>
-          <a:prstGeom xmlns:a="http://schemas.openxmlformats.org/drawingml/2006/main" prst="rect">
+          <a:prstGeom prst="rect">
             <a:avLst/>
           </a:prstGeom>
-          <a:noFill xmlns:a="http://schemas.openxmlformats.org/drawingml/2006/main"/>
-          <a:ln xmlns:a="http://schemas.openxmlformats.org/drawingml/2006/main" w="0">
+          <a:noFill/>
+          <a:ln w="0">
             <a:noFill/>
           </a:ln>
         </p:spPr>
         <p:txBody>
-          <a:bodyPr xmlns:a="http://schemas.openxmlformats.org/drawingml/2006/main"/>
-          <a:lstStyle xmlns:a="http://schemas.openxmlformats.org/drawingml/2006/main">
+          <a:bodyPr/>
+          <a:lstStyle>
             <a:defPPr>
               <a:defRPr sz="825" b="1">
                 <a:solidFill>
@@ -31023,7 +30809,7 @@
               </a:defRPr>
             </a:lvl9pPr>
           </a:lstStyle>
-          <a:p xmlns:a="http://schemas.openxmlformats.org/drawingml/2006/main">
+          <a:p>
             <a:pPr>
               <a:defRPr sz="825" b="1">
                 <a:solidFill>
@@ -31051,33 +30837,33 @@
       <p:sp>
         <p:nvSpPr>
           <p:cNvPr id="2" name="">
-            <a:extLst xmlns:a="http://schemas.openxmlformats.org/drawingml/2006/main">
+            <a:extLst>
               <a:ext uri="{FF2B5EF4-FFF2-40B4-BE49-F238E27FC236}">
-                <a16:creationId xmlns:a16="http://schemas.microsoft.com/office/drawing/2014/main" id="{238CD8B3-8FC1-4ABA-BD6B-8079D85E02F1}"/>
+                <ns2:creationId id="{878A2174-A1BE-47CE-B958-BE823C956C6B}"/>
               </a:ext>
             </a:extLst>
           </p:cNvPr>
           <p:cNvSpPr>
-            <a:spLocks xmlns:a="http://schemas.openxmlformats.org/drawingml/2006/main" noGrp="1"/>
+            <a:spLocks noGrp="1"/>
           </p:cNvSpPr>
           <p:nvPr/>
         </p:nvSpPr>
         <p:spPr>
-          <a:xfrm xmlns:a="http://schemas.openxmlformats.org/drawingml/2006/main">
+          <a:xfrm>
             <a:off x="381000" y="495300"/>
             <a:ext cx="8382000" cy="552450"/>
           </a:xfrm>
-          <a:prstGeom xmlns:a="http://schemas.openxmlformats.org/drawingml/2006/main" prst="rect">
+          <a:prstGeom prst="rect">
             <a:avLst/>
           </a:prstGeom>
-          <a:noFill xmlns:a="http://schemas.openxmlformats.org/drawingml/2006/main"/>
-          <a:ln xmlns:a="http://schemas.openxmlformats.org/drawingml/2006/main" w="0">
+          <a:noFill/>
+          <a:ln w="0">
             <a:noFill/>
           </a:ln>
         </p:spPr>
         <p:txBody>
-          <a:bodyPr xmlns:a="http://schemas.openxmlformats.org/drawingml/2006/main"/>
-          <a:lstStyle xmlns:a="http://schemas.openxmlformats.org/drawingml/2006/main">
+          <a:bodyPr/>
+          <a:lstStyle>
             <a:defPPr>
               <a:defRPr sz="2250" b="1">
                 <a:solidFill>
@@ -31179,7 +30965,7 @@
               </a:defRPr>
             </a:lvl9pPr>
           </a:lstStyle>
-          <a:p xmlns:a="http://schemas.openxmlformats.org/drawingml/2006/main">
+          <a:p>
             <a:pPr>
               <a:defRPr sz="2250" b="1">
                 <a:solidFill>
@@ -31207,33 +30993,33 @@
       <p:sp>
         <p:nvSpPr>
           <p:cNvPr id="3" name="">
-            <a:extLst xmlns:a="http://schemas.openxmlformats.org/drawingml/2006/main">
+            <a:extLst>
               <a:ext uri="{FF2B5EF4-FFF2-40B4-BE49-F238E27FC236}">
-                <a16:creationId xmlns:a16="http://schemas.microsoft.com/office/drawing/2014/main" id="{BC558674-DD16-4818-889C-8C1D91CCB025}"/>
+                <ns2:creationId id="{083E7C99-0C4E-4D76-AC6C-6C6F9B88D414}"/>
               </a:ext>
             </a:extLst>
           </p:cNvPr>
           <p:cNvSpPr>
-            <a:spLocks xmlns:a="http://schemas.openxmlformats.org/drawingml/2006/main" noGrp="1"/>
+            <a:spLocks noGrp="1"/>
           </p:cNvSpPr>
           <p:nvPr/>
         </p:nvSpPr>
         <p:spPr>
-          <a:xfrm xmlns:a="http://schemas.openxmlformats.org/drawingml/2006/main">
+          <a:xfrm>
             <a:off x="381000" y="4857750"/>
             <a:ext cx="7620000" cy="190500"/>
           </a:xfrm>
-          <a:prstGeom xmlns:a="http://schemas.openxmlformats.org/drawingml/2006/main" prst="rect">
+          <a:prstGeom prst="rect">
             <a:avLst/>
           </a:prstGeom>
-          <a:noFill xmlns:a="http://schemas.openxmlformats.org/drawingml/2006/main"/>
-          <a:ln xmlns:a="http://schemas.openxmlformats.org/drawingml/2006/main" w="0">
+          <a:noFill/>
+          <a:ln w="0">
             <a:noFill/>
           </a:ln>
         </p:spPr>
         <p:txBody>
-          <a:bodyPr xmlns:a="http://schemas.openxmlformats.org/drawingml/2006/main"/>
-          <a:lstStyle xmlns:a="http://schemas.openxmlformats.org/drawingml/2006/main">
+          <a:bodyPr/>
+          <a:lstStyle>
             <a:defPPr>
               <a:defRPr sz="750" b="0">
                 <a:solidFill>
@@ -31335,26 +31121,8 @@
               </a:defRPr>
             </a:lvl9pPr>
           </a:lstStyle>
-          <a:p xmlns:a="http://schemas.openxmlformats.org/drawingml/2006/main">
-            <a:pPr>
-              <a:defRPr sz="750" b="0">
-                <a:solidFill>
-                  <a:srgbClr val="657491"/>
-                </a:solidFill>
-                <a:latin typeface="Noto Sans KR"/>
-                <a:ea typeface="Noto Sans KR"/>
-                <a:cs typeface="Noto Sans KR"/>
-              </a:defRPr>
-            </a:pPr>
+          <a:p>
             <a:r>
-              <a:rPr sz="750" b="0">
-                <a:solidFill>
-                  <a:srgbClr val="657491"/>
-                </a:solidFill>
-                <a:latin typeface="Noto Sans KR"/>
-                <a:ea typeface="Noto Sans KR"/>
-                <a:cs typeface="Noto Sans KR"/>
-              </a:rPr>
               <a:t>NoteQuiz · zhaoboda 2025106293 · 07</a:t>
             </a:r>
           </a:p>
@@ -31363,33 +31131,33 @@
       <p:sp>
         <p:nvSpPr>
           <p:cNvPr id="4" name="">
-            <a:extLst xmlns:a="http://schemas.openxmlformats.org/drawingml/2006/main">
+            <a:extLst>
               <a:ext uri="{FF2B5EF4-FFF2-40B4-BE49-F238E27FC236}">
-                <a16:creationId xmlns:a16="http://schemas.microsoft.com/office/drawing/2014/main" id="{D4F632A4-021E-4490-9CE2-C572242038BC}"/>
+                <ns2:creationId id="{5CCCE741-06A9-471F-BAE1-D3E6B2FE43D3}"/>
               </a:ext>
             </a:extLst>
           </p:cNvPr>
           <p:cNvSpPr>
-            <a:spLocks xmlns:a="http://schemas.openxmlformats.org/drawingml/2006/main" noGrp="1"/>
+            <a:spLocks noGrp="1"/>
           </p:cNvSpPr>
           <p:nvPr/>
         </p:nvSpPr>
         <p:spPr>
-          <a:xfrm xmlns:a="http://schemas.openxmlformats.org/drawingml/2006/main">
+          <a:xfrm>
             <a:off x="7810500" y="190500"/>
             <a:ext cx="952500" cy="190500"/>
           </a:xfrm>
-          <a:prstGeom xmlns:a="http://schemas.openxmlformats.org/drawingml/2006/main" prst="rect">
+          <a:prstGeom prst="rect">
             <a:avLst/>
           </a:prstGeom>
-          <a:noFill xmlns:a="http://schemas.openxmlformats.org/drawingml/2006/main"/>
-          <a:ln xmlns:a="http://schemas.openxmlformats.org/drawingml/2006/main" w="0">
+          <a:noFill/>
+          <a:ln w="0">
             <a:noFill/>
           </a:ln>
         </p:spPr>
         <p:txBody>
-          <a:bodyPr xmlns:a="http://schemas.openxmlformats.org/drawingml/2006/main"/>
-          <a:lstStyle xmlns:a="http://schemas.openxmlformats.org/drawingml/2006/main">
+          <a:bodyPr/>
+          <a:lstStyle>
             <a:defPPr>
               <a:defRPr sz="825" b="1">
                 <a:solidFill>
@@ -31491,7 +31259,7 @@
               </a:defRPr>
             </a:lvl9pPr>
           </a:lstStyle>
-          <a:p xmlns:a="http://schemas.openxmlformats.org/drawingml/2006/main">
+          <a:p>
             <a:pPr>
               <a:defRPr sz="825" b="1">
                 <a:solidFill>
@@ -31519,27 +31287,35 @@
       <p:pic>
         <p:nvPicPr>
           <p:cNvPr id="5" name="">
-            <a:extLst xmlns:a="http://schemas.openxmlformats.org/drawingml/2006/main">
+            <a:extLst>
               <a:ext uri="{FF2B5EF4-FFF2-40B4-BE49-F238E27FC236}">
-                <a16:creationId xmlns:a16="http://schemas.microsoft.com/office/drawing/2014/main" id="{57CB6684-B57C-4594-B5B8-F8D5B63B6593}"/>
+                <ns2:creationId id="{B77F173E-DC0D-45F7-9973-934A81C0260E}"/>
               </a:ext>
             </a:extLst>
+            <a:hlinkClick action="ppaction://media"/>
           </p:cNvPr>
           <p:cNvPicPr>
-            <a:picLocks xmlns:a="http://schemas.openxmlformats.org/drawingml/2006/main" noChangeAspect="1"/>
+            <a:picLocks noChangeAspect="1"/>
           </p:cNvPicPr>
-          <p:nvPr/>
+          <p:nvPr>
+            <a:videoFile r:link="rIdDemoVideo"/>
+            <p:extLst>
+              <p:ext uri="{DAA4B4D4-1D71-4841-9C3A-6FDE38B4F0EC}">
+                <p14:media r:embed="rIdDemoMedia"/>
+              </p:ext>
+            </p:extLst>
+          </p:nvPr>
         </p:nvPicPr>
         <p:blipFill>
-          <a:blip xmlns:r="http://schemas.openxmlformats.org/officeDocument/2006/relationships" xmlns:a="http://schemas.openxmlformats.org/drawingml/2006/main" r:embed="Rf3d26273013d4d6f"/>
-          <a:stretch xmlns:a="http://schemas.openxmlformats.org/drawingml/2006/main"/>
+          <a:blip r:embed="Ra2854df1e595417b"/>
+          <a:stretch/>
         </p:blipFill>
         <p:spPr>
-          <a:xfrm xmlns:a="http://schemas.openxmlformats.org/drawingml/2006/main">
+          <a:xfrm>
             <a:off x="1980973" y="1238250"/>
             <a:ext cx="2038804" cy="2952750"/>
           </a:xfrm>
-          <a:prstGeom xmlns:a="http://schemas.openxmlformats.org/drawingml/2006/main" prst="rect">
+          <a:prstGeom prst="rect">
             <a:avLst/>
           </a:prstGeom>
         </p:spPr>
@@ -31547,33 +31323,33 @@
       <p:sp>
         <p:nvSpPr>
           <p:cNvPr id="6" name="">
-            <a:extLst xmlns:a="http://schemas.openxmlformats.org/drawingml/2006/main">
+            <a:extLst>
               <a:ext uri="{FF2B5EF4-FFF2-40B4-BE49-F238E27FC236}">
-                <a16:creationId xmlns:a16="http://schemas.microsoft.com/office/drawing/2014/main" id="{F96F283B-74C9-4BE3-8F7F-F884F0D59057}"/>
+                <ns2:creationId id="{DCCBDB8D-9F0D-46F2-A804-2D052E8E34EA}"/>
               </a:ext>
             </a:extLst>
           </p:cNvPr>
           <p:cNvSpPr>
-            <a:spLocks xmlns:a="http://schemas.openxmlformats.org/drawingml/2006/main" noGrp="1"/>
+            <a:spLocks noGrp="1"/>
           </p:cNvSpPr>
           <p:nvPr/>
         </p:nvSpPr>
         <p:spPr>
-          <a:xfrm xmlns:a="http://schemas.openxmlformats.org/drawingml/2006/main">
+          <a:xfrm>
             <a:off x="5905500" y="1285875"/>
             <a:ext cx="2857500" cy="2095500"/>
           </a:xfrm>
-          <a:prstGeom xmlns:a="http://schemas.openxmlformats.org/drawingml/2006/main" prst="rect">
+          <a:prstGeom prst="rect">
             <a:avLst/>
           </a:prstGeom>
-          <a:noFill xmlns:a="http://schemas.openxmlformats.org/drawingml/2006/main"/>
-          <a:ln xmlns:a="http://schemas.openxmlformats.org/drawingml/2006/main" w="0">
+          <a:noFill/>
+          <a:ln w="0">
             <a:noFill/>
           </a:ln>
         </p:spPr>
         <p:txBody>
-          <a:bodyPr xmlns:a="http://schemas.openxmlformats.org/drawingml/2006/main"/>
-          <a:lstStyle xmlns:a="http://schemas.openxmlformats.org/drawingml/2006/main">
+          <a:bodyPr/>
+          <a:lstStyle>
             <a:defPPr>
               <a:defRPr sz="1425" b="0">
                 <a:solidFill>
@@ -31675,7 +31451,7 @@
               </a:defRPr>
             </a:lvl9pPr>
           </a:lstStyle>
-          <a:p xmlns:a="http://schemas.openxmlformats.org/drawingml/2006/main">
+          <a:p>
             <a:pPr>
               <a:defRPr sz="1425" b="0">
                 <a:solidFill>
@@ -31698,7 +31474,7 @@
               <a:t>00–10 입력·예시</a:t>
             </a:r>
           </a:p>
-          <a:p xmlns:a="http://schemas.openxmlformats.org/drawingml/2006/main">
+          <a:p>
             <a:pPr>
               <a:defRPr sz="1425" b="0">
                 <a:solidFill>
@@ -31721,7 +31497,7 @@
               <a:t>10–20 GET 요약</a:t>
             </a:r>
           </a:p>
-          <a:p xmlns:a="http://schemas.openxmlformats.org/drawingml/2006/main">
+          <a:p>
             <a:pPr>
               <a:defRPr sz="1425" b="0">
                 <a:solidFill>
@@ -31744,7 +31520,7 @@
               <a:t>20–35 객관식·OX·해설</a:t>
             </a:r>
           </a:p>
-          <a:p xmlns:a="http://schemas.openxmlformats.org/drawingml/2006/main">
+          <a:p>
             <a:pPr>
               <a:defRPr sz="1425" b="0">
                 <a:solidFill>
@@ -31767,7 +31543,7 @@
               <a:t>35–45 고정 결과·복귀</a:t>
             </a:r>
           </a:p>
-          <a:p xmlns:a="http://schemas.openxmlformats.org/drawingml/2006/main">
+          <a:p>
             <a:pPr>
               <a:defRPr sz="1425" b="0">
                 <a:solidFill>
@@ -31795,33 +31571,33 @@
       <p:sp>
         <p:nvSpPr>
           <p:cNvPr id="7" name="">
-            <a:extLst xmlns:a="http://schemas.openxmlformats.org/drawingml/2006/main">
+            <a:extLst>
               <a:ext uri="{FF2B5EF4-FFF2-40B4-BE49-F238E27FC236}">
-                <a16:creationId xmlns:a16="http://schemas.microsoft.com/office/drawing/2014/main" id="{0F75AB79-FFCC-47C8-B62F-AFC5F81F0F3B}"/>
+                <ns2:creationId id="{8F524EE4-CA34-40CD-AC5E-6C87612DBA65}"/>
               </a:ext>
             </a:extLst>
           </p:cNvPr>
           <p:cNvSpPr>
-            <a:spLocks xmlns:a="http://schemas.openxmlformats.org/drawingml/2006/main" noGrp="1"/>
+            <a:spLocks noGrp="1"/>
           </p:cNvSpPr>
           <p:nvPr/>
         </p:nvSpPr>
         <p:spPr>
-          <a:xfrm xmlns:a="http://schemas.openxmlformats.org/drawingml/2006/main">
+          <a:xfrm>
             <a:off x="381000" y="4238625"/>
             <a:ext cx="8382000" cy="523875"/>
           </a:xfrm>
-          <a:prstGeom xmlns:a="http://schemas.openxmlformats.org/drawingml/2006/main" prst="rect">
+          <a:prstGeom prst="rect">
             <a:avLst/>
           </a:prstGeom>
-          <a:noFill xmlns:a="http://schemas.openxmlformats.org/drawingml/2006/main"/>
-          <a:ln xmlns:a="http://schemas.openxmlformats.org/drawingml/2006/main" w="0">
+          <a:noFill/>
+          <a:ln w="0">
             <a:noFill/>
           </a:ln>
         </p:spPr>
         <p:txBody>
-          <a:bodyPr xmlns:a="http://schemas.openxmlformats.org/drawingml/2006/main"/>
-          <a:lstStyle xmlns:a="http://schemas.openxmlformats.org/drawingml/2006/main">
+          <a:bodyPr/>
+          <a:lstStyle>
             <a:defPPr>
               <a:defRPr sz="975" b="0">
                 <a:solidFill>
@@ -31923,7 +31699,7 @@
               </a:defRPr>
             </a:lvl9pPr>
           </a:lstStyle>
-          <a:p xmlns:a="http://schemas.openxmlformats.org/drawingml/2006/main">
+          <a:p>
             <a:pPr>
               <a:defRPr sz="975" b="0">
                 <a:solidFill>
@@ -31946,7 +31722,7 @@
               <a:t>docs/영상/demo_1min.mp4</a:t>
             </a:r>
           </a:p>
-          <a:p xmlns:a="http://schemas.openxmlformats.org/drawingml/2006/main">
+          <a:p>
             <a:pPr>
               <a:defRPr sz="975" b="0">
                 <a:solidFill>
@@ -31969,7 +31745,7 @@
               <a:t>실제 브라우저 캡처 편집본. 3상태는 위젯 테스트 캡처로 표시.</a:t>
             </a:r>
           </a:p>
-          <a:p xmlns:a="http://schemas.openxmlformats.org/drawingml/2006/main">
+          <a:p>
             <a:pPr>
               <a:defRPr sz="975" b="0">
                 <a:solidFill>
@@ -31997,7 +31773,7 @@
     </p:spTree>
     <p:extLst>
       <p:ext uri="{BB962C8B-B14F-4D97-AF65-F5344CB8AC3E}">
-        <p14:creationId xmlns:p14="http://schemas.microsoft.com/office/powerpoint/2010/main" val="816309094"/>
+        <p14:creationId val="816309094"/>
       </p:ext>
     </p:extLst>
   </p:cSld>
@@ -32028,7 +31804,7 @@
           <p:cNvPr id="7" name="">
             <a:extLst xmlns:a="http://schemas.openxmlformats.org/drawingml/2006/main">
               <a:ext uri="{FF2B5EF4-FFF2-40B4-BE49-F238E27FC236}">
-                <a16:creationId xmlns:a16="http://schemas.microsoft.com/office/drawing/2014/main" id="{814169AB-CD46-4429-984E-4C9C58ACB608}"/>
+                <a16:creationId xmlns:a16="http://schemas.microsoft.com/office/drawing/2014/main" id="{F94A011B-40CD-4C6B-B8B5-89E3CCC1E403}"/>
               </a:ext>
             </a:extLst>
           </p:cNvPr>
@@ -32184,7 +31960,7 @@
           <p:cNvPr id="2" name="">
             <a:extLst xmlns:a="http://schemas.openxmlformats.org/drawingml/2006/main">
               <a:ext uri="{FF2B5EF4-FFF2-40B4-BE49-F238E27FC236}">
-                <a16:creationId xmlns:a16="http://schemas.microsoft.com/office/drawing/2014/main" id="{9BFA4573-35F7-4BA4-B243-6D79CF32C01E}"/>
+                <a16:creationId xmlns:a16="http://schemas.microsoft.com/office/drawing/2014/main" id="{9CA7A88C-D249-43EE-87B3-8A681316C3B6}"/>
               </a:ext>
             </a:extLst>
           </p:cNvPr>
@@ -32340,7 +32116,7 @@
           <p:cNvPr id="3" name="">
             <a:extLst xmlns:a="http://schemas.openxmlformats.org/drawingml/2006/main">
               <a:ext uri="{FF2B5EF4-FFF2-40B4-BE49-F238E27FC236}">
-                <a16:creationId xmlns:a16="http://schemas.microsoft.com/office/drawing/2014/main" id="{23EC6B11-A73A-48E5-8825-D64A32A4C0A6}"/>
+                <a16:creationId xmlns:a16="http://schemas.microsoft.com/office/drawing/2014/main" id="{778DFCFA-D373-4FDC-A2CF-20B4E940389D}"/>
               </a:ext>
             </a:extLst>
           </p:cNvPr>
@@ -32467,25 +32243,7 @@
             </a:lvl9pPr>
           </a:lstStyle>
           <a:p xmlns:a="http://schemas.openxmlformats.org/drawingml/2006/main">
-            <a:pPr>
-              <a:defRPr sz="750" b="0">
-                <a:solidFill>
-                  <a:srgbClr val="657491"/>
-                </a:solidFill>
-                <a:latin typeface="Noto Sans KR"/>
-                <a:ea typeface="Noto Sans KR"/>
-                <a:cs typeface="Noto Sans KR"/>
-              </a:defRPr>
-            </a:pPr>
             <a:r>
-              <a:rPr sz="750" b="0">
-                <a:solidFill>
-                  <a:srgbClr val="657491"/>
-                </a:solidFill>
-                <a:latin typeface="Noto Sans KR"/>
-                <a:ea typeface="Noto Sans KR"/>
-                <a:cs typeface="Noto Sans KR"/>
-              </a:rPr>
               <a:t>NoteQuiz · zhaoboda 2025106293 · 08</a:t>
             </a:r>
           </a:p>
@@ -32496,7 +32254,7 @@
           <p:cNvPr id="4" name="">
             <a:extLst xmlns:a="http://schemas.openxmlformats.org/drawingml/2006/main">
               <a:ext uri="{FF2B5EF4-FFF2-40B4-BE49-F238E27FC236}">
-                <a16:creationId xmlns:a16="http://schemas.microsoft.com/office/drawing/2014/main" id="{8BAEC85A-B0B0-4F7E-B34E-13446C31CB73}"/>
+                <a16:creationId xmlns:a16="http://schemas.microsoft.com/office/drawing/2014/main" id="{34A9C047-721B-487B-8EC8-B49DFA029C2A}"/>
               </a:ext>
             </a:extLst>
           </p:cNvPr>
@@ -32652,7 +32410,7 @@
           <p:cNvPr id="5" name="">
             <a:extLst xmlns:a="http://schemas.openxmlformats.org/drawingml/2006/main">
               <a:ext uri="{FF2B5EF4-FFF2-40B4-BE49-F238E27FC236}">
-                <a16:creationId xmlns:a16="http://schemas.microsoft.com/office/drawing/2014/main" id="{BB45B66F-625B-474D-83DC-355E72E48F04}"/>
+                <a16:creationId xmlns:a16="http://schemas.microsoft.com/office/drawing/2014/main" id="{31AEBE05-8433-465F-9191-9508B693A33C}"/>
               </a:ext>
             </a:extLst>
           </p:cNvPr>
@@ -32808,7 +32566,7 @@
           <p:cNvPr id="6" name="">
             <a:extLst xmlns:a="http://schemas.openxmlformats.org/drawingml/2006/main">
               <a:ext uri="{FF2B5EF4-FFF2-40B4-BE49-F238E27FC236}">
-                <a16:creationId xmlns:a16="http://schemas.microsoft.com/office/drawing/2014/main" id="{1BB5689E-9FC8-43AB-B4A5-8CC0F52D7564}"/>
+                <a16:creationId xmlns:a16="http://schemas.microsoft.com/office/drawing/2014/main" id="{F1D5F818-66C6-4C7E-9409-59F08CA0377A}"/>
               </a:ext>
             </a:extLst>
           </p:cNvPr>
@@ -33090,7 +32848,7 @@
           <p:cNvPr id="5" name="">
             <a:extLst xmlns:a="http://schemas.openxmlformats.org/drawingml/2006/main">
               <a:ext uri="{FF2B5EF4-FFF2-40B4-BE49-F238E27FC236}">
-                <a16:creationId xmlns:a16="http://schemas.microsoft.com/office/drawing/2014/main" id="{C4D54182-A015-406D-8774-3F09C3CED2FB}"/>
+                <a16:creationId xmlns:a16="http://schemas.microsoft.com/office/drawing/2014/main" id="{A189996B-3A85-4B08-B4D7-2F1BEF5B7169}"/>
               </a:ext>
             </a:extLst>
           </p:cNvPr>
@@ -33246,7 +33004,7 @@
           <p:cNvPr id="2" name="">
             <a:extLst xmlns:a="http://schemas.openxmlformats.org/drawingml/2006/main">
               <a:ext uri="{FF2B5EF4-FFF2-40B4-BE49-F238E27FC236}">
-                <a16:creationId xmlns:a16="http://schemas.microsoft.com/office/drawing/2014/main" id="{E70A6551-B668-481D-8B07-81E387717198}"/>
+                <a16:creationId xmlns:a16="http://schemas.microsoft.com/office/drawing/2014/main" id="{4745F8B8-DD8F-4C88-8468-2EF93E7F885D}"/>
               </a:ext>
             </a:extLst>
           </p:cNvPr>
@@ -33402,7 +33160,7 @@
           <p:cNvPr id="3" name="">
             <a:extLst xmlns:a="http://schemas.openxmlformats.org/drawingml/2006/main">
               <a:ext uri="{FF2B5EF4-FFF2-40B4-BE49-F238E27FC236}">
-                <a16:creationId xmlns:a16="http://schemas.microsoft.com/office/drawing/2014/main" id="{25594BAE-7CE9-4AD0-9315-4541B807D384}"/>
+                <a16:creationId xmlns:a16="http://schemas.microsoft.com/office/drawing/2014/main" id="{EFB463E5-B516-4B2A-A72A-FDB07EA98135}"/>
               </a:ext>
             </a:extLst>
           </p:cNvPr>
@@ -33529,25 +33287,7 @@
             </a:lvl9pPr>
           </a:lstStyle>
           <a:p xmlns:a="http://schemas.openxmlformats.org/drawingml/2006/main">
-            <a:pPr>
-              <a:defRPr sz="750" b="0">
-                <a:solidFill>
-                  <a:srgbClr val="657491"/>
-                </a:solidFill>
-                <a:latin typeface="Noto Sans KR"/>
-                <a:ea typeface="Noto Sans KR"/>
-                <a:cs typeface="Noto Sans KR"/>
-              </a:defRPr>
-            </a:pPr>
             <a:r>
-              <a:rPr sz="750" b="0">
-                <a:solidFill>
-                  <a:srgbClr val="657491"/>
-                </a:solidFill>
-                <a:latin typeface="Noto Sans KR"/>
-                <a:ea typeface="Noto Sans KR"/>
-                <a:cs typeface="Noto Sans KR"/>
-              </a:rPr>
               <a:t>NoteQuiz · zhaoboda 2025106293 · 09</a:t>
             </a:r>
           </a:p>
@@ -33558,7 +33298,7 @@
           <p:cNvPr id="4" name="">
             <a:extLst xmlns:a="http://schemas.openxmlformats.org/drawingml/2006/main">
               <a:ext uri="{FF2B5EF4-FFF2-40B4-BE49-F238E27FC236}">
-                <a16:creationId xmlns:a16="http://schemas.microsoft.com/office/drawing/2014/main" id="{F29117E3-0B41-405C-8727-F850903D0B89}"/>
+                <a16:creationId xmlns:a16="http://schemas.microsoft.com/office/drawing/2014/main" id="{911994EC-5E59-4C2B-9200-97611FB41B89}"/>
               </a:ext>
             </a:extLst>
           </p:cNvPr>
